--- a/mavi_mes_presentation_v2.pptx
+++ b/mavi_mes_presentation_v2.pptx
@@ -5,18 +5,24 @@
     <p:sldMasterId id="2147483648" r:id="rId1"/>
   </p:sldMasterIdLst>
   <p:sldIdLst>
-    <p:sldId id="256" r:id="rId7"/>
-    <p:sldId id="257" r:id="rId8"/>
-    <p:sldId id="258" r:id="rId9"/>
-    <p:sldId id="259" r:id="rId10"/>
-    <p:sldId id="260" r:id="rId11"/>
-    <p:sldId id="261" r:id="rId12"/>
-    <p:sldId id="262" r:id="rId13"/>
-    <p:sldId id="263" r:id="rId14"/>
-    <p:sldId id="264" r:id="rId15"/>
-    <p:sldId id="265" r:id="rId16"/>
+    <p:sldId id="256" r:id="rId2"/>
+    <p:sldId id="269" r:id="rId3"/>
+    <p:sldId id="270" r:id="rId4"/>
+    <p:sldId id="271" r:id="rId5"/>
+    <p:sldId id="257" r:id="rId6"/>
+    <p:sldId id="258" r:id="rId7"/>
+    <p:sldId id="259" r:id="rId8"/>
+    <p:sldId id="260" r:id="rId9"/>
+    <p:sldId id="261" r:id="rId10"/>
+    <p:sldId id="262" r:id="rId11"/>
+    <p:sldId id="263" r:id="rId12"/>
+    <p:sldId id="264" r:id="rId13"/>
+    <p:sldId id="265" r:id="rId14"/>
+    <p:sldId id="266" r:id="rId15"/>
+    <p:sldId id="267" r:id="rId16"/>
+    <p:sldId id="268" r:id="rId17"/>
   </p:sldIdLst>
-  <p:sldSz cx="12188952" cy="6858000" type="screen4x3"/>
+  <p:sldSz cx="12188825" cy="6858000"/>
   <p:notesSz cx="6858000" cy="9144000"/>
   <p:defaultTextStyle>
     <a:defPPr>
@@ -113,6 +119,22 @@
       </a:defRPr>
     </a:lvl9pPr>
   </p:defaultTextStyle>
+  <p:extLst>
+    <p:ext uri="{EFAFB233-063F-42B5-8137-9DF3F51BA10A}">
+      <p15:sldGuideLst xmlns:p15="http://schemas.microsoft.com/office/powerpoint/2012/main">
+        <p15:guide id="1" orient="horz" pos="2160">
+          <p15:clr>
+            <a:srgbClr val="A4A3A4"/>
+          </p15:clr>
+        </p15:guide>
+        <p15:guide id="2" pos="2880">
+          <p15:clr>
+            <a:srgbClr val="A4A3A4"/>
+          </p15:clr>
+        </p15:guide>
+      </p15:sldGuideLst>
+    </p:ext>
+  </p:extLst>
 </p:presentation>
 </file>
 
@@ -154,10 +176,9 @@
           <a:lstStyle/>
           <a:p>
             <a:r>
-              <a:rPr lang="en-US" smtClean="0"/>
+              <a:rPr lang="en-US"/>
               <a:t>Click to edit Master title style</a:t>
             </a:r>
-            <a:endParaRPr lang="en-US"/>
           </a:p>
         </p:txBody>
       </p:sp>
@@ -273,10 +294,9 @@
           </a:lstStyle>
           <a:p>
             <a:r>
-              <a:rPr lang="en-US" smtClean="0"/>
+              <a:rPr lang="en-US"/>
               <a:t>Click to edit Master subtitle style</a:t>
             </a:r>
-            <a:endParaRPr lang="en-US"/>
           </a:p>
         </p:txBody>
       </p:sp>
@@ -297,7 +317,7 @@
           <a:p>
             <a:fld id="{5BCAD085-E8A6-8845-BD4E-CB4CCA059FC4}" type="datetimeFigureOut">
               <a:rPr lang="en-US" smtClean="0"/>
-              <a:t>1/27/13</a:t>
+              <a:t>5/19/2026</a:t>
             </a:fld>
             <a:endParaRPr lang="en-US"/>
           </a:p>
@@ -391,10 +411,9 @@
           <a:lstStyle/>
           <a:p>
             <a:r>
-              <a:rPr lang="en-US" smtClean="0"/>
+              <a:rPr lang="en-US"/>
               <a:t>Click to edit Master title style</a:t>
             </a:r>
-            <a:endParaRPr lang="en-US"/>
           </a:p>
         </p:txBody>
       </p:sp>
@@ -415,38 +434,37 @@
           <a:p>
             <a:pPr lvl="0"/>
             <a:r>
-              <a:rPr lang="en-US" smtClean="0"/>
+              <a:rPr lang="en-US"/>
               <a:t>Click to edit Master text styles</a:t>
             </a:r>
           </a:p>
           <a:p>
             <a:pPr lvl="1"/>
             <a:r>
-              <a:rPr lang="en-US" smtClean="0"/>
+              <a:rPr lang="en-US"/>
               <a:t>Second level</a:t>
             </a:r>
           </a:p>
           <a:p>
             <a:pPr lvl="2"/>
             <a:r>
-              <a:rPr lang="en-US" smtClean="0"/>
+              <a:rPr lang="en-US"/>
               <a:t>Third level</a:t>
             </a:r>
           </a:p>
           <a:p>
             <a:pPr lvl="3"/>
             <a:r>
-              <a:rPr lang="en-US" smtClean="0"/>
+              <a:rPr lang="en-US"/>
               <a:t>Fourth level</a:t>
             </a:r>
           </a:p>
           <a:p>
             <a:pPr lvl="4"/>
             <a:r>
-              <a:rPr lang="en-US" smtClean="0"/>
+              <a:rPr lang="en-US"/>
               <a:t>Fifth level</a:t>
             </a:r>
-            <a:endParaRPr lang="en-US"/>
           </a:p>
         </p:txBody>
       </p:sp>
@@ -467,7 +485,7 @@
           <a:p>
             <a:fld id="{5BCAD085-E8A6-8845-BD4E-CB4CCA059FC4}" type="datetimeFigureOut">
               <a:rPr lang="en-US" smtClean="0"/>
-              <a:t>1/27/13</a:t>
+              <a:t>5/19/2026</a:t>
             </a:fld>
             <a:endParaRPr lang="en-US"/>
           </a:p>
@@ -566,10 +584,9 @@
           <a:lstStyle/>
           <a:p>
             <a:r>
-              <a:rPr lang="en-US" smtClean="0"/>
+              <a:rPr lang="en-US"/>
               <a:t>Click to edit Master title style</a:t>
             </a:r>
-            <a:endParaRPr lang="en-US"/>
           </a:p>
         </p:txBody>
       </p:sp>
@@ -595,38 +612,37 @@
           <a:p>
             <a:pPr lvl="0"/>
             <a:r>
-              <a:rPr lang="en-US" smtClean="0"/>
+              <a:rPr lang="en-US"/>
               <a:t>Click to edit Master text styles</a:t>
             </a:r>
           </a:p>
           <a:p>
             <a:pPr lvl="1"/>
             <a:r>
-              <a:rPr lang="en-US" smtClean="0"/>
+              <a:rPr lang="en-US"/>
               <a:t>Second level</a:t>
             </a:r>
           </a:p>
           <a:p>
             <a:pPr lvl="2"/>
             <a:r>
-              <a:rPr lang="en-US" smtClean="0"/>
+              <a:rPr lang="en-US"/>
               <a:t>Third level</a:t>
             </a:r>
           </a:p>
           <a:p>
             <a:pPr lvl="3"/>
             <a:r>
-              <a:rPr lang="en-US" smtClean="0"/>
+              <a:rPr lang="en-US"/>
               <a:t>Fourth level</a:t>
             </a:r>
           </a:p>
           <a:p>
             <a:pPr lvl="4"/>
             <a:r>
-              <a:rPr lang="en-US" smtClean="0"/>
+              <a:rPr lang="en-US"/>
               <a:t>Fifth level</a:t>
             </a:r>
-            <a:endParaRPr lang="en-US"/>
           </a:p>
         </p:txBody>
       </p:sp>
@@ -647,7 +663,7 @@
           <a:p>
             <a:fld id="{5BCAD085-E8A6-8845-BD4E-CB4CCA059FC4}" type="datetimeFigureOut">
               <a:rPr lang="en-US" smtClean="0"/>
-              <a:t>1/27/13</a:t>
+              <a:t>5/19/2026</a:t>
             </a:fld>
             <a:endParaRPr lang="en-US"/>
           </a:p>
@@ -741,10 +757,9 @@
           <a:lstStyle/>
           <a:p>
             <a:r>
-              <a:rPr lang="en-US" smtClean="0"/>
+              <a:rPr lang="en-US"/>
               <a:t>Click to edit Master title style</a:t>
             </a:r>
-            <a:endParaRPr lang="en-US"/>
           </a:p>
         </p:txBody>
       </p:sp>
@@ -765,38 +780,37 @@
           <a:p>
             <a:pPr lvl="0"/>
             <a:r>
-              <a:rPr lang="en-US" smtClean="0"/>
+              <a:rPr lang="en-US"/>
               <a:t>Click to edit Master text styles</a:t>
             </a:r>
           </a:p>
           <a:p>
             <a:pPr lvl="1"/>
             <a:r>
-              <a:rPr lang="en-US" smtClean="0"/>
+              <a:rPr lang="en-US"/>
               <a:t>Second level</a:t>
             </a:r>
           </a:p>
           <a:p>
             <a:pPr lvl="2"/>
             <a:r>
-              <a:rPr lang="en-US" smtClean="0"/>
+              <a:rPr lang="en-US"/>
               <a:t>Third level</a:t>
             </a:r>
           </a:p>
           <a:p>
             <a:pPr lvl="3"/>
             <a:r>
-              <a:rPr lang="en-US" smtClean="0"/>
+              <a:rPr lang="en-US"/>
               <a:t>Fourth level</a:t>
             </a:r>
           </a:p>
           <a:p>
             <a:pPr lvl="4"/>
             <a:r>
-              <a:rPr lang="en-US" smtClean="0"/>
+              <a:rPr lang="en-US"/>
               <a:t>Fifth level</a:t>
             </a:r>
-            <a:endParaRPr lang="en-US"/>
           </a:p>
         </p:txBody>
       </p:sp>
@@ -817,7 +831,7 @@
           <a:p>
             <a:fld id="{5BCAD085-E8A6-8845-BD4E-CB4CCA059FC4}" type="datetimeFigureOut">
               <a:rPr lang="en-US" smtClean="0"/>
-              <a:t>1/27/13</a:t>
+              <a:t>5/19/2026</a:t>
             </a:fld>
             <a:endParaRPr lang="en-US"/>
           </a:p>
@@ -920,10 +934,9 @@
           </a:lstStyle>
           <a:p>
             <a:r>
-              <a:rPr lang="en-US" smtClean="0"/>
+              <a:rPr lang="en-US"/>
               <a:t>Click to edit Master title style</a:t>
             </a:r>
-            <a:endParaRPr lang="en-US"/>
           </a:p>
         </p:txBody>
       </p:sp>
@@ -1040,7 +1053,7 @@
           <a:p>
             <a:pPr lvl="0"/>
             <a:r>
-              <a:rPr lang="en-US" smtClean="0"/>
+              <a:rPr lang="en-US"/>
               <a:t>Click to edit Master text styles</a:t>
             </a:r>
           </a:p>
@@ -1063,7 +1076,7 @@
           <a:p>
             <a:fld id="{5BCAD085-E8A6-8845-BD4E-CB4CCA059FC4}" type="datetimeFigureOut">
               <a:rPr lang="en-US" smtClean="0"/>
-              <a:t>1/27/13</a:t>
+              <a:t>5/19/2026</a:t>
             </a:fld>
             <a:endParaRPr lang="en-US"/>
           </a:p>
@@ -1157,10 +1170,9 @@
           <a:lstStyle/>
           <a:p>
             <a:r>
-              <a:rPr lang="en-US" smtClean="0"/>
+              <a:rPr lang="en-US"/>
               <a:t>Click to edit Master title style</a:t>
             </a:r>
-            <a:endParaRPr lang="en-US"/>
           </a:p>
         </p:txBody>
       </p:sp>
@@ -1214,38 +1226,37 @@
           <a:p>
             <a:pPr lvl="0"/>
             <a:r>
-              <a:rPr lang="en-US" smtClean="0"/>
+              <a:rPr lang="en-US"/>
               <a:t>Click to edit Master text styles</a:t>
             </a:r>
           </a:p>
           <a:p>
             <a:pPr lvl="1"/>
             <a:r>
-              <a:rPr lang="en-US" smtClean="0"/>
+              <a:rPr lang="en-US"/>
               <a:t>Second level</a:t>
             </a:r>
           </a:p>
           <a:p>
             <a:pPr lvl="2"/>
             <a:r>
-              <a:rPr lang="en-US" smtClean="0"/>
+              <a:rPr lang="en-US"/>
               <a:t>Third level</a:t>
             </a:r>
           </a:p>
           <a:p>
             <a:pPr lvl="3"/>
             <a:r>
-              <a:rPr lang="en-US" smtClean="0"/>
+              <a:rPr lang="en-US"/>
               <a:t>Fourth level</a:t>
             </a:r>
           </a:p>
           <a:p>
             <a:pPr lvl="4"/>
             <a:r>
-              <a:rPr lang="en-US" smtClean="0"/>
+              <a:rPr lang="en-US"/>
               <a:t>Fifth level</a:t>
             </a:r>
-            <a:endParaRPr lang="en-US"/>
           </a:p>
         </p:txBody>
       </p:sp>
@@ -1299,38 +1310,37 @@
           <a:p>
             <a:pPr lvl="0"/>
             <a:r>
-              <a:rPr lang="en-US" smtClean="0"/>
+              <a:rPr lang="en-US"/>
               <a:t>Click to edit Master text styles</a:t>
             </a:r>
           </a:p>
           <a:p>
             <a:pPr lvl="1"/>
             <a:r>
-              <a:rPr lang="en-US" smtClean="0"/>
+              <a:rPr lang="en-US"/>
               <a:t>Second level</a:t>
             </a:r>
           </a:p>
           <a:p>
             <a:pPr lvl="2"/>
             <a:r>
-              <a:rPr lang="en-US" smtClean="0"/>
+              <a:rPr lang="en-US"/>
               <a:t>Third level</a:t>
             </a:r>
           </a:p>
           <a:p>
             <a:pPr lvl="3"/>
             <a:r>
-              <a:rPr lang="en-US" smtClean="0"/>
+              <a:rPr lang="en-US"/>
               <a:t>Fourth level</a:t>
             </a:r>
           </a:p>
           <a:p>
             <a:pPr lvl="4"/>
             <a:r>
-              <a:rPr lang="en-US" smtClean="0"/>
+              <a:rPr lang="en-US"/>
               <a:t>Fifth level</a:t>
             </a:r>
-            <a:endParaRPr lang="en-US"/>
           </a:p>
         </p:txBody>
       </p:sp>
@@ -1351,7 +1361,7 @@
           <a:p>
             <a:fld id="{5BCAD085-E8A6-8845-BD4E-CB4CCA059FC4}" type="datetimeFigureOut">
               <a:rPr lang="en-US" smtClean="0"/>
-              <a:t>1/27/13</a:t>
+              <a:t>5/19/2026</a:t>
             </a:fld>
             <a:endParaRPr lang="en-US"/>
           </a:p>
@@ -1449,10 +1459,9 @@
           </a:lstStyle>
           <a:p>
             <a:r>
-              <a:rPr lang="en-US" smtClean="0"/>
+              <a:rPr lang="en-US"/>
               <a:t>Click to edit Master title style</a:t>
             </a:r>
-            <a:endParaRPr lang="en-US"/>
           </a:p>
         </p:txBody>
       </p:sp>
@@ -1515,7 +1524,7 @@
           <a:p>
             <a:pPr lvl="0"/>
             <a:r>
-              <a:rPr lang="en-US" smtClean="0"/>
+              <a:rPr lang="en-US"/>
               <a:t>Click to edit Master text styles</a:t>
             </a:r>
           </a:p>
@@ -1571,38 +1580,37 @@
           <a:p>
             <a:pPr lvl="0"/>
             <a:r>
-              <a:rPr lang="en-US" smtClean="0"/>
+              <a:rPr lang="en-US"/>
               <a:t>Click to edit Master text styles</a:t>
             </a:r>
           </a:p>
           <a:p>
             <a:pPr lvl="1"/>
             <a:r>
-              <a:rPr lang="en-US" smtClean="0"/>
+              <a:rPr lang="en-US"/>
               <a:t>Second level</a:t>
             </a:r>
           </a:p>
           <a:p>
             <a:pPr lvl="2"/>
             <a:r>
-              <a:rPr lang="en-US" smtClean="0"/>
+              <a:rPr lang="en-US"/>
               <a:t>Third level</a:t>
             </a:r>
           </a:p>
           <a:p>
             <a:pPr lvl="3"/>
             <a:r>
-              <a:rPr lang="en-US" smtClean="0"/>
+              <a:rPr lang="en-US"/>
               <a:t>Fourth level</a:t>
             </a:r>
           </a:p>
           <a:p>
             <a:pPr lvl="4"/>
             <a:r>
-              <a:rPr lang="en-US" smtClean="0"/>
+              <a:rPr lang="en-US"/>
               <a:t>Fifth level</a:t>
             </a:r>
-            <a:endParaRPr lang="en-US"/>
           </a:p>
         </p:txBody>
       </p:sp>
@@ -1665,7 +1673,7 @@
           <a:p>
             <a:pPr lvl="0"/>
             <a:r>
-              <a:rPr lang="en-US" smtClean="0"/>
+              <a:rPr lang="en-US"/>
               <a:t>Click to edit Master text styles</a:t>
             </a:r>
           </a:p>
@@ -1721,38 +1729,37 @@
           <a:p>
             <a:pPr lvl="0"/>
             <a:r>
-              <a:rPr lang="en-US" smtClean="0"/>
+              <a:rPr lang="en-US"/>
               <a:t>Click to edit Master text styles</a:t>
             </a:r>
           </a:p>
           <a:p>
             <a:pPr lvl="1"/>
             <a:r>
-              <a:rPr lang="en-US" smtClean="0"/>
+              <a:rPr lang="en-US"/>
               <a:t>Second level</a:t>
             </a:r>
           </a:p>
           <a:p>
             <a:pPr lvl="2"/>
             <a:r>
-              <a:rPr lang="en-US" smtClean="0"/>
+              <a:rPr lang="en-US"/>
               <a:t>Third level</a:t>
             </a:r>
           </a:p>
           <a:p>
             <a:pPr lvl="3"/>
             <a:r>
-              <a:rPr lang="en-US" smtClean="0"/>
+              <a:rPr lang="en-US"/>
               <a:t>Fourth level</a:t>
             </a:r>
           </a:p>
           <a:p>
             <a:pPr lvl="4"/>
             <a:r>
-              <a:rPr lang="en-US" smtClean="0"/>
+              <a:rPr lang="en-US"/>
               <a:t>Fifth level</a:t>
             </a:r>
-            <a:endParaRPr lang="en-US"/>
           </a:p>
         </p:txBody>
       </p:sp>
@@ -1773,7 +1780,7 @@
           <a:p>
             <a:fld id="{5BCAD085-E8A6-8845-BD4E-CB4CCA059FC4}" type="datetimeFigureOut">
               <a:rPr lang="en-US" smtClean="0"/>
-              <a:t>1/27/13</a:t>
+              <a:t>5/19/2026</a:t>
             </a:fld>
             <a:endParaRPr lang="en-US"/>
           </a:p>
@@ -1867,10 +1874,9 @@
           <a:lstStyle/>
           <a:p>
             <a:r>
-              <a:rPr lang="en-US" smtClean="0"/>
+              <a:rPr lang="en-US"/>
               <a:t>Click to edit Master title style</a:t>
             </a:r>
-            <a:endParaRPr lang="en-US"/>
           </a:p>
         </p:txBody>
       </p:sp>
@@ -1891,7 +1897,7 @@
           <a:p>
             <a:fld id="{5BCAD085-E8A6-8845-BD4E-CB4CCA059FC4}" type="datetimeFigureOut">
               <a:rPr lang="en-US" smtClean="0"/>
-              <a:t>1/27/13</a:t>
+              <a:t>5/19/2026</a:t>
             </a:fld>
             <a:endParaRPr lang="en-US"/>
           </a:p>
@@ -1986,7 +1992,7 @@
           <a:p>
             <a:fld id="{5BCAD085-E8A6-8845-BD4E-CB4CCA059FC4}" type="datetimeFigureOut">
               <a:rPr lang="en-US" smtClean="0"/>
-              <a:t>1/27/13</a:t>
+              <a:t>5/19/2026</a:t>
             </a:fld>
             <a:endParaRPr lang="en-US"/>
           </a:p>
@@ -2089,10 +2095,9 @@
           </a:lstStyle>
           <a:p>
             <a:r>
-              <a:rPr lang="en-US" smtClean="0"/>
+              <a:rPr lang="en-US"/>
               <a:t>Click to edit Master title style</a:t>
             </a:r>
-            <a:endParaRPr lang="en-US"/>
           </a:p>
         </p:txBody>
       </p:sp>
@@ -2146,38 +2151,37 @@
           <a:p>
             <a:pPr lvl="0"/>
             <a:r>
-              <a:rPr lang="en-US" smtClean="0"/>
+              <a:rPr lang="en-US"/>
               <a:t>Click to edit Master text styles</a:t>
             </a:r>
           </a:p>
           <a:p>
             <a:pPr lvl="1"/>
             <a:r>
-              <a:rPr lang="en-US" smtClean="0"/>
+              <a:rPr lang="en-US"/>
               <a:t>Second level</a:t>
             </a:r>
           </a:p>
           <a:p>
             <a:pPr lvl="2"/>
             <a:r>
-              <a:rPr lang="en-US" smtClean="0"/>
+              <a:rPr lang="en-US"/>
               <a:t>Third level</a:t>
             </a:r>
           </a:p>
           <a:p>
             <a:pPr lvl="3"/>
             <a:r>
-              <a:rPr lang="en-US" smtClean="0"/>
+              <a:rPr lang="en-US"/>
               <a:t>Fourth level</a:t>
             </a:r>
           </a:p>
           <a:p>
             <a:pPr lvl="4"/>
             <a:r>
-              <a:rPr lang="en-US" smtClean="0"/>
+              <a:rPr lang="en-US"/>
               <a:t>Fifth level</a:t>
             </a:r>
-            <a:endParaRPr lang="en-US"/>
           </a:p>
         </p:txBody>
       </p:sp>
@@ -2240,7 +2244,7 @@
           <a:p>
             <a:pPr lvl="0"/>
             <a:r>
-              <a:rPr lang="en-US" smtClean="0"/>
+              <a:rPr lang="en-US"/>
               <a:t>Click to edit Master text styles</a:t>
             </a:r>
           </a:p>
@@ -2263,7 +2267,7 @@
           <a:p>
             <a:fld id="{5BCAD085-E8A6-8845-BD4E-CB4CCA059FC4}" type="datetimeFigureOut">
               <a:rPr lang="en-US" smtClean="0"/>
-              <a:t>1/27/13</a:t>
+              <a:t>5/19/2026</a:t>
             </a:fld>
             <a:endParaRPr lang="en-US"/>
           </a:p>
@@ -2366,10 +2370,9 @@
           </a:lstStyle>
           <a:p>
             <a:r>
-              <a:rPr lang="en-US" smtClean="0"/>
+              <a:rPr lang="en-US"/>
               <a:t>Click to edit Master title style</a:t>
             </a:r>
-            <a:endParaRPr lang="en-US"/>
           </a:p>
         </p:txBody>
       </p:sp>
@@ -2493,7 +2496,7 @@
           <a:p>
             <a:pPr lvl="0"/>
             <a:r>
-              <a:rPr lang="en-US" smtClean="0"/>
+              <a:rPr lang="en-US"/>
               <a:t>Click to edit Master text styles</a:t>
             </a:r>
           </a:p>
@@ -2516,7 +2519,7 @@
           <a:p>
             <a:fld id="{5BCAD085-E8A6-8845-BD4E-CB4CCA059FC4}" type="datetimeFigureOut">
               <a:rPr lang="en-US" smtClean="0"/>
-              <a:t>1/27/13</a:t>
+              <a:t>5/19/2026</a:t>
             </a:fld>
             <a:endParaRPr lang="en-US"/>
           </a:p>
@@ -2625,10 +2628,9 @@
           <a:lstStyle/>
           <a:p>
             <a:r>
-              <a:rPr lang="en-US" smtClean="0"/>
+              <a:rPr lang="en-US"/>
               <a:t>Click to edit Master title style</a:t>
             </a:r>
-            <a:endParaRPr lang="en-US"/>
           </a:p>
         </p:txBody>
       </p:sp>
@@ -2659,38 +2661,37 @@
           <a:p>
             <a:pPr lvl="0"/>
             <a:r>
-              <a:rPr lang="en-US" smtClean="0"/>
+              <a:rPr lang="en-US"/>
               <a:t>Click to edit Master text styles</a:t>
             </a:r>
           </a:p>
           <a:p>
             <a:pPr lvl="1"/>
             <a:r>
-              <a:rPr lang="en-US" smtClean="0"/>
+              <a:rPr lang="en-US"/>
               <a:t>Second level</a:t>
             </a:r>
           </a:p>
           <a:p>
             <a:pPr lvl="2"/>
             <a:r>
-              <a:rPr lang="en-US" smtClean="0"/>
+              <a:rPr lang="en-US"/>
               <a:t>Third level</a:t>
             </a:r>
           </a:p>
           <a:p>
             <a:pPr lvl="3"/>
             <a:r>
-              <a:rPr lang="en-US" smtClean="0"/>
+              <a:rPr lang="en-US"/>
               <a:t>Fourth level</a:t>
             </a:r>
           </a:p>
           <a:p>
             <a:pPr lvl="4"/>
             <a:r>
-              <a:rPr lang="en-US" smtClean="0"/>
+              <a:rPr lang="en-US"/>
               <a:t>Fifth level</a:t>
             </a:r>
-            <a:endParaRPr lang="en-US"/>
           </a:p>
         </p:txBody>
       </p:sp>
@@ -2729,7 +2730,7 @@
           <a:p>
             <a:fld id="{5BCAD085-E8A6-8845-BD4E-CB4CCA059FC4}" type="datetimeFigureOut">
               <a:rPr lang="en-US" smtClean="0"/>
-              <a:t>1/27/13</a:t>
+              <a:t>5/19/2026</a:t>
             </a:fld>
             <a:endParaRPr lang="en-US"/>
           </a:p>
@@ -3088,7 +3089,7 @@
 </file>
 
 <file path=ppt/slides/slide1.xml><?xml version="1.0" encoding="utf-8"?>
-<p:sld xmlns:a="http://schemas.openxmlformats.org/drawingml/2006/main" xmlns:p="http://schemas.openxmlformats.org/presentationml/2006/main" xmlns:r="http://schemas.openxmlformats.org/officeDocument/2006/relationships">
+<p:sld xmlns:a="http://schemas.openxmlformats.org/drawingml/2006/main" xmlns:r="http://schemas.openxmlformats.org/officeDocument/2006/relationships" xmlns:p="http://schemas.openxmlformats.org/presentationml/2006/main">
   <p:cSld>
     <p:bg>
       <p:bgPr>
@@ -3104,7 +3105,14 @@
         <p:cNvGrpSpPr/>
         <p:nvPr/>
       </p:nvGrpSpPr>
-      <p:grpSpPr/>
+      <p:grpSpPr>
+        <a:xfrm>
+          <a:off x="0" y="0"/>
+          <a:ext cx="0" cy="0"/>
+          <a:chOff x="0" y="0"/>
+          <a:chExt cx="0" cy="0"/>
+        </a:xfrm>
+      </p:grpSpPr>
       <p:sp>
         <p:nvSpPr>
           <p:cNvPr id="2" name="TextBox 1"/>
@@ -3182,7 +3190,3030 @@
 </file>
 
 <file path=ppt/slides/slide10.xml><?xml version="1.0" encoding="utf-8"?>
-<p:sld xmlns:a="http://schemas.openxmlformats.org/drawingml/2006/main" xmlns:p="http://schemas.openxmlformats.org/presentationml/2006/main" xmlns:r="http://schemas.openxmlformats.org/officeDocument/2006/relationships">
+<p:sld xmlns:a="http://schemas.openxmlformats.org/drawingml/2006/main" xmlns:r="http://schemas.openxmlformats.org/officeDocument/2006/relationships" xmlns:p="http://schemas.openxmlformats.org/presentationml/2006/main">
+  <p:cSld>
+    <p:bg>
+      <p:bgPr>
+        <a:solidFill>
+          <a:srgbClr val="FFFFFF"/>
+        </a:solidFill>
+        <a:effectLst/>
+      </p:bgPr>
+    </p:bg>
+    <p:spTree>
+      <p:nvGrpSpPr>
+        <p:cNvPr id="1" name=""/>
+        <p:cNvGrpSpPr/>
+        <p:nvPr/>
+      </p:nvGrpSpPr>
+      <p:grpSpPr>
+        <a:xfrm>
+          <a:off x="0" y="0"/>
+          <a:ext cx="0" cy="0"/>
+          <a:chOff x="0" y="0"/>
+          <a:chExt cx="0" cy="0"/>
+        </a:xfrm>
+      </p:grpSpPr>
+      <p:sp>
+        <p:nvSpPr>
+          <p:cNvPr id="2" name="TextBox 1"/>
+          <p:cNvSpPr txBox="1"/>
+          <p:nvPr/>
+        </p:nvSpPr>
+        <p:spPr>
+          <a:xfrm>
+            <a:off x="731520" y="365760"/>
+            <a:ext cx="10725912" cy="365760"/>
+          </a:xfrm>
+          <a:prstGeom prst="rect">
+            <a:avLst/>
+          </a:prstGeom>
+          <a:noFill/>
+        </p:spPr>
+        <p:txBody>
+          <a:bodyPr wrap="square">
+            <a:spAutoFit/>
+          </a:bodyPr>
+          <a:lstStyle/>
+          <a:p>
+            <a:pPr>
+              <a:defRPr sz="1000" b="1">
+                <a:solidFill>
+                  <a:srgbClr val="0D9488"/>
+                </a:solidFill>
+                <a:latin typeface="Arial"/>
+              </a:defRPr>
+            </a:pPr>
+            <a:r>
+              <a:t>PILLAR 4: OPERATIONS ANALYTICS</a:t>
+            </a:r>
+          </a:p>
+        </p:txBody>
+      </p:sp>
+      <p:sp>
+        <p:nvSpPr>
+          <p:cNvPr id="3" name="TextBox 2"/>
+          <p:cNvSpPr txBox="1"/>
+          <p:nvPr/>
+        </p:nvSpPr>
+        <p:spPr>
+          <a:xfrm>
+            <a:off x="731520" y="640080"/>
+            <a:ext cx="10725912" cy="731520"/>
+          </a:xfrm>
+          <a:prstGeom prst="rect">
+            <a:avLst/>
+          </a:prstGeom>
+          <a:noFill/>
+        </p:spPr>
+        <p:txBody>
+          <a:bodyPr wrap="square">
+            <a:spAutoFit/>
+          </a:bodyPr>
+          <a:lstStyle/>
+          <a:p>
+            <a:pPr>
+              <a:defRPr sz="2800" b="1">
+                <a:solidFill>
+                  <a:srgbClr val="0F172A"/>
+                </a:solidFill>
+                <a:latin typeface="Arial"/>
+              </a:defRPr>
+            </a:pPr>
+            <a:r>
+              <a:t>5. Dasbor Analitik OEE &amp; Kinerja Pabrik</a:t>
+            </a:r>
+          </a:p>
+        </p:txBody>
+      </p:sp>
+      <p:sp>
+        <p:nvSpPr>
+          <p:cNvPr id="4" name="TextBox 3"/>
+          <p:cNvSpPr txBox="1"/>
+          <p:nvPr/>
+        </p:nvSpPr>
+        <p:spPr>
+          <a:xfrm>
+            <a:off x="731520" y="1828800"/>
+            <a:ext cx="5029200" cy="4114800"/>
+          </a:xfrm>
+          <a:prstGeom prst="rect">
+            <a:avLst/>
+          </a:prstGeom>
+          <a:noFill/>
+        </p:spPr>
+        <p:txBody>
+          <a:bodyPr wrap="square">
+            <a:spAutoFit/>
+          </a:bodyPr>
+          <a:lstStyle/>
+          <a:p>
+            <a:pPr>
+              <a:spcAft>
+                <a:spcPts val="1200"/>
+              </a:spcAft>
+              <a:defRPr sz="2000" b="1">
+                <a:solidFill>
+                  <a:srgbClr val="0F172A"/>
+                </a:solidFill>
+                <a:latin typeface="Arial"/>
+              </a:defRPr>
+            </a:pPr>
+            <a:r>
+              <a:t>Wawasan Real-Time untuk Keputusan Tepat</a:t>
+            </a:r>
+          </a:p>
+          <a:p>
+            <a:pPr>
+              <a:lnSpc>
+                <a:spcPct val="120000"/>
+              </a:lnSpc>
+              <a:spcAft>
+                <a:spcPts val="1200"/>
+              </a:spcAft>
+              <a:defRPr sz="1300">
+                <a:solidFill>
+                  <a:srgbClr val="1E293B"/>
+                </a:solidFill>
+                <a:latin typeface="Arial"/>
+              </a:defRPr>
+            </a:pPr>
+            <a:r>
+              <a:t>• Inventory Dashboard: Memantau durasi penyelesaian loop pengisian material, membantu optimasi logistik tangkas pabrik.</a:t>
+            </a:r>
+          </a:p>
+          <a:p>
+            <a:pPr>
+              <a:lnSpc>
+                <a:spcPct val="120000"/>
+              </a:lnSpc>
+              <a:spcAft>
+                <a:spcPts val="1200"/>
+              </a:spcAft>
+              <a:defRPr sz="1300">
+                <a:solidFill>
+                  <a:srgbClr val="1E293B"/>
+                </a:solidFill>
+                <a:latin typeface="Arial"/>
+              </a:defRPr>
+            </a:pPr>
+            <a:r>
+              <a:t>• Operations Management Dashboard: Mengonsolidasikan OEE stasiun kerja secara langsung, grafik volume produksi per jam, dan rasio kualitas.</a:t>
+            </a:r>
+          </a:p>
+          <a:p>
+            <a:pPr>
+              <a:lnSpc>
+                <a:spcPct val="120000"/>
+              </a:lnSpc>
+              <a:spcAft>
+                <a:spcPts val="1200"/>
+              </a:spcAft>
+              <a:defRPr sz="1300">
+                <a:solidFill>
+                  <a:srgbClr val="1E293B"/>
+                </a:solidFill>
+                <a:latin typeface="Arial"/>
+              </a:defRPr>
+            </a:pPr>
+            <a:r>
+              <a:t>• Downtime &amp; Defect Analytics: Memetakan sebaran penyebab terhentinya produksi (Andon) dan pola defect kualitas terbanyak.</a:t>
+            </a:r>
+          </a:p>
+        </p:txBody>
+      </p:sp>
+      <p:sp>
+        <p:nvSpPr>
+          <p:cNvPr id="5" name="TextBox 4"/>
+          <p:cNvSpPr txBox="1"/>
+          <p:nvPr/>
+        </p:nvSpPr>
+        <p:spPr>
+          <a:xfrm>
+            <a:off x="6217920" y="1828800"/>
+            <a:ext cx="5212080" cy="4114800"/>
+          </a:xfrm>
+          <a:prstGeom prst="rect">
+            <a:avLst/>
+          </a:prstGeom>
+          <a:noFill/>
+        </p:spPr>
+        <p:txBody>
+          <a:bodyPr wrap="square">
+            <a:spAutoFit/>
+          </a:bodyPr>
+          <a:lstStyle/>
+          <a:p>
+            <a:pPr>
+              <a:spcAft>
+                <a:spcPts val="1000"/>
+              </a:spcAft>
+              <a:defRPr sz="1400" b="1">
+                <a:solidFill>
+                  <a:srgbClr val="0D9488"/>
+                </a:solidFill>
+                <a:latin typeface="Arial"/>
+              </a:defRPr>
+            </a:pPr>
+            <a:r>
+              <a:t>OPTIMASI PROSES PABRIK</a:t>
+            </a:r>
+          </a:p>
+          <a:p>
+            <a:pPr>
+              <a:spcAft>
+                <a:spcPts val="1500"/>
+              </a:spcAft>
+              <a:defRPr sz="1200" b="1">
+                <a:solidFill>
+                  <a:srgbClr val="0F172A"/>
+                </a:solidFill>
+                <a:latin typeface="Courier New"/>
+              </a:defRPr>
+            </a:pPr>
+            <a:r>
+              <a:t>Sumber Data Analitik Terpadu:</a:t>
+            </a:r>
+            <a:br/>
+            <a:r>
+              <a:t>• Station_Activity_History: Sejarah waktu jalan/downtime mesin.</a:t>
+            </a:r>
+            <a:br/>
+            <a:r>
+              <a:t>• Material_Requests: Durasi loop replenishment.</a:t>
+            </a:r>
+            <a:br/>
+            <a:r>
+              <a:t>• Production_Counts: Metrik volume per shift.</a:t>
+            </a:r>
+          </a:p>
+          <a:p>
+            <a:pPr>
+              <a:defRPr sz="1300">
+                <a:latin typeface="Arial"/>
+              </a:defRPr>
+            </a:pPr>
+            <a:r>
+              <a:t>💡 Value Creation:</a:t>
+            </a:r>
+            <a:br/>
+            <a:r>
+              <a:t>Manajer dapat mengidentifikasi stasiun dengan downtime tertinggi dan membandingkannya dengan deviasi QMS aktif untuk perbaikan berkelanjutan (Kaizen).</a:t>
+            </a:r>
+          </a:p>
+        </p:txBody>
+      </p:sp>
+    </p:spTree>
+  </p:cSld>
+  <p:clrMapOvr>
+    <a:masterClrMapping/>
+  </p:clrMapOvr>
+</p:sld>
+</file>
+
+<file path=ppt/slides/slide11.xml><?xml version="1.0" encoding="utf-8"?>
+<p:sld xmlns:a="http://schemas.openxmlformats.org/drawingml/2006/main" xmlns:r="http://schemas.openxmlformats.org/officeDocument/2006/relationships" xmlns:p="http://schemas.openxmlformats.org/presentationml/2006/main">
+  <p:cSld>
+    <p:bg>
+      <p:bgPr>
+        <a:solidFill>
+          <a:srgbClr val="FFFFFF"/>
+        </a:solidFill>
+        <a:effectLst/>
+      </p:bgPr>
+    </p:bg>
+    <p:spTree>
+      <p:nvGrpSpPr>
+        <p:cNvPr id="1" name=""/>
+        <p:cNvGrpSpPr/>
+        <p:nvPr/>
+      </p:nvGrpSpPr>
+      <p:grpSpPr>
+        <a:xfrm>
+          <a:off x="0" y="0"/>
+          <a:ext cx="0" cy="0"/>
+          <a:chOff x="0" y="0"/>
+          <a:chExt cx="0" cy="0"/>
+        </a:xfrm>
+      </p:grpSpPr>
+      <p:sp>
+        <p:nvSpPr>
+          <p:cNvPr id="2" name="TextBox 1"/>
+          <p:cNvSpPr txBox="1"/>
+          <p:nvPr/>
+        </p:nvSpPr>
+        <p:spPr>
+          <a:xfrm>
+            <a:off x="731520" y="365760"/>
+            <a:ext cx="10725912" cy="365760"/>
+          </a:xfrm>
+          <a:prstGeom prst="rect">
+            <a:avLst/>
+          </a:prstGeom>
+          <a:noFill/>
+        </p:spPr>
+        <p:txBody>
+          <a:bodyPr wrap="square">
+            <a:spAutoFit/>
+          </a:bodyPr>
+          <a:lstStyle/>
+          <a:p>
+            <a:pPr>
+              <a:defRPr sz="1000" b="1">
+                <a:solidFill>
+                  <a:srgbClr val="0D9488"/>
+                </a:solidFill>
+                <a:latin typeface="Arial"/>
+              </a:defRPr>
+            </a:pPr>
+            <a:r>
+              <a:t>PILLAR 5: DEPLOYMENT PLAN</a:t>
+            </a:r>
+          </a:p>
+        </p:txBody>
+      </p:sp>
+      <p:sp>
+        <p:nvSpPr>
+          <p:cNvPr id="3" name="TextBox 2"/>
+          <p:cNvSpPr txBox="1"/>
+          <p:nvPr/>
+        </p:nvSpPr>
+        <p:spPr>
+          <a:xfrm>
+            <a:off x="731520" y="640080"/>
+            <a:ext cx="10725912" cy="731520"/>
+          </a:xfrm>
+          <a:prstGeom prst="rect">
+            <a:avLst/>
+          </a:prstGeom>
+          <a:noFill/>
+        </p:spPr>
+        <p:txBody>
+          <a:bodyPr wrap="square">
+            <a:spAutoFit/>
+          </a:bodyPr>
+          <a:lstStyle/>
+          <a:p>
+            <a:pPr>
+              <a:defRPr sz="2800" b="1">
+                <a:solidFill>
+                  <a:srgbClr val="0F172A"/>
+                </a:solidFill>
+                <a:latin typeface="Arial"/>
+              </a:defRPr>
+            </a:pPr>
+            <a:r>
+              <a:t>Urutan Instalasi &amp; Panduan Dependensi Suite</a:t>
+            </a:r>
+          </a:p>
+        </p:txBody>
+      </p:sp>
+      <p:sp>
+        <p:nvSpPr>
+          <p:cNvPr id="4" name="Rounded Rectangle 3"/>
+          <p:cNvSpPr/>
+          <p:nvPr/>
+        </p:nvSpPr>
+        <p:spPr>
+          <a:xfrm>
+            <a:off x="731520" y="2011680"/>
+            <a:ext cx="2377440" cy="4206240"/>
+          </a:xfrm>
+          <a:prstGeom prst="roundRect">
+            <a:avLst/>
+          </a:prstGeom>
+          <a:solidFill>
+            <a:srgbClr val="F0F9FF"/>
+          </a:solidFill>
+          <a:ln w="31750">
+            <a:solidFill>
+              <a:srgbClr val="0D9488"/>
+            </a:solidFill>
+          </a:ln>
+        </p:spPr>
+        <p:style>
+          <a:lnRef idx="1">
+            <a:schemeClr val="accent1"/>
+          </a:lnRef>
+          <a:fillRef idx="3">
+            <a:schemeClr val="accent1"/>
+          </a:fillRef>
+          <a:effectRef idx="2">
+            <a:schemeClr val="accent1"/>
+          </a:effectRef>
+          <a:fontRef idx="minor">
+            <a:schemeClr val="lt1"/>
+          </a:fontRef>
+        </p:style>
+        <p:txBody>
+          <a:bodyPr wrap="square" rtlCol="0" anchor="ctr"/>
+          <a:lstStyle/>
+          <a:p>
+            <a:pPr algn="ctr">
+              <a:spcAft>
+                <a:spcPts val="400"/>
+              </a:spcAft>
+              <a:defRPr sz="1100" b="1">
+                <a:solidFill>
+                  <a:srgbClr val="0D9488"/>
+                </a:solidFill>
+                <a:latin typeface="Arial"/>
+              </a:defRPr>
+            </a:pPr>
+            <a:r>
+              <a:t>LANGKAH 01</a:t>
+            </a:r>
+          </a:p>
+          <a:p>
+            <a:pPr algn="ctr">
+              <a:spcAft>
+                <a:spcPts val="800"/>
+              </a:spcAft>
+              <a:defRPr sz="1500" b="1">
+                <a:solidFill>
+                  <a:srgbClr val="0F172A"/>
+                </a:solidFill>
+                <a:latin typeface="Arial"/>
+              </a:defRPr>
+            </a:pPr>
+            <a:r>
+              <a:t>INVENTORY</a:t>
+            </a:r>
+          </a:p>
+          <a:p>
+            <a:pPr>
+              <a:lnSpc>
+                <a:spcPct val="110000"/>
+              </a:lnSpc>
+              <a:spcAft>
+                <a:spcPts val="800"/>
+              </a:spcAft>
+              <a:defRPr sz="1050" b="1">
+                <a:solidFill>
+                  <a:srgbClr val="0F172A"/>
+                </a:solidFill>
+                <a:latin typeface="Arial"/>
+              </a:defRPr>
+            </a:pPr>
+            <a:r>
+              <a:t>App Store Templates:</a:t>
+            </a:r>
+            <a:br/>
+            <a:r>
+              <a:t>• Material Warehouse</a:t>
+            </a:r>
+            <a:br/>
+            <a:r>
+              <a:t>• Inventory App Suite</a:t>
+            </a:r>
+          </a:p>
+          <a:p>
+            <a:pPr>
+              <a:lnSpc>
+                <a:spcPct val="110000"/>
+              </a:lnSpc>
+              <a:spcAft>
+                <a:spcPts val="800"/>
+              </a:spcAft>
+              <a:defRPr sz="1000">
+                <a:solidFill>
+                  <a:srgbClr val="1E293B"/>
+                </a:solidFill>
+                <a:latin typeface="Arial"/>
+              </a:defRPr>
+            </a:pPr>
+            <a:r>
+              <a:t>Fungsi:</a:t>
+            </a:r>
+            <a:br/>
+            <a:r>
+              <a:t>Membangun tabel fondasi 'Inventory_Items' &amp; 'Material_Definitions'.</a:t>
+            </a:r>
+          </a:p>
+          <a:p>
+            <a:pPr>
+              <a:lnSpc>
+                <a:spcPct val="110000"/>
+              </a:lnSpc>
+              <a:defRPr sz="1000" b="1">
+                <a:solidFill>
+                  <a:srgbClr val="0D9488"/>
+                </a:solidFill>
+                <a:latin typeface="Arial"/>
+              </a:defRPr>
+            </a:pPr>
+            <a:r>
+              <a:t>💡 Langkah Verifikasi:</a:t>
+            </a:r>
+            <a:br/>
+            <a:r>
+              <a:t>Buka Material Warehouse App. Pastikan dummy unit 'DEMO-CYL-A1' muncul di Rak BIN-12.</a:t>
+            </a:r>
+          </a:p>
+        </p:txBody>
+      </p:sp>
+      <p:sp>
+        <p:nvSpPr>
+          <p:cNvPr id="5" name="Right Arrow 4"/>
+          <p:cNvSpPr/>
+          <p:nvPr/>
+        </p:nvSpPr>
+        <p:spPr>
+          <a:xfrm>
+            <a:off x="3200400" y="4023360"/>
+            <a:ext cx="182880" cy="182880"/>
+          </a:xfrm>
+          <a:prstGeom prst="rightArrow">
+            <a:avLst/>
+          </a:prstGeom>
+          <a:solidFill>
+            <a:srgbClr val="0D9488"/>
+          </a:solidFill>
+          <a:ln>
+            <a:noFill/>
+          </a:ln>
+        </p:spPr>
+        <p:style>
+          <a:lnRef idx="1">
+            <a:schemeClr val="accent1"/>
+          </a:lnRef>
+          <a:fillRef idx="3">
+            <a:schemeClr val="accent1"/>
+          </a:fillRef>
+          <a:effectRef idx="2">
+            <a:schemeClr val="accent1"/>
+          </a:effectRef>
+          <a:fontRef idx="minor">
+            <a:schemeClr val="lt1"/>
+          </a:fontRef>
+        </p:style>
+        <p:txBody>
+          <a:bodyPr rtlCol="0" anchor="ctr"/>
+          <a:lstStyle/>
+          <a:p>
+            <a:pPr algn="ctr"/>
+            <a:endParaRPr/>
+          </a:p>
+        </p:txBody>
+      </p:sp>
+      <p:sp>
+        <p:nvSpPr>
+          <p:cNvPr id="6" name="Rounded Rectangle 5"/>
+          <p:cNvSpPr/>
+          <p:nvPr/>
+        </p:nvSpPr>
+        <p:spPr>
+          <a:xfrm>
+            <a:off x="3657600" y="2011680"/>
+            <a:ext cx="2377440" cy="4206240"/>
+          </a:xfrm>
+          <a:prstGeom prst="roundRect">
+            <a:avLst/>
+          </a:prstGeom>
+          <a:solidFill>
+            <a:srgbClr val="F0F9FF"/>
+          </a:solidFill>
+          <a:ln w="31750">
+            <a:solidFill>
+              <a:srgbClr val="EA580C"/>
+            </a:solidFill>
+          </a:ln>
+        </p:spPr>
+        <p:style>
+          <a:lnRef idx="1">
+            <a:schemeClr val="accent1"/>
+          </a:lnRef>
+          <a:fillRef idx="3">
+            <a:schemeClr val="accent1"/>
+          </a:fillRef>
+          <a:effectRef idx="2">
+            <a:schemeClr val="accent1"/>
+          </a:effectRef>
+          <a:fontRef idx="minor">
+            <a:schemeClr val="lt1"/>
+          </a:fontRef>
+        </p:style>
+        <p:txBody>
+          <a:bodyPr wrap="square" rtlCol="0" anchor="ctr"/>
+          <a:lstStyle/>
+          <a:p>
+            <a:pPr algn="ctr">
+              <a:spcAft>
+                <a:spcPts val="400"/>
+              </a:spcAft>
+              <a:defRPr sz="1100" b="1">
+                <a:solidFill>
+                  <a:srgbClr val="EA580C"/>
+                </a:solidFill>
+                <a:latin typeface="Arial"/>
+              </a:defRPr>
+            </a:pPr>
+            <a:r>
+              <a:t>LANGKAH 02</a:t>
+            </a:r>
+          </a:p>
+          <a:p>
+            <a:pPr algn="ctr">
+              <a:spcAft>
+                <a:spcPts val="800"/>
+              </a:spcAft>
+              <a:defRPr sz="1500" b="1">
+                <a:solidFill>
+                  <a:srgbClr val="0F172A"/>
+                </a:solidFill>
+                <a:latin typeface="Arial"/>
+              </a:defRPr>
+            </a:pPr>
+            <a:r>
+              <a:t>PRODUCTION</a:t>
+            </a:r>
+          </a:p>
+          <a:p>
+            <a:pPr>
+              <a:lnSpc>
+                <a:spcPct val="110000"/>
+              </a:lnSpc>
+              <a:spcAft>
+                <a:spcPts val="800"/>
+              </a:spcAft>
+              <a:defRPr sz="1050" b="1">
+                <a:solidFill>
+                  <a:srgbClr val="0F172A"/>
+                </a:solidFill>
+                <a:latin typeface="Arial"/>
+              </a:defRPr>
+            </a:pPr>
+            <a:r>
+              <a:t>App Store Templates:</a:t>
+            </a:r>
+            <a:br/>
+            <a:r>
+              <a:t>• Composable MES</a:t>
+            </a:r>
+            <a:br/>
+            <a:r>
+              <a:t>• Andon Terminal</a:t>
+            </a:r>
+            <a:br/>
+            <a:r>
+              <a:t>• Andon Management</a:t>
+            </a:r>
+          </a:p>
+          <a:p>
+            <a:pPr>
+              <a:lnSpc>
+                <a:spcPct val="110000"/>
+              </a:lnSpc>
+              <a:spcAft>
+                <a:spcPts val="800"/>
+              </a:spcAft>
+              <a:defRPr sz="1000">
+                <a:solidFill>
+                  <a:srgbClr val="1E293B"/>
+                </a:solidFill>
+                <a:latin typeface="Arial"/>
+              </a:defRPr>
+            </a:pPr>
+            <a:r>
+              <a:t>Fungsi:</a:t>
+            </a:r>
+            <a:br/>
+            <a:r>
+              <a:t>Menghubungkan perakitan &amp; downtime stasiun kerja yang memotong stok.</a:t>
+            </a:r>
+          </a:p>
+          <a:p>
+            <a:pPr>
+              <a:lnSpc>
+                <a:spcPct val="110000"/>
+              </a:lnSpc>
+              <a:defRPr sz="1000" b="1">
+                <a:solidFill>
+                  <a:srgbClr val="0D9488"/>
+                </a:solidFill>
+                <a:latin typeface="Arial"/>
+              </a:defRPr>
+            </a:pPr>
+            <a:r>
+              <a:t>💡 Langkah Verifikasi:</a:t>
+            </a:r>
+            <a:br/>
+            <a:r>
+              <a:t>Picu downtime stasiun, pastikan status stasiun DOWN terupdate real-time.</a:t>
+            </a:r>
+          </a:p>
+        </p:txBody>
+      </p:sp>
+      <p:sp>
+        <p:nvSpPr>
+          <p:cNvPr id="7" name="Right Arrow 6"/>
+          <p:cNvSpPr/>
+          <p:nvPr/>
+        </p:nvSpPr>
+        <p:spPr>
+          <a:xfrm>
+            <a:off x="6126480" y="4023360"/>
+            <a:ext cx="182880" cy="182880"/>
+          </a:xfrm>
+          <a:prstGeom prst="rightArrow">
+            <a:avLst/>
+          </a:prstGeom>
+          <a:solidFill>
+            <a:srgbClr val="0D9488"/>
+          </a:solidFill>
+          <a:ln>
+            <a:noFill/>
+          </a:ln>
+        </p:spPr>
+        <p:style>
+          <a:lnRef idx="1">
+            <a:schemeClr val="accent1"/>
+          </a:lnRef>
+          <a:fillRef idx="3">
+            <a:schemeClr val="accent1"/>
+          </a:fillRef>
+          <a:effectRef idx="2">
+            <a:schemeClr val="accent1"/>
+          </a:effectRef>
+          <a:fontRef idx="minor">
+            <a:schemeClr val="lt1"/>
+          </a:fontRef>
+        </p:style>
+        <p:txBody>
+          <a:bodyPr rtlCol="0" anchor="ctr"/>
+          <a:lstStyle/>
+          <a:p>
+            <a:pPr algn="ctr"/>
+            <a:endParaRPr/>
+          </a:p>
+        </p:txBody>
+      </p:sp>
+      <p:sp>
+        <p:nvSpPr>
+          <p:cNvPr id="8" name="Rounded Rectangle 7"/>
+          <p:cNvSpPr/>
+          <p:nvPr/>
+        </p:nvSpPr>
+        <p:spPr>
+          <a:xfrm>
+            <a:off x="6583680" y="2011680"/>
+            <a:ext cx="2377440" cy="4206240"/>
+          </a:xfrm>
+          <a:prstGeom prst="roundRect">
+            <a:avLst/>
+          </a:prstGeom>
+          <a:solidFill>
+            <a:srgbClr val="F0F9FF"/>
+          </a:solidFill>
+          <a:ln w="31750">
+            <a:solidFill>
+              <a:srgbClr val="D97706"/>
+            </a:solidFill>
+          </a:ln>
+        </p:spPr>
+        <p:style>
+          <a:lnRef idx="1">
+            <a:schemeClr val="accent1"/>
+          </a:lnRef>
+          <a:fillRef idx="3">
+            <a:schemeClr val="accent1"/>
+          </a:fillRef>
+          <a:effectRef idx="2">
+            <a:schemeClr val="accent1"/>
+          </a:effectRef>
+          <a:fontRef idx="minor">
+            <a:schemeClr val="lt1"/>
+          </a:fontRef>
+        </p:style>
+        <p:txBody>
+          <a:bodyPr wrap="square" rtlCol="0" anchor="ctr"/>
+          <a:lstStyle/>
+          <a:p>
+            <a:pPr algn="ctr">
+              <a:spcAft>
+                <a:spcPts val="400"/>
+              </a:spcAft>
+              <a:defRPr sz="1100" b="1">
+                <a:solidFill>
+                  <a:srgbClr val="D97706"/>
+                </a:solidFill>
+                <a:latin typeface="Arial"/>
+              </a:defRPr>
+            </a:pPr>
+            <a:r>
+              <a:t>LANGKAH 03</a:t>
+            </a:r>
+          </a:p>
+          <a:p>
+            <a:pPr algn="ctr">
+              <a:spcAft>
+                <a:spcPts val="800"/>
+              </a:spcAft>
+              <a:defRPr sz="1500" b="1">
+                <a:solidFill>
+                  <a:srgbClr val="0F172A"/>
+                </a:solidFill>
+                <a:latin typeface="Arial"/>
+              </a:defRPr>
+            </a:pPr>
+            <a:r>
+              <a:t>QUALITY</a:t>
+            </a:r>
+          </a:p>
+          <a:p>
+            <a:pPr>
+              <a:lnSpc>
+                <a:spcPct val="110000"/>
+              </a:lnSpc>
+              <a:spcAft>
+                <a:spcPts val="800"/>
+              </a:spcAft>
+              <a:defRPr sz="1050" b="1">
+                <a:solidFill>
+                  <a:srgbClr val="0F172A"/>
+                </a:solidFill>
+                <a:latin typeface="Arial"/>
+              </a:defRPr>
+            </a:pPr>
+            <a:r>
+              <a:t>App Store Templates:</a:t>
+            </a:r>
+            <a:br/>
+            <a:r>
+              <a:t>• Quality Inspection</a:t>
+            </a:r>
+            <a:br/>
+            <a:r>
+              <a:t>• Frontline QMS App</a:t>
+            </a:r>
+          </a:p>
+          <a:p>
+            <a:pPr>
+              <a:lnSpc>
+                <a:spcPct val="110000"/>
+              </a:lnSpc>
+              <a:spcAft>
+                <a:spcPts val="800"/>
+              </a:spcAft>
+              <a:defRPr sz="1000">
+                <a:solidFill>
+                  <a:srgbClr val="1E293B"/>
+                </a:solidFill>
+                <a:latin typeface="Arial"/>
+              </a:defRPr>
+            </a:pPr>
+            <a:r>
+              <a:t>Fungsi:</a:t>
+            </a:r>
+            <a:br/>
+            <a:r>
+              <a:t>Mengevaluasi hasil lini &amp; menyalurkan defect perakitan ke papan MRB.</a:t>
+            </a:r>
+          </a:p>
+          <a:p>
+            <a:pPr>
+              <a:lnSpc>
+                <a:spcPct val="110000"/>
+              </a:lnSpc>
+              <a:defRPr sz="1000" b="1">
+                <a:solidFill>
+                  <a:srgbClr val="0D9488"/>
+                </a:solidFill>
+                <a:latin typeface="Arial"/>
+              </a:defRPr>
+            </a:pPr>
+            <a:r>
+              <a:t>💡 Langkah Verifikasi:</a:t>
+            </a:r>
+            <a:br/>
+            <a:r>
+              <a:t>Jalankan uji mutu, masukkan kegagalan, pastikan defect terdaftar instan ke MRB.</a:t>
+            </a:r>
+          </a:p>
+        </p:txBody>
+      </p:sp>
+      <p:sp>
+        <p:nvSpPr>
+          <p:cNvPr id="9" name="Right Arrow 8"/>
+          <p:cNvSpPr/>
+          <p:nvPr/>
+        </p:nvSpPr>
+        <p:spPr>
+          <a:xfrm>
+            <a:off x="9052560" y="4023360"/>
+            <a:ext cx="182880" cy="182880"/>
+          </a:xfrm>
+          <a:prstGeom prst="rightArrow">
+            <a:avLst/>
+          </a:prstGeom>
+          <a:solidFill>
+            <a:srgbClr val="0D9488"/>
+          </a:solidFill>
+          <a:ln>
+            <a:noFill/>
+          </a:ln>
+        </p:spPr>
+        <p:style>
+          <a:lnRef idx="1">
+            <a:schemeClr val="accent1"/>
+          </a:lnRef>
+          <a:fillRef idx="3">
+            <a:schemeClr val="accent1"/>
+          </a:fillRef>
+          <a:effectRef idx="2">
+            <a:schemeClr val="accent1"/>
+          </a:effectRef>
+          <a:fontRef idx="minor">
+            <a:schemeClr val="lt1"/>
+          </a:fontRef>
+        </p:style>
+        <p:txBody>
+          <a:bodyPr rtlCol="0" anchor="ctr"/>
+          <a:lstStyle/>
+          <a:p>
+            <a:pPr algn="ctr"/>
+            <a:endParaRPr/>
+          </a:p>
+        </p:txBody>
+      </p:sp>
+      <p:sp>
+        <p:nvSpPr>
+          <p:cNvPr id="10" name="Rounded Rectangle 9"/>
+          <p:cNvSpPr/>
+          <p:nvPr/>
+        </p:nvSpPr>
+        <p:spPr>
+          <a:xfrm>
+            <a:off x="9509760" y="2011680"/>
+            <a:ext cx="2377440" cy="4206240"/>
+          </a:xfrm>
+          <a:prstGeom prst="roundRect">
+            <a:avLst/>
+          </a:prstGeom>
+          <a:solidFill>
+            <a:srgbClr val="F0F9FF"/>
+          </a:solidFill>
+          <a:ln w="31750">
+            <a:solidFill>
+              <a:srgbClr val="7C3AED"/>
+            </a:solidFill>
+          </a:ln>
+        </p:spPr>
+        <p:style>
+          <a:lnRef idx="1">
+            <a:schemeClr val="accent1"/>
+          </a:lnRef>
+          <a:fillRef idx="3">
+            <a:schemeClr val="accent1"/>
+          </a:fillRef>
+          <a:effectRef idx="2">
+            <a:schemeClr val="accent1"/>
+          </a:effectRef>
+          <a:fontRef idx="minor">
+            <a:schemeClr val="lt1"/>
+          </a:fontRef>
+        </p:style>
+        <p:txBody>
+          <a:bodyPr wrap="square" rtlCol="0" anchor="ctr"/>
+          <a:lstStyle/>
+          <a:p>
+            <a:pPr algn="ctr">
+              <a:spcAft>
+                <a:spcPts val="400"/>
+              </a:spcAft>
+              <a:defRPr sz="1100" b="1">
+                <a:solidFill>
+                  <a:srgbClr val="7C3AED"/>
+                </a:solidFill>
+                <a:latin typeface="Arial"/>
+              </a:defRPr>
+            </a:pPr>
+            <a:r>
+              <a:t>LANGKAH 04</a:t>
+            </a:r>
+          </a:p>
+          <a:p>
+            <a:pPr algn="ctr">
+              <a:spcAft>
+                <a:spcPts val="800"/>
+              </a:spcAft>
+              <a:defRPr sz="1500" b="1">
+                <a:solidFill>
+                  <a:srgbClr val="0F172A"/>
+                </a:solidFill>
+                <a:latin typeface="Arial"/>
+              </a:defRPr>
+            </a:pPr>
+            <a:r>
+              <a:t>ANALYTICS</a:t>
+            </a:r>
+          </a:p>
+          <a:p>
+            <a:pPr>
+              <a:lnSpc>
+                <a:spcPct val="110000"/>
+              </a:lnSpc>
+              <a:spcAft>
+                <a:spcPts val="800"/>
+              </a:spcAft>
+              <a:defRPr sz="1050" b="1">
+                <a:solidFill>
+                  <a:srgbClr val="0F172A"/>
+                </a:solidFill>
+                <a:latin typeface="Arial"/>
+              </a:defRPr>
+            </a:pPr>
+            <a:r>
+              <a:t>App Store Templates:</a:t>
+            </a:r>
+            <a:br/>
+            <a:r>
+              <a:t>• Replenishment App</a:t>
+            </a:r>
+            <a:br/>
+            <a:r>
+              <a:t>• Material Handling</a:t>
+            </a:r>
+            <a:br/>
+            <a:r>
+              <a:t>• OEE MES Dashboard</a:t>
+            </a:r>
+          </a:p>
+          <a:p>
+            <a:pPr>
+              <a:lnSpc>
+                <a:spcPct val="110000"/>
+              </a:lnSpc>
+              <a:spcAft>
+                <a:spcPts val="800"/>
+              </a:spcAft>
+              <a:defRPr sz="1000">
+                <a:solidFill>
+                  <a:srgbClr val="1E293B"/>
+                </a:solidFill>
+                <a:latin typeface="Arial"/>
+              </a:defRPr>
+            </a:pPr>
+            <a:r>
+              <a:t>Fungsi:</a:t>
+            </a:r>
+            <a:br/>
+            <a:r>
+              <a:t>Konsolidasi Kanban loop, OEE, &amp; cycle time historis pabrik secara utuh.</a:t>
+            </a:r>
+          </a:p>
+          <a:p>
+            <a:pPr>
+              <a:lnSpc>
+                <a:spcPct val="110000"/>
+              </a:lnSpc>
+              <a:defRPr sz="1000" b="1">
+                <a:solidFill>
+                  <a:srgbClr val="0D9488"/>
+                </a:solidFill>
+                <a:latin typeface="Arial"/>
+              </a:defRPr>
+            </a:pPr>
+            <a:r>
+              <a:t>💡 Langkah Verifikasi:</a:t>
+            </a:r>
+            <a:br/>
+            <a:r>
+              <a:t>Scan bin kosong, pastikan order baru masuk antrean Water Spider logistik.</a:t>
+            </a:r>
+          </a:p>
+        </p:txBody>
+      </p:sp>
+    </p:spTree>
+  </p:cSld>
+  <p:clrMapOvr>
+    <a:masterClrMapping/>
+  </p:clrMapOvr>
+</p:sld>
+</file>
+
+<file path=ppt/slides/slide12.xml><?xml version="1.0" encoding="utf-8"?>
+<p:sld xmlns:a="http://schemas.openxmlformats.org/drawingml/2006/main" xmlns:r="http://schemas.openxmlformats.org/officeDocument/2006/relationships" xmlns:p="http://schemas.openxmlformats.org/presentationml/2006/main">
+  <p:cSld>
+    <p:bg>
+      <p:bgPr>
+        <a:solidFill>
+          <a:srgbClr val="FFFFFF"/>
+        </a:solidFill>
+        <a:effectLst/>
+      </p:bgPr>
+    </p:bg>
+    <p:spTree>
+      <p:nvGrpSpPr>
+        <p:cNvPr id="1" name=""/>
+        <p:cNvGrpSpPr/>
+        <p:nvPr/>
+      </p:nvGrpSpPr>
+      <p:grpSpPr>
+        <a:xfrm>
+          <a:off x="0" y="0"/>
+          <a:ext cx="0" cy="0"/>
+          <a:chOff x="0" y="0"/>
+          <a:chExt cx="0" cy="0"/>
+        </a:xfrm>
+      </p:grpSpPr>
+      <p:sp>
+        <p:nvSpPr>
+          <p:cNvPr id="2" name="TextBox 1"/>
+          <p:cNvSpPr txBox="1"/>
+          <p:nvPr/>
+        </p:nvSpPr>
+        <p:spPr>
+          <a:xfrm>
+            <a:off x="731520" y="365760"/>
+            <a:ext cx="10725912" cy="365760"/>
+          </a:xfrm>
+          <a:prstGeom prst="rect">
+            <a:avLst/>
+          </a:prstGeom>
+          <a:noFill/>
+        </p:spPr>
+        <p:txBody>
+          <a:bodyPr wrap="square">
+            <a:spAutoFit/>
+          </a:bodyPr>
+          <a:lstStyle/>
+          <a:p>
+            <a:pPr>
+              <a:defRPr sz="1000" b="1">
+                <a:solidFill>
+                  <a:srgbClr val="0D9488"/>
+                </a:solidFill>
+                <a:latin typeface="Arial"/>
+              </a:defRPr>
+            </a:pPr>
+            <a:r>
+              <a:t>PILLAR 6: FACTORY PROCESS MAPPING</a:t>
+            </a:r>
+          </a:p>
+        </p:txBody>
+      </p:sp>
+      <p:sp>
+        <p:nvSpPr>
+          <p:cNvPr id="3" name="TextBox 2"/>
+          <p:cNvSpPr txBox="1"/>
+          <p:nvPr/>
+        </p:nvSpPr>
+        <p:spPr>
+          <a:xfrm>
+            <a:off x="731520" y="640080"/>
+            <a:ext cx="10725912" cy="731520"/>
+          </a:xfrm>
+          <a:prstGeom prst="rect">
+            <a:avLst/>
+          </a:prstGeom>
+          <a:noFill/>
+        </p:spPr>
+        <p:txBody>
+          <a:bodyPr wrap="square">
+            <a:spAutoFit/>
+          </a:bodyPr>
+          <a:lstStyle/>
+          <a:p>
+            <a:pPr>
+              <a:defRPr sz="2800" b="1">
+                <a:solidFill>
+                  <a:srgbClr val="0F172A"/>
+                </a:solidFill>
+                <a:latin typeface="Arial"/>
+              </a:defRPr>
+            </a:pPr>
+            <a:r>
+              <a:t>Pemetaan Proses &amp; Diagram Alur Kerja Template</a:t>
+            </a:r>
+          </a:p>
+        </p:txBody>
+      </p:sp>
+      <p:sp>
+        <p:nvSpPr>
+          <p:cNvPr id="4" name="Rounded Rectangle 3"/>
+          <p:cNvSpPr/>
+          <p:nvPr/>
+        </p:nvSpPr>
+        <p:spPr>
+          <a:xfrm>
+            <a:off x="731520" y="2011680"/>
+            <a:ext cx="1920240" cy="1645920"/>
+          </a:xfrm>
+          <a:prstGeom prst="roundRect">
+            <a:avLst/>
+          </a:prstGeom>
+          <a:solidFill>
+            <a:srgbClr val="F0F9FF"/>
+          </a:solidFill>
+          <a:ln w="25400">
+            <a:solidFill>
+              <a:srgbClr val="0D9488"/>
+            </a:solidFill>
+          </a:ln>
+        </p:spPr>
+        <p:style>
+          <a:lnRef idx="1">
+            <a:schemeClr val="accent1"/>
+          </a:lnRef>
+          <a:fillRef idx="3">
+            <a:schemeClr val="accent1"/>
+          </a:fillRef>
+          <a:effectRef idx="2">
+            <a:schemeClr val="accent1"/>
+          </a:effectRef>
+          <a:fontRef idx="minor">
+            <a:schemeClr val="lt1"/>
+          </a:fontRef>
+        </p:style>
+        <p:txBody>
+          <a:bodyPr wrap="square" rtlCol="0" anchor="ctr"/>
+          <a:lstStyle/>
+          <a:p>
+            <a:pPr algn="ctr">
+              <a:spcAft>
+                <a:spcPts val="800"/>
+              </a:spcAft>
+              <a:defRPr sz="1100" b="1">
+                <a:solidFill>
+                  <a:srgbClr val="0D9488"/>
+                </a:solidFill>
+                <a:latin typeface="Arial"/>
+              </a:defRPr>
+            </a:pPr>
+            <a:r>
+              <a:t>LANGKAH 1</a:t>
+            </a:r>
+          </a:p>
+          <a:p>
+            <a:pPr algn="ctr">
+              <a:defRPr sz="1600" b="1">
+                <a:solidFill>
+                  <a:srgbClr val="0F172A"/>
+                </a:solidFill>
+                <a:latin typeface="Arial"/>
+              </a:defRPr>
+            </a:pPr>
+            <a:r>
+              <a:t>INGESTION</a:t>
+            </a:r>
+          </a:p>
+        </p:txBody>
+      </p:sp>
+      <p:sp>
+        <p:nvSpPr>
+          <p:cNvPr id="5" name="TextBox 4"/>
+          <p:cNvSpPr txBox="1"/>
+          <p:nvPr/>
+        </p:nvSpPr>
+        <p:spPr>
+          <a:xfrm>
+            <a:off x="640080" y="3931920"/>
+            <a:ext cx="2103120" cy="1828800"/>
+          </a:xfrm>
+          <a:prstGeom prst="rect">
+            <a:avLst/>
+          </a:prstGeom>
+          <a:noFill/>
+        </p:spPr>
+        <p:txBody>
+          <a:bodyPr wrap="square">
+            <a:spAutoFit/>
+          </a:bodyPr>
+          <a:lstStyle/>
+          <a:p>
+            <a:pPr algn="ctr">
+              <a:lnSpc>
+                <a:spcPct val="120000"/>
+              </a:lnSpc>
+              <a:defRPr sz="1100">
+                <a:solidFill>
+                  <a:srgbClr val="1E293B"/>
+                </a:solidFill>
+                <a:latin typeface="Arial"/>
+              </a:defRPr>
+            </a:pPr>
+            <a:r>
+              <a:t>Material Loading &amp; Warehouse</a:t>
+            </a:r>
+            <a:br/>
+            <a:r>
+              <a:t>Registrasi &amp; penempatan material baru ke rak penyimpanan.</a:t>
+            </a:r>
+          </a:p>
+        </p:txBody>
+      </p:sp>
+      <p:sp>
+        <p:nvSpPr>
+          <p:cNvPr id="6" name="Right Arrow 5"/>
+          <p:cNvSpPr/>
+          <p:nvPr/>
+        </p:nvSpPr>
+        <p:spPr>
+          <a:xfrm>
+            <a:off x="2743200" y="2743200"/>
+            <a:ext cx="182880" cy="182880"/>
+          </a:xfrm>
+          <a:prstGeom prst="rightArrow">
+            <a:avLst/>
+          </a:prstGeom>
+          <a:solidFill>
+            <a:srgbClr val="0D9488"/>
+          </a:solidFill>
+          <a:ln>
+            <a:noFill/>
+          </a:ln>
+        </p:spPr>
+        <p:style>
+          <a:lnRef idx="1">
+            <a:schemeClr val="accent1"/>
+          </a:lnRef>
+          <a:fillRef idx="3">
+            <a:schemeClr val="accent1"/>
+          </a:fillRef>
+          <a:effectRef idx="2">
+            <a:schemeClr val="accent1"/>
+          </a:effectRef>
+          <a:fontRef idx="minor">
+            <a:schemeClr val="lt1"/>
+          </a:fontRef>
+        </p:style>
+        <p:txBody>
+          <a:bodyPr rtlCol="0" anchor="ctr"/>
+          <a:lstStyle/>
+          <a:p>
+            <a:pPr algn="ctr"/>
+            <a:endParaRPr/>
+          </a:p>
+        </p:txBody>
+      </p:sp>
+      <p:sp>
+        <p:nvSpPr>
+          <p:cNvPr id="7" name="Rounded Rectangle 6"/>
+          <p:cNvSpPr/>
+          <p:nvPr/>
+        </p:nvSpPr>
+        <p:spPr>
+          <a:xfrm>
+            <a:off x="3017520" y="2011680"/>
+            <a:ext cx="1920240" cy="1645920"/>
+          </a:xfrm>
+          <a:prstGeom prst="roundRect">
+            <a:avLst/>
+          </a:prstGeom>
+          <a:solidFill>
+            <a:srgbClr val="F0F9FF"/>
+          </a:solidFill>
+          <a:ln w="25400">
+            <a:solidFill>
+              <a:srgbClr val="0284C7"/>
+            </a:solidFill>
+          </a:ln>
+        </p:spPr>
+        <p:style>
+          <a:lnRef idx="1">
+            <a:schemeClr val="accent1"/>
+          </a:lnRef>
+          <a:fillRef idx="3">
+            <a:schemeClr val="accent1"/>
+          </a:fillRef>
+          <a:effectRef idx="2">
+            <a:schemeClr val="accent1"/>
+          </a:effectRef>
+          <a:fontRef idx="minor">
+            <a:schemeClr val="lt1"/>
+          </a:fontRef>
+        </p:style>
+        <p:txBody>
+          <a:bodyPr wrap="square" rtlCol="0" anchor="ctr"/>
+          <a:lstStyle/>
+          <a:p>
+            <a:pPr algn="ctr">
+              <a:spcAft>
+                <a:spcPts val="800"/>
+              </a:spcAft>
+              <a:defRPr sz="1100" b="1">
+                <a:solidFill>
+                  <a:srgbClr val="0284C7"/>
+                </a:solidFill>
+                <a:latin typeface="Arial"/>
+              </a:defRPr>
+            </a:pPr>
+            <a:r>
+              <a:t>LANGKAH 2</a:t>
+            </a:r>
+          </a:p>
+          <a:p>
+            <a:pPr algn="ctr">
+              <a:defRPr sz="1600" b="1">
+                <a:solidFill>
+                  <a:srgbClr val="0F172A"/>
+                </a:solidFill>
+                <a:latin typeface="Arial"/>
+              </a:defRPr>
+            </a:pPr>
+            <a:r>
+              <a:t>REPLENISH</a:t>
+            </a:r>
+          </a:p>
+        </p:txBody>
+      </p:sp>
+      <p:sp>
+        <p:nvSpPr>
+          <p:cNvPr id="8" name="TextBox 7"/>
+          <p:cNvSpPr txBox="1"/>
+          <p:nvPr/>
+        </p:nvSpPr>
+        <p:spPr>
+          <a:xfrm>
+            <a:off x="2926080" y="3931920"/>
+            <a:ext cx="2103120" cy="1828800"/>
+          </a:xfrm>
+          <a:prstGeom prst="rect">
+            <a:avLst/>
+          </a:prstGeom>
+          <a:noFill/>
+        </p:spPr>
+        <p:txBody>
+          <a:bodyPr wrap="square">
+            <a:spAutoFit/>
+          </a:bodyPr>
+          <a:lstStyle/>
+          <a:p>
+            <a:pPr algn="ctr">
+              <a:lnSpc>
+                <a:spcPct val="120000"/>
+              </a:lnSpc>
+              <a:defRPr sz="1100">
+                <a:solidFill>
+                  <a:srgbClr val="1E293B"/>
+                </a:solidFill>
+                <a:latin typeface="Arial"/>
+              </a:defRPr>
+            </a:pPr>
+            <a:r>
+              <a:t>Material Request &amp; Replenishment</a:t>
+            </a:r>
+            <a:br/>
+            <a:r>
+              <a:t>Pemicuan loop Kanban saat bin perakitan di lini habis.</a:t>
+            </a:r>
+          </a:p>
+        </p:txBody>
+      </p:sp>
+      <p:sp>
+        <p:nvSpPr>
+          <p:cNvPr id="9" name="Right Arrow 8"/>
+          <p:cNvSpPr/>
+          <p:nvPr/>
+        </p:nvSpPr>
+        <p:spPr>
+          <a:xfrm>
+            <a:off x="5029200" y="2743200"/>
+            <a:ext cx="182880" cy="182880"/>
+          </a:xfrm>
+          <a:prstGeom prst="rightArrow">
+            <a:avLst/>
+          </a:prstGeom>
+          <a:solidFill>
+            <a:srgbClr val="0D9488"/>
+          </a:solidFill>
+          <a:ln>
+            <a:noFill/>
+          </a:ln>
+        </p:spPr>
+        <p:style>
+          <a:lnRef idx="1">
+            <a:schemeClr val="accent1"/>
+          </a:lnRef>
+          <a:fillRef idx="3">
+            <a:schemeClr val="accent1"/>
+          </a:fillRef>
+          <a:effectRef idx="2">
+            <a:schemeClr val="accent1"/>
+          </a:effectRef>
+          <a:fontRef idx="minor">
+            <a:schemeClr val="lt1"/>
+          </a:fontRef>
+        </p:style>
+        <p:txBody>
+          <a:bodyPr rtlCol="0" anchor="ctr"/>
+          <a:lstStyle/>
+          <a:p>
+            <a:pPr algn="ctr"/>
+            <a:endParaRPr/>
+          </a:p>
+        </p:txBody>
+      </p:sp>
+      <p:sp>
+        <p:nvSpPr>
+          <p:cNvPr id="10" name="Rounded Rectangle 9"/>
+          <p:cNvSpPr/>
+          <p:nvPr/>
+        </p:nvSpPr>
+        <p:spPr>
+          <a:xfrm>
+            <a:off x="5303520" y="2011680"/>
+            <a:ext cx="1920240" cy="1645920"/>
+          </a:xfrm>
+          <a:prstGeom prst="roundRect">
+            <a:avLst/>
+          </a:prstGeom>
+          <a:solidFill>
+            <a:srgbClr val="F0F9FF"/>
+          </a:solidFill>
+          <a:ln w="25400">
+            <a:solidFill>
+              <a:srgbClr val="EA580C"/>
+            </a:solidFill>
+          </a:ln>
+        </p:spPr>
+        <p:style>
+          <a:lnRef idx="1">
+            <a:schemeClr val="accent1"/>
+          </a:lnRef>
+          <a:fillRef idx="3">
+            <a:schemeClr val="accent1"/>
+          </a:fillRef>
+          <a:effectRef idx="2">
+            <a:schemeClr val="accent1"/>
+          </a:effectRef>
+          <a:fontRef idx="minor">
+            <a:schemeClr val="lt1"/>
+          </a:fontRef>
+        </p:style>
+        <p:txBody>
+          <a:bodyPr wrap="square" rtlCol="0" anchor="ctr"/>
+          <a:lstStyle/>
+          <a:p>
+            <a:pPr algn="ctr">
+              <a:spcAft>
+                <a:spcPts val="800"/>
+              </a:spcAft>
+              <a:defRPr sz="1100" b="1">
+                <a:solidFill>
+                  <a:srgbClr val="EA580C"/>
+                </a:solidFill>
+                <a:latin typeface="Arial"/>
+              </a:defRPr>
+            </a:pPr>
+            <a:r>
+              <a:t>LANGKAH 3</a:t>
+            </a:r>
+          </a:p>
+          <a:p>
+            <a:pPr algn="ctr">
+              <a:defRPr sz="1600" b="1">
+                <a:solidFill>
+                  <a:srgbClr val="0F172A"/>
+                </a:solidFill>
+                <a:latin typeface="Arial"/>
+              </a:defRPr>
+            </a:pPr>
+            <a:r>
+              <a:t>EXECUTE</a:t>
+            </a:r>
+          </a:p>
+        </p:txBody>
+      </p:sp>
+      <p:sp>
+        <p:nvSpPr>
+          <p:cNvPr id="11" name="TextBox 10"/>
+          <p:cNvSpPr txBox="1"/>
+          <p:nvPr/>
+        </p:nvSpPr>
+        <p:spPr>
+          <a:xfrm>
+            <a:off x="5212080" y="3931920"/>
+            <a:ext cx="2103120" cy="1828800"/>
+          </a:xfrm>
+          <a:prstGeom prst="rect">
+            <a:avLst/>
+          </a:prstGeom>
+          <a:noFill/>
+        </p:spPr>
+        <p:txBody>
+          <a:bodyPr wrap="square">
+            <a:spAutoFit/>
+          </a:bodyPr>
+          <a:lstStyle/>
+          <a:p>
+            <a:pPr algn="ctr">
+              <a:lnSpc>
+                <a:spcPct val="120000"/>
+              </a:lnSpc>
+              <a:defRPr sz="1100">
+                <a:solidFill>
+                  <a:srgbClr val="1E293B"/>
+                </a:solidFill>
+                <a:latin typeface="Arial"/>
+              </a:defRPr>
+            </a:pPr>
+            <a:r>
+              <a:t>Order Execution &amp; Andon Terminal</a:t>
+            </a:r>
+            <a:br/>
+            <a:r>
+              <a:t>Instruksi perakitan operator &amp; pemicuan downtime terintegrasi.</a:t>
+            </a:r>
+          </a:p>
+        </p:txBody>
+      </p:sp>
+      <p:sp>
+        <p:nvSpPr>
+          <p:cNvPr id="12" name="Right Arrow 11"/>
+          <p:cNvSpPr/>
+          <p:nvPr/>
+        </p:nvSpPr>
+        <p:spPr>
+          <a:xfrm>
+            <a:off x="7315200" y="2743200"/>
+            <a:ext cx="182880" cy="182880"/>
+          </a:xfrm>
+          <a:prstGeom prst="rightArrow">
+            <a:avLst/>
+          </a:prstGeom>
+          <a:solidFill>
+            <a:srgbClr val="0D9488"/>
+          </a:solidFill>
+          <a:ln>
+            <a:noFill/>
+          </a:ln>
+        </p:spPr>
+        <p:style>
+          <a:lnRef idx="1">
+            <a:schemeClr val="accent1"/>
+          </a:lnRef>
+          <a:fillRef idx="3">
+            <a:schemeClr val="accent1"/>
+          </a:fillRef>
+          <a:effectRef idx="2">
+            <a:schemeClr val="accent1"/>
+          </a:effectRef>
+          <a:fontRef idx="minor">
+            <a:schemeClr val="lt1"/>
+          </a:fontRef>
+        </p:style>
+        <p:txBody>
+          <a:bodyPr rtlCol="0" anchor="ctr"/>
+          <a:lstStyle/>
+          <a:p>
+            <a:pPr algn="ctr"/>
+            <a:endParaRPr/>
+          </a:p>
+        </p:txBody>
+      </p:sp>
+      <p:sp>
+        <p:nvSpPr>
+          <p:cNvPr id="13" name="Rounded Rectangle 12"/>
+          <p:cNvSpPr/>
+          <p:nvPr/>
+        </p:nvSpPr>
+        <p:spPr>
+          <a:xfrm>
+            <a:off x="7589520" y="2011680"/>
+            <a:ext cx="1920240" cy="1645920"/>
+          </a:xfrm>
+          <a:prstGeom prst="roundRect">
+            <a:avLst/>
+          </a:prstGeom>
+          <a:solidFill>
+            <a:srgbClr val="F0F9FF"/>
+          </a:solidFill>
+          <a:ln w="25400">
+            <a:solidFill>
+              <a:srgbClr val="D97706"/>
+            </a:solidFill>
+          </a:ln>
+        </p:spPr>
+        <p:style>
+          <a:lnRef idx="1">
+            <a:schemeClr val="accent1"/>
+          </a:lnRef>
+          <a:fillRef idx="3">
+            <a:schemeClr val="accent1"/>
+          </a:fillRef>
+          <a:effectRef idx="2">
+            <a:schemeClr val="accent1"/>
+          </a:effectRef>
+          <a:fontRef idx="minor">
+            <a:schemeClr val="lt1"/>
+          </a:fontRef>
+        </p:style>
+        <p:txBody>
+          <a:bodyPr wrap="square" rtlCol="0" anchor="ctr"/>
+          <a:lstStyle/>
+          <a:p>
+            <a:pPr algn="ctr">
+              <a:spcAft>
+                <a:spcPts val="800"/>
+              </a:spcAft>
+              <a:defRPr sz="1100" b="1">
+                <a:solidFill>
+                  <a:srgbClr val="D97706"/>
+                </a:solidFill>
+                <a:latin typeface="Arial"/>
+              </a:defRPr>
+            </a:pPr>
+            <a:r>
+              <a:t>LANGKAH 4</a:t>
+            </a:r>
+          </a:p>
+          <a:p>
+            <a:pPr algn="ctr">
+              <a:defRPr sz="1600" b="1">
+                <a:solidFill>
+                  <a:srgbClr val="0F172A"/>
+                </a:solidFill>
+                <a:latin typeface="Arial"/>
+              </a:defRPr>
+            </a:pPr>
+            <a:r>
+              <a:t>VERIFY</a:t>
+            </a:r>
+          </a:p>
+        </p:txBody>
+      </p:sp>
+      <p:sp>
+        <p:nvSpPr>
+          <p:cNvPr id="14" name="TextBox 13"/>
+          <p:cNvSpPr txBox="1"/>
+          <p:nvPr/>
+        </p:nvSpPr>
+        <p:spPr>
+          <a:xfrm>
+            <a:off x="7498080" y="3931920"/>
+            <a:ext cx="2103120" cy="1828800"/>
+          </a:xfrm>
+          <a:prstGeom prst="rect">
+            <a:avLst/>
+          </a:prstGeom>
+          <a:noFill/>
+        </p:spPr>
+        <p:txBody>
+          <a:bodyPr wrap="square">
+            <a:spAutoFit/>
+          </a:bodyPr>
+          <a:lstStyle/>
+          <a:p>
+            <a:pPr algn="ctr">
+              <a:lnSpc>
+                <a:spcPct val="120000"/>
+              </a:lnSpc>
+              <a:defRPr sz="1100">
+                <a:solidFill>
+                  <a:srgbClr val="1E293B"/>
+                </a:solidFill>
+                <a:latin typeface="Arial"/>
+              </a:defRPr>
+            </a:pPr>
+            <a:r>
+              <a:t>Quality Inspection &amp; Frontline QMS</a:t>
+            </a:r>
+            <a:br/>
+            <a:r>
+              <a:t>Uji toleransi produk perakitan &amp; disposisi cacat (MRB).</a:t>
+            </a:r>
+          </a:p>
+        </p:txBody>
+      </p:sp>
+      <p:sp>
+        <p:nvSpPr>
+          <p:cNvPr id="15" name="Right Arrow 14"/>
+          <p:cNvSpPr/>
+          <p:nvPr/>
+        </p:nvSpPr>
+        <p:spPr>
+          <a:xfrm>
+            <a:off x="9601200" y="2743200"/>
+            <a:ext cx="182880" cy="182880"/>
+          </a:xfrm>
+          <a:prstGeom prst="rightArrow">
+            <a:avLst/>
+          </a:prstGeom>
+          <a:solidFill>
+            <a:srgbClr val="0D9488"/>
+          </a:solidFill>
+          <a:ln>
+            <a:noFill/>
+          </a:ln>
+        </p:spPr>
+        <p:style>
+          <a:lnRef idx="1">
+            <a:schemeClr val="accent1"/>
+          </a:lnRef>
+          <a:fillRef idx="3">
+            <a:schemeClr val="accent1"/>
+          </a:fillRef>
+          <a:effectRef idx="2">
+            <a:schemeClr val="accent1"/>
+          </a:effectRef>
+          <a:fontRef idx="minor">
+            <a:schemeClr val="lt1"/>
+          </a:fontRef>
+        </p:style>
+        <p:txBody>
+          <a:bodyPr rtlCol="0" anchor="ctr"/>
+          <a:lstStyle/>
+          <a:p>
+            <a:pPr algn="ctr"/>
+            <a:endParaRPr/>
+          </a:p>
+        </p:txBody>
+      </p:sp>
+      <p:sp>
+        <p:nvSpPr>
+          <p:cNvPr id="16" name="Rounded Rectangle 15"/>
+          <p:cNvSpPr/>
+          <p:nvPr/>
+        </p:nvSpPr>
+        <p:spPr>
+          <a:xfrm>
+            <a:off x="9875520" y="2011680"/>
+            <a:ext cx="1920240" cy="1645920"/>
+          </a:xfrm>
+          <a:prstGeom prst="roundRect">
+            <a:avLst/>
+          </a:prstGeom>
+          <a:solidFill>
+            <a:srgbClr val="F0F9FF"/>
+          </a:solidFill>
+          <a:ln w="25400">
+            <a:solidFill>
+              <a:srgbClr val="7C3AED"/>
+            </a:solidFill>
+          </a:ln>
+        </p:spPr>
+        <p:style>
+          <a:lnRef idx="1">
+            <a:schemeClr val="accent1"/>
+          </a:lnRef>
+          <a:fillRef idx="3">
+            <a:schemeClr val="accent1"/>
+          </a:fillRef>
+          <a:effectRef idx="2">
+            <a:schemeClr val="accent1"/>
+          </a:effectRef>
+          <a:fontRef idx="minor">
+            <a:schemeClr val="lt1"/>
+          </a:fontRef>
+        </p:style>
+        <p:txBody>
+          <a:bodyPr wrap="square" rtlCol="0" anchor="ctr"/>
+          <a:lstStyle/>
+          <a:p>
+            <a:pPr algn="ctr">
+              <a:spcAft>
+                <a:spcPts val="800"/>
+              </a:spcAft>
+              <a:defRPr sz="1100" b="1">
+                <a:solidFill>
+                  <a:srgbClr val="7C3AED"/>
+                </a:solidFill>
+                <a:latin typeface="Arial"/>
+              </a:defRPr>
+            </a:pPr>
+            <a:r>
+              <a:t>LANGKAH 5</a:t>
+            </a:r>
+          </a:p>
+          <a:p>
+            <a:pPr algn="ctr">
+              <a:defRPr sz="1600" b="1">
+                <a:solidFill>
+                  <a:srgbClr val="0F172A"/>
+                </a:solidFill>
+                <a:latin typeface="Arial"/>
+              </a:defRPr>
+            </a:pPr>
+            <a:r>
+              <a:t>ANALYZE</a:t>
+            </a:r>
+          </a:p>
+        </p:txBody>
+      </p:sp>
+      <p:sp>
+        <p:nvSpPr>
+          <p:cNvPr id="17" name="TextBox 16"/>
+          <p:cNvSpPr txBox="1"/>
+          <p:nvPr/>
+        </p:nvSpPr>
+        <p:spPr>
+          <a:xfrm>
+            <a:off x="9784080" y="3931920"/>
+            <a:ext cx="2103120" cy="1828800"/>
+          </a:xfrm>
+          <a:prstGeom prst="rect">
+            <a:avLst/>
+          </a:prstGeom>
+          <a:noFill/>
+        </p:spPr>
+        <p:txBody>
+          <a:bodyPr wrap="square">
+            <a:spAutoFit/>
+          </a:bodyPr>
+          <a:lstStyle/>
+          <a:p>
+            <a:pPr algn="ctr">
+              <a:lnSpc>
+                <a:spcPct val="120000"/>
+              </a:lnSpc>
+              <a:defRPr sz="1100">
+                <a:solidFill>
+                  <a:srgbClr val="1E293B"/>
+                </a:solidFill>
+                <a:latin typeface="Arial"/>
+              </a:defRPr>
+            </a:pPr>
+            <a:r>
+              <a:t>Dashboard OEE &amp; Analytics</a:t>
+            </a:r>
+            <a:br/>
+            <a:r>
+              <a:t>Konsolidasi pencapaian target per jam, OEE, &amp; cycle time.</a:t>
+            </a:r>
+          </a:p>
+        </p:txBody>
+      </p:sp>
+    </p:spTree>
+  </p:cSld>
+  <p:clrMapOvr>
+    <a:masterClrMapping/>
+  </p:clrMapOvr>
+</p:sld>
+</file>
+
+<file path=ppt/slides/slide13.xml><?xml version="1.0" encoding="utf-8"?>
+<p:sld xmlns:a="http://schemas.openxmlformats.org/drawingml/2006/main" xmlns:r="http://schemas.openxmlformats.org/officeDocument/2006/relationships" xmlns:p="http://schemas.openxmlformats.org/presentationml/2006/main">
+  <p:cSld>
+    <p:bg>
+      <p:bgPr>
+        <a:solidFill>
+          <a:srgbClr val="FFFFFF"/>
+        </a:solidFill>
+        <a:effectLst/>
+      </p:bgPr>
+    </p:bg>
+    <p:spTree>
+      <p:nvGrpSpPr>
+        <p:cNvPr id="1" name=""/>
+        <p:cNvGrpSpPr/>
+        <p:nvPr/>
+      </p:nvGrpSpPr>
+      <p:grpSpPr>
+        <a:xfrm>
+          <a:off x="0" y="0"/>
+          <a:ext cx="0" cy="0"/>
+          <a:chOff x="0" y="0"/>
+          <a:chExt cx="0" cy="0"/>
+        </a:xfrm>
+      </p:grpSpPr>
+      <p:sp>
+        <p:nvSpPr>
+          <p:cNvPr id="2" name="TextBox 1"/>
+          <p:cNvSpPr txBox="1"/>
+          <p:nvPr/>
+        </p:nvSpPr>
+        <p:spPr>
+          <a:xfrm>
+            <a:off x="731520" y="365760"/>
+            <a:ext cx="10725912" cy="365760"/>
+          </a:xfrm>
+          <a:prstGeom prst="rect">
+            <a:avLst/>
+          </a:prstGeom>
+          <a:noFill/>
+        </p:spPr>
+        <p:txBody>
+          <a:bodyPr wrap="square">
+            <a:spAutoFit/>
+          </a:bodyPr>
+          <a:lstStyle/>
+          <a:p>
+            <a:pPr>
+              <a:defRPr sz="1000" b="1">
+                <a:solidFill>
+                  <a:srgbClr val="0D9488"/>
+                </a:solidFill>
+                <a:latin typeface="Arial"/>
+              </a:defRPr>
+            </a:pPr>
+            <a:r>
+              <a:t>PILLAR 7: SYSTEM ARCHITECTURE</a:t>
+            </a:r>
+          </a:p>
+        </p:txBody>
+      </p:sp>
+      <p:sp>
+        <p:nvSpPr>
+          <p:cNvPr id="3" name="TextBox 2"/>
+          <p:cNvSpPr txBox="1"/>
+          <p:nvPr/>
+        </p:nvSpPr>
+        <p:spPr>
+          <a:xfrm>
+            <a:off x="731520" y="640080"/>
+            <a:ext cx="10725912" cy="731520"/>
+          </a:xfrm>
+          <a:prstGeom prst="rect">
+            <a:avLst/>
+          </a:prstGeom>
+          <a:noFill/>
+        </p:spPr>
+        <p:txBody>
+          <a:bodyPr wrap="square">
+            <a:spAutoFit/>
+          </a:bodyPr>
+          <a:lstStyle/>
+          <a:p>
+            <a:pPr>
+              <a:defRPr sz="2800" b="1">
+                <a:solidFill>
+                  <a:srgbClr val="0F172A"/>
+                </a:solidFill>
+                <a:latin typeface="Arial"/>
+              </a:defRPr>
+            </a:pPr>
+            <a:r>
+              <a:t>Spesifikasi Perangkat Keras &amp; Infrastruktur Lini</a:t>
+            </a:r>
+          </a:p>
+        </p:txBody>
+      </p:sp>
+      <p:sp>
+        <p:nvSpPr>
+          <p:cNvPr id="4" name="Rounded Rectangle 3"/>
+          <p:cNvSpPr/>
+          <p:nvPr/>
+        </p:nvSpPr>
+        <p:spPr>
+          <a:xfrm>
+            <a:off x="731520" y="2011680"/>
+            <a:ext cx="2377440" cy="3931920"/>
+          </a:xfrm>
+          <a:prstGeom prst="roundRect">
+            <a:avLst/>
+          </a:prstGeom>
+          <a:solidFill>
+            <a:srgbClr val="F0F9FF"/>
+          </a:solidFill>
+          <a:ln w="31750">
+            <a:solidFill>
+              <a:srgbClr val="0D9488"/>
+            </a:solidFill>
+          </a:ln>
+        </p:spPr>
+        <p:style>
+          <a:lnRef idx="1">
+            <a:schemeClr val="accent1"/>
+          </a:lnRef>
+          <a:fillRef idx="3">
+            <a:schemeClr val="accent1"/>
+          </a:fillRef>
+          <a:effectRef idx="2">
+            <a:schemeClr val="accent1"/>
+          </a:effectRef>
+          <a:fontRef idx="minor">
+            <a:schemeClr val="lt1"/>
+          </a:fontRef>
+        </p:style>
+        <p:txBody>
+          <a:bodyPr wrap="square" rtlCol="0" anchor="ctr"/>
+          <a:lstStyle/>
+          <a:p>
+            <a:pPr algn="ctr">
+              <a:spcAft>
+                <a:spcPts val="1000"/>
+              </a:spcAft>
+              <a:defRPr sz="3600" b="1">
+                <a:solidFill>
+                  <a:srgbClr val="0D9488"/>
+                </a:solidFill>
+                <a:latin typeface="Arial"/>
+              </a:defRPr>
+            </a:pPr>
+            <a:r>
+              <a:t>01</a:t>
+            </a:r>
+          </a:p>
+          <a:p>
+            <a:pPr>
+              <a:spcAft>
+                <a:spcPts val="1500"/>
+              </a:spcAft>
+              <a:defRPr sz="1400" b="1">
+                <a:solidFill>
+                  <a:srgbClr val="0F172A"/>
+                </a:solidFill>
+                <a:latin typeface="Arial"/>
+              </a:defRPr>
+            </a:pPr>
+            <a:r>
+              <a:t>TABLET OPERATOR</a:t>
+            </a:r>
+          </a:p>
+          <a:p>
+            <a:pPr>
+              <a:lnSpc>
+                <a:spcPct val="120000"/>
+              </a:lnSpc>
+              <a:defRPr sz="1100">
+                <a:solidFill>
+                  <a:srgbClr val="1E293B"/>
+                </a:solidFill>
+                <a:latin typeface="Arial"/>
+              </a:defRPr>
+            </a:pPr>
+            <a:r>
+              <a:t>Tablet layar sentuh min. 10 inci (iOS/Android) ditempatkan di stasiun perakitan operator &amp; stasiun visual kualitas (QMS) sebagai terminal input.</a:t>
+            </a:r>
+          </a:p>
+        </p:txBody>
+      </p:sp>
+      <p:sp>
+        <p:nvSpPr>
+          <p:cNvPr id="5" name="Rounded Rectangle 4"/>
+          <p:cNvSpPr/>
+          <p:nvPr/>
+        </p:nvSpPr>
+        <p:spPr>
+          <a:xfrm>
+            <a:off x="3657600" y="2011680"/>
+            <a:ext cx="2377440" cy="3931920"/>
+          </a:xfrm>
+          <a:prstGeom prst="roundRect">
+            <a:avLst/>
+          </a:prstGeom>
+          <a:solidFill>
+            <a:srgbClr val="F0F9FF"/>
+          </a:solidFill>
+          <a:ln w="31750">
+            <a:solidFill>
+              <a:srgbClr val="EA580C"/>
+            </a:solidFill>
+          </a:ln>
+        </p:spPr>
+        <p:style>
+          <a:lnRef idx="1">
+            <a:schemeClr val="accent1"/>
+          </a:lnRef>
+          <a:fillRef idx="3">
+            <a:schemeClr val="accent1"/>
+          </a:fillRef>
+          <a:effectRef idx="2">
+            <a:schemeClr val="accent1"/>
+          </a:effectRef>
+          <a:fontRef idx="minor">
+            <a:schemeClr val="lt1"/>
+          </a:fontRef>
+        </p:style>
+        <p:txBody>
+          <a:bodyPr wrap="square" rtlCol="0" anchor="ctr"/>
+          <a:lstStyle/>
+          <a:p>
+            <a:pPr algn="ctr">
+              <a:spcAft>
+                <a:spcPts val="1000"/>
+              </a:spcAft>
+              <a:defRPr sz="3600" b="1">
+                <a:solidFill>
+                  <a:srgbClr val="EA580C"/>
+                </a:solidFill>
+                <a:latin typeface="Arial"/>
+              </a:defRPr>
+            </a:pPr>
+            <a:r>
+              <a:t>02</a:t>
+            </a:r>
+          </a:p>
+          <a:p>
+            <a:pPr>
+              <a:spcAft>
+                <a:spcPts val="1500"/>
+              </a:spcAft>
+              <a:defRPr sz="1400" b="1">
+                <a:solidFill>
+                  <a:srgbClr val="0F172A"/>
+                </a:solidFill>
+                <a:latin typeface="Arial"/>
+              </a:defRPr>
+            </a:pPr>
+            <a:r>
+              <a:t>BARCODE SCANNER</a:t>
+            </a:r>
+          </a:p>
+          <a:p>
+            <a:pPr>
+              <a:lnSpc>
+                <a:spcPct val="120000"/>
+              </a:lnSpc>
+              <a:defRPr sz="1100">
+                <a:solidFill>
+                  <a:srgbClr val="1E293B"/>
+                </a:solidFill>
+                <a:latin typeface="Arial"/>
+              </a:defRPr>
+            </a:pPr>
+            <a:r>
+              <a:t>Pemindai genggam USB/Bluetooth dalam mode Keyboard Emulation untuk scan otomatis nomor Lot material &amp; barcode bin kosong Kanban secara cepat.</a:t>
+            </a:r>
+          </a:p>
+        </p:txBody>
+      </p:sp>
+      <p:sp>
+        <p:nvSpPr>
+          <p:cNvPr id="6" name="Rounded Rectangle 5"/>
+          <p:cNvSpPr/>
+          <p:nvPr/>
+        </p:nvSpPr>
+        <p:spPr>
+          <a:xfrm>
+            <a:off x="6583680" y="2011680"/>
+            <a:ext cx="2377440" cy="3931920"/>
+          </a:xfrm>
+          <a:prstGeom prst="roundRect">
+            <a:avLst/>
+          </a:prstGeom>
+          <a:solidFill>
+            <a:srgbClr val="F0F9FF"/>
+          </a:solidFill>
+          <a:ln w="31750">
+            <a:solidFill>
+              <a:srgbClr val="D97706"/>
+            </a:solidFill>
+          </a:ln>
+        </p:spPr>
+        <p:style>
+          <a:lnRef idx="1">
+            <a:schemeClr val="accent1"/>
+          </a:lnRef>
+          <a:fillRef idx="3">
+            <a:schemeClr val="accent1"/>
+          </a:fillRef>
+          <a:effectRef idx="2">
+            <a:schemeClr val="accent1"/>
+          </a:effectRef>
+          <a:fontRef idx="minor">
+            <a:schemeClr val="lt1"/>
+          </a:fontRef>
+        </p:style>
+        <p:txBody>
+          <a:bodyPr wrap="square" rtlCol="0" anchor="ctr"/>
+          <a:lstStyle/>
+          <a:p>
+            <a:pPr algn="ctr">
+              <a:spcAft>
+                <a:spcPts val="1000"/>
+              </a:spcAft>
+              <a:defRPr sz="3600" b="1">
+                <a:solidFill>
+                  <a:srgbClr val="D97706"/>
+                </a:solidFill>
+                <a:latin typeface="Arial"/>
+              </a:defRPr>
+            </a:pPr>
+            <a:r>
+              <a:t>03</a:t>
+            </a:r>
+          </a:p>
+          <a:p>
+            <a:pPr>
+              <a:spcAft>
+                <a:spcPts val="1500"/>
+              </a:spcAft>
+              <a:defRPr sz="1400" b="1">
+                <a:solidFill>
+                  <a:srgbClr val="0F172A"/>
+                </a:solidFill>
+                <a:latin typeface="Arial"/>
+              </a:defRPr>
+            </a:pPr>
+            <a:r>
+              <a:t>ANDON MONITOR TV</a:t>
+            </a:r>
+          </a:p>
+          <a:p>
+            <a:pPr>
+              <a:lnSpc>
+                <a:spcPct val="120000"/>
+              </a:lnSpc>
+              <a:defRPr sz="1100">
+                <a:solidFill>
+                  <a:srgbClr val="1E293B"/>
+                </a:solidFill>
+                <a:latin typeface="Arial"/>
+              </a:defRPr>
+            </a:pPr>
+            <a:r>
+              <a:t>Smart TV / TV LCD min. 43 inci di lorong stasiun perakitan untuk visualisasi stasiunDOWN secara terpusat bagi supervisor &amp; tim utilitas.</a:t>
+            </a:r>
+          </a:p>
+        </p:txBody>
+      </p:sp>
+      <p:sp>
+        <p:nvSpPr>
+          <p:cNvPr id="7" name="Rounded Rectangle 6"/>
+          <p:cNvSpPr/>
+          <p:nvPr/>
+        </p:nvSpPr>
+        <p:spPr>
+          <a:xfrm>
+            <a:off x="9509760" y="2011680"/>
+            <a:ext cx="2377440" cy="3931920"/>
+          </a:xfrm>
+          <a:prstGeom prst="roundRect">
+            <a:avLst/>
+          </a:prstGeom>
+          <a:solidFill>
+            <a:srgbClr val="F0F9FF"/>
+          </a:solidFill>
+          <a:ln w="31750">
+            <a:solidFill>
+              <a:srgbClr val="7C3AED"/>
+            </a:solidFill>
+          </a:ln>
+        </p:spPr>
+        <p:style>
+          <a:lnRef idx="1">
+            <a:schemeClr val="accent1"/>
+          </a:lnRef>
+          <a:fillRef idx="3">
+            <a:schemeClr val="accent1"/>
+          </a:fillRef>
+          <a:effectRef idx="2">
+            <a:schemeClr val="accent1"/>
+          </a:effectRef>
+          <a:fontRef idx="minor">
+            <a:schemeClr val="lt1"/>
+          </a:fontRef>
+        </p:style>
+        <p:txBody>
+          <a:bodyPr wrap="square" rtlCol="0" anchor="ctr"/>
+          <a:lstStyle/>
+          <a:p>
+            <a:pPr algn="ctr">
+              <a:spcAft>
+                <a:spcPts val="1000"/>
+              </a:spcAft>
+              <a:defRPr sz="3600" b="1">
+                <a:solidFill>
+                  <a:srgbClr val="7C3AED"/>
+                </a:solidFill>
+                <a:latin typeface="Arial"/>
+              </a:defRPr>
+            </a:pPr>
+            <a:r>
+              <a:t>04</a:t>
+            </a:r>
+          </a:p>
+          <a:p>
+            <a:pPr>
+              <a:spcAft>
+                <a:spcPts val="1500"/>
+              </a:spcAft>
+              <a:defRPr sz="1400" b="1">
+                <a:solidFill>
+                  <a:srgbClr val="0F172A"/>
+                </a:solidFill>
+                <a:latin typeface="Arial"/>
+              </a:defRPr>
+            </a:pPr>
+            <a:r>
+              <a:t>DATABASE SUPABASE</a:t>
+            </a:r>
+          </a:p>
+          <a:p>
+            <a:pPr>
+              <a:lnSpc>
+                <a:spcPct val="120000"/>
+              </a:lnSpc>
+              <a:defRPr sz="1100">
+                <a:solidFill>
+                  <a:srgbClr val="1E293B"/>
+                </a:solidFill>
+                <a:latin typeface="Arial"/>
+              </a:defRPr>
+            </a:pPr>
+            <a:r>
+              <a:t>Koneksi Wi-Fi pabrik berlatensi rendah (&lt;50ms) yang terhubung langsung ke skema Supabase aman untuk sinkronisasi inventaris &amp; order secara instan.</a:t>
+            </a:r>
+          </a:p>
+        </p:txBody>
+      </p:sp>
+    </p:spTree>
+  </p:cSld>
+  <p:clrMapOvr>
+    <a:masterClrMapping/>
+  </p:clrMapOvr>
+</p:sld>
+</file>
+
+<file path=ppt/slides/slide14.xml><?xml version="1.0" encoding="utf-8"?>
+<p:sld xmlns:a="http://schemas.openxmlformats.org/drawingml/2006/main" xmlns:r="http://schemas.openxmlformats.org/officeDocument/2006/relationships" xmlns:p="http://schemas.openxmlformats.org/presentationml/2006/main">
+  <p:cSld>
+    <p:bg>
+      <p:bgPr>
+        <a:solidFill>
+          <a:srgbClr val="FFFFFF"/>
+        </a:solidFill>
+        <a:effectLst/>
+      </p:bgPr>
+    </p:bg>
+    <p:spTree>
+      <p:nvGrpSpPr>
+        <p:cNvPr id="1" name=""/>
+        <p:cNvGrpSpPr/>
+        <p:nvPr/>
+      </p:nvGrpSpPr>
+      <p:grpSpPr>
+        <a:xfrm>
+          <a:off x="0" y="0"/>
+          <a:ext cx="0" cy="0"/>
+          <a:chOff x="0" y="0"/>
+          <a:chExt cx="0" cy="0"/>
+        </a:xfrm>
+      </p:grpSpPr>
+      <p:sp>
+        <p:nvSpPr>
+          <p:cNvPr id="2" name="TextBox 1"/>
+          <p:cNvSpPr txBox="1"/>
+          <p:nvPr/>
+        </p:nvSpPr>
+        <p:spPr>
+          <a:xfrm>
+            <a:off x="731520" y="365760"/>
+            <a:ext cx="10725912" cy="365760"/>
+          </a:xfrm>
+          <a:prstGeom prst="rect">
+            <a:avLst/>
+          </a:prstGeom>
+          <a:noFill/>
+        </p:spPr>
+        <p:txBody>
+          <a:bodyPr wrap="square">
+            <a:spAutoFit/>
+          </a:bodyPr>
+          <a:lstStyle/>
+          <a:p>
+            <a:pPr>
+              <a:defRPr sz="1000" b="1">
+                <a:solidFill>
+                  <a:srgbClr val="0D9488"/>
+                </a:solidFill>
+                <a:latin typeface="Arial"/>
+              </a:defRPr>
+            </a:pPr>
+            <a:r>
+              <a:t>PILLAR 8: OPERATION STANDARD</a:t>
+            </a:r>
+          </a:p>
+        </p:txBody>
+      </p:sp>
+      <p:sp>
+        <p:nvSpPr>
+          <p:cNvPr id="3" name="TextBox 2"/>
+          <p:cNvSpPr txBox="1"/>
+          <p:nvPr/>
+        </p:nvSpPr>
+        <p:spPr>
+          <a:xfrm>
+            <a:off x="731520" y="640080"/>
+            <a:ext cx="10725912" cy="731520"/>
+          </a:xfrm>
+          <a:prstGeom prst="rect">
+            <a:avLst/>
+          </a:prstGeom>
+          <a:noFill/>
+        </p:spPr>
+        <p:txBody>
+          <a:bodyPr wrap="square">
+            <a:spAutoFit/>
+          </a:bodyPr>
+          <a:lstStyle/>
+          <a:p>
+            <a:pPr>
+              <a:defRPr sz="2800" b="1">
+                <a:solidFill>
+                  <a:srgbClr val="0F172A"/>
+                </a:solidFill>
+                <a:latin typeface="Arial"/>
+              </a:defRPr>
+            </a:pPr>
+            <a:r>
+              <a:t>Pedoman Standardisasi Label Barcode Pabrik</a:t>
+            </a:r>
+          </a:p>
+        </p:txBody>
+      </p:sp>
+      <p:sp>
+        <p:nvSpPr>
+          <p:cNvPr id="4" name="TextBox 3"/>
+          <p:cNvSpPr txBox="1"/>
+          <p:nvPr/>
+        </p:nvSpPr>
+        <p:spPr>
+          <a:xfrm>
+            <a:off x="731520" y="1828800"/>
+            <a:ext cx="5029200" cy="4114800"/>
+          </a:xfrm>
+          <a:prstGeom prst="rect">
+            <a:avLst/>
+          </a:prstGeom>
+          <a:noFill/>
+        </p:spPr>
+        <p:txBody>
+          <a:bodyPr wrap="square">
+            <a:spAutoFit/>
+          </a:bodyPr>
+          <a:lstStyle/>
+          <a:p>
+            <a:pPr>
+              <a:spcAft>
+                <a:spcPts val="1200"/>
+              </a:spcAft>
+              <a:defRPr sz="2000" b="1">
+                <a:solidFill>
+                  <a:srgbClr val="0F172A"/>
+                </a:solidFill>
+                <a:latin typeface="Arial"/>
+              </a:defRPr>
+            </a:pPr>
+            <a:r>
+              <a:t>Format Sintaks Label &amp; Pemetaan Parser</a:t>
+            </a:r>
+          </a:p>
+          <a:p>
+            <a:pPr>
+              <a:lnSpc>
+                <a:spcPct val="110000"/>
+              </a:lnSpc>
+              <a:spcAft>
+                <a:spcPts val="1200"/>
+              </a:spcAft>
+              <a:defRPr sz="1250">
+                <a:solidFill>
+                  <a:srgbClr val="1E293B"/>
+                </a:solidFill>
+                <a:latin typeface="Arial"/>
+              </a:defRPr>
+            </a:pPr>
+            <a:r>
+              <a:t>• Format Kartu Kanban (Bin Kosong):</a:t>
+            </a:r>
+            <a:br/>
+            <a:r>
+              <a:t>Sintaks: KB-[KODE_STASIUN]-[NOMOR_PART]</a:t>
+            </a:r>
+            <a:br/>
+            <a:r>
+              <a:t>Contoh: KB-STA1-CYL-A1</a:t>
+            </a:r>
+            <a:br/>
+            <a:r>
+              <a:t>(Fungsi: Scan bin kosong memicu order replenishment baru stasiun 1).</a:t>
+            </a:r>
+          </a:p>
+          <a:p>
+            <a:pPr>
+              <a:lnSpc>
+                <a:spcPct val="110000"/>
+              </a:lnSpc>
+              <a:spcAft>
+                <a:spcPts val="1200"/>
+              </a:spcAft>
+              <a:defRPr sz="1250">
+                <a:solidFill>
+                  <a:srgbClr val="1E293B"/>
+                </a:solidFill>
+                <a:latin typeface="Arial"/>
+              </a:defRPr>
+            </a:pPr>
+            <a:r>
+              <a:t>• Format Lot Penerimaan (Barang Datang):</a:t>
+            </a:r>
+            <a:br/>
+            <a:r>
+              <a:t>Sintaks: LOT-[NOMOR_PART]-[YYYYMMDD]-[BATCH]</a:t>
+            </a:r>
+            <a:br/>
+            <a:r>
+              <a:t>Contoh: LOT-CYL-A1-20260519-01</a:t>
+            </a:r>
+            <a:br/>
+            <a:r>
+              <a:t>(Fungsi: Memastikan ketertelusuran cacat bahan baku di MRB).</a:t>
+            </a:r>
+          </a:p>
+          <a:p>
+            <a:pPr>
+              <a:lnSpc>
+                <a:spcPct val="110000"/>
+              </a:lnSpc>
+              <a:spcAft>
+                <a:spcPts val="1200"/>
+              </a:spcAft>
+              <a:defRPr sz="1250">
+                <a:solidFill>
+                  <a:srgbClr val="1E293B"/>
+                </a:solidFill>
+                <a:latin typeface="Arial"/>
+              </a:defRPr>
+            </a:pPr>
+            <a:r>
+              <a:t>• Format Perintah Kerja (Work Order):</a:t>
+            </a:r>
+            <a:br/>
+            <a:r>
+              <a:t>Sintaks: WO-[TIPE_PRODUK]-[NO_URUT]</a:t>
+            </a:r>
+            <a:br/>
+            <a:r>
+              <a:t>Contoh: WO-CYL-A1-0089</a:t>
+            </a:r>
+            <a:br/>
+            <a:r>
+              <a:t>(Fungsi: Scan WO untuk memuat langkah instruksi perakitan).</a:t>
+            </a:r>
+          </a:p>
+        </p:txBody>
+      </p:sp>
+      <p:sp>
+        <p:nvSpPr>
+          <p:cNvPr id="5" name="TextBox 4"/>
+          <p:cNvSpPr txBox="1"/>
+          <p:nvPr/>
+        </p:nvSpPr>
+        <p:spPr>
+          <a:xfrm>
+            <a:off x="6217920" y="1828800"/>
+            <a:ext cx="5212080" cy="4114800"/>
+          </a:xfrm>
+          <a:prstGeom prst="rect">
+            <a:avLst/>
+          </a:prstGeom>
+          <a:noFill/>
+        </p:spPr>
+        <p:txBody>
+          <a:bodyPr wrap="square">
+            <a:spAutoFit/>
+          </a:bodyPr>
+          <a:lstStyle/>
+          <a:p>
+            <a:pPr>
+              <a:spcAft>
+                <a:spcPts val="1000"/>
+              </a:spcAft>
+              <a:defRPr sz="1400" b="1">
+                <a:solidFill>
+                  <a:srgbClr val="0D9488"/>
+                </a:solidFill>
+                <a:latin typeface="Arial"/>
+              </a:defRPr>
+            </a:pPr>
+            <a:r>
+              <a:t>PEDOMAN IMPLEMENTASI SCANNER</a:t>
+            </a:r>
+          </a:p>
+          <a:p>
+            <a:pPr>
+              <a:lnSpc>
+                <a:spcPct val="125000"/>
+              </a:lnSpc>
+              <a:defRPr sz="1250">
+                <a:solidFill>
+                  <a:srgbClr val="64748B"/>
+                </a:solidFill>
+                <a:latin typeface="Arial"/>
+              </a:defRPr>
+            </a:pPr>
+            <a:r>
+              <a:t>💡 Petunjuk Integrasi Pemindai:</a:t>
+            </a:r>
+            <a:br/>
+            <a:br/>
+            <a:r>
+              <a:t>1. Pemindai harus diatur ke mode keyboard (HID Mode) agar tulisan barcode langsung terisi ke kotak input teks aplikasi.</a:t>
+            </a:r>
+            <a:br/>
+            <a:br/>
+            <a:r>
+              <a:t>2. Rekomendasi stiker barcode tahan panas/oli untuk stiker rak logam atau bin perakitan logam agar tidak luntur saat proses produksi.</a:t>
+            </a:r>
+            <a:br/>
+            <a:br/>
+            <a:r>
+              <a:t>3. Parser regex yang tertanam pada widget Mavi-MES memvalidasi kecocokan nomor part secara otomatis untuk menghindari salah pemicuan Kanban stasiun.</a:t>
+            </a:r>
+          </a:p>
+        </p:txBody>
+      </p:sp>
+    </p:spTree>
+  </p:cSld>
+  <p:clrMapOvr>
+    <a:masterClrMapping/>
+  </p:clrMapOvr>
+</p:sld>
+</file>
+
+<file path=ppt/slides/slide15.xml><?xml version="1.0" encoding="utf-8"?>
+<p:sld xmlns:a="http://schemas.openxmlformats.org/drawingml/2006/main" xmlns:r="http://schemas.openxmlformats.org/officeDocument/2006/relationships" xmlns:p="http://schemas.openxmlformats.org/presentationml/2006/main">
+  <p:cSld>
+    <p:bg>
+      <p:bgPr>
+        <a:solidFill>
+          <a:srgbClr val="FFFFFF"/>
+        </a:solidFill>
+        <a:effectLst/>
+      </p:bgPr>
+    </p:bg>
+    <p:spTree>
+      <p:nvGrpSpPr>
+        <p:cNvPr id="1" name=""/>
+        <p:cNvGrpSpPr/>
+        <p:nvPr/>
+      </p:nvGrpSpPr>
+      <p:grpSpPr>
+        <a:xfrm>
+          <a:off x="0" y="0"/>
+          <a:ext cx="0" cy="0"/>
+          <a:chOff x="0" y="0"/>
+          <a:chExt cx="0" cy="0"/>
+        </a:xfrm>
+      </p:grpSpPr>
+      <p:sp>
+        <p:nvSpPr>
+          <p:cNvPr id="2" name="TextBox 1"/>
+          <p:cNvSpPr txBox="1"/>
+          <p:nvPr/>
+        </p:nvSpPr>
+        <p:spPr>
+          <a:xfrm>
+            <a:off x="731520" y="365760"/>
+            <a:ext cx="10725912" cy="365760"/>
+          </a:xfrm>
+          <a:prstGeom prst="rect">
+            <a:avLst/>
+          </a:prstGeom>
+          <a:noFill/>
+        </p:spPr>
+        <p:txBody>
+          <a:bodyPr wrap="square">
+            <a:spAutoFit/>
+          </a:bodyPr>
+          <a:lstStyle/>
+          <a:p>
+            <a:pPr>
+              <a:defRPr sz="1000" b="1">
+                <a:solidFill>
+                  <a:srgbClr val="0D9488"/>
+                </a:solidFill>
+                <a:latin typeface="Arial"/>
+              </a:defRPr>
+            </a:pPr>
+            <a:r>
+              <a:t>PILLAR 9: TROUBLESHOOTING PLAYBOOK</a:t>
+            </a:r>
+          </a:p>
+        </p:txBody>
+      </p:sp>
+      <p:sp>
+        <p:nvSpPr>
+          <p:cNvPr id="3" name="TextBox 2"/>
+          <p:cNvSpPr txBox="1"/>
+          <p:nvPr/>
+        </p:nvSpPr>
+        <p:spPr>
+          <a:xfrm>
+            <a:off x="731520" y="640080"/>
+            <a:ext cx="10725912" cy="731520"/>
+          </a:xfrm>
+          <a:prstGeom prst="rect">
+            <a:avLst/>
+          </a:prstGeom>
+          <a:noFill/>
+        </p:spPr>
+        <p:txBody>
+          <a:bodyPr wrap="square">
+            <a:spAutoFit/>
+          </a:bodyPr>
+          <a:lstStyle/>
+          <a:p>
+            <a:pPr>
+              <a:defRPr sz="2800" b="1">
+                <a:solidFill>
+                  <a:srgbClr val="0F172A"/>
+                </a:solidFill>
+                <a:latin typeface="Arial"/>
+              </a:defRPr>
+            </a:pPr>
+            <a:r>
+              <a:t>Protokol Penanganan Masalah &amp; FAQ Operasional</a:t>
+            </a:r>
+          </a:p>
+        </p:txBody>
+      </p:sp>
+      <p:sp>
+        <p:nvSpPr>
+          <p:cNvPr id="4" name="TextBox 3"/>
+          <p:cNvSpPr txBox="1"/>
+          <p:nvPr/>
+        </p:nvSpPr>
+        <p:spPr>
+          <a:xfrm>
+            <a:off x="731520" y="1828800"/>
+            <a:ext cx="5029200" cy="4114800"/>
+          </a:xfrm>
+          <a:prstGeom prst="rect">
+            <a:avLst/>
+          </a:prstGeom>
+          <a:noFill/>
+        </p:spPr>
+        <p:txBody>
+          <a:bodyPr wrap="square">
+            <a:spAutoFit/>
+          </a:bodyPr>
+          <a:lstStyle/>
+          <a:p>
+            <a:pPr>
+              <a:spcAft>
+                <a:spcPts val="1200"/>
+              </a:spcAft>
+              <a:defRPr sz="1800" b="1">
+                <a:solidFill>
+                  <a:srgbClr val="0F172A"/>
+                </a:solidFill>
+                <a:latin typeface="Arial"/>
+              </a:defRPr>
+            </a:pPr>
+            <a:r>
+              <a:t>Gejala Gangguan Operasional Lapangan</a:t>
+            </a:r>
+          </a:p>
+          <a:p>
+            <a:pPr>
+              <a:lnSpc>
+                <a:spcPct val="120000"/>
+              </a:lnSpc>
+              <a:spcAft>
+                <a:spcPts val="1500"/>
+              </a:spcAft>
+              <a:defRPr sz="1300" b="1">
+                <a:solidFill>
+                  <a:srgbClr val="EA580C"/>
+                </a:solidFill>
+                <a:latin typeface="Arial"/>
+              </a:defRPr>
+            </a:pPr>
+            <a:r>
+              <a:t>✗ Gejala 1: Barcode dipindai tetapi pesanan pengisian Kanban tidak masuk ke antrean Water Spider.</a:t>
+            </a:r>
+          </a:p>
+          <a:p>
+            <a:pPr>
+              <a:lnSpc>
+                <a:spcPct val="120000"/>
+              </a:lnSpc>
+              <a:spcAft>
+                <a:spcPts val="1500"/>
+              </a:spcAft>
+              <a:defRPr sz="1300" b="1">
+                <a:solidFill>
+                  <a:srgbClr val="EA580C"/>
+                </a:solidFill>
+                <a:latin typeface="Arial"/>
+              </a:defRPr>
+            </a:pPr>
+            <a:r>
+              <a:t>✗ Gejala 2: Unit cacat terdeteksi stasiun QMS, tetapi stasiun perakitan operator tidak terkunci otomatis.</a:t>
+            </a:r>
+          </a:p>
+          <a:p>
+            <a:pPr>
+              <a:lnSpc>
+                <a:spcPct val="120000"/>
+              </a:lnSpc>
+              <a:spcAft>
+                <a:spcPts val="1500"/>
+              </a:spcAft>
+              <a:defRPr sz="1300" b="1">
+                <a:solidFill>
+                  <a:srgbClr val="EA580C"/>
+                </a:solidFill>
+                <a:latin typeface="Arial"/>
+              </a:defRPr>
+            </a:pPr>
+            <a:r>
+              <a:t>✗ Gejala 3: Angka pencapaian OEE dan grafik visualisasi downtime bernilai NaN atau kosong.</a:t>
+            </a:r>
+          </a:p>
+        </p:txBody>
+      </p:sp>
+      <p:sp>
+        <p:nvSpPr>
+          <p:cNvPr id="5" name="TextBox 4"/>
+          <p:cNvSpPr txBox="1"/>
+          <p:nvPr/>
+        </p:nvSpPr>
+        <p:spPr>
+          <a:xfrm>
+            <a:off x="6217920" y="1828800"/>
+            <a:ext cx="5212080" cy="4114800"/>
+          </a:xfrm>
+          <a:prstGeom prst="rect">
+            <a:avLst/>
+          </a:prstGeom>
+          <a:noFill/>
+        </p:spPr>
+        <p:txBody>
+          <a:bodyPr wrap="square">
+            <a:spAutoFit/>
+          </a:bodyPr>
+          <a:lstStyle/>
+          <a:p>
+            <a:pPr>
+              <a:spcAft>
+                <a:spcPts val="1200"/>
+              </a:spcAft>
+              <a:defRPr sz="1800" b="1">
+                <a:solidFill>
+                  <a:srgbClr val="0D9488"/>
+                </a:solidFill>
+                <a:latin typeface="Arial"/>
+              </a:defRPr>
+            </a:pPr>
+            <a:r>
+              <a:t>Solusi Penanganan Masalah Lapangan</a:t>
+            </a:r>
+          </a:p>
+          <a:p>
+            <a:pPr>
+              <a:lnSpc>
+                <a:spcPct val="120000"/>
+              </a:lnSpc>
+              <a:spcAft>
+                <a:spcPts val="1200"/>
+              </a:spcAft>
+              <a:defRPr sz="1250">
+                <a:solidFill>
+                  <a:srgbClr val="1E293B"/>
+                </a:solidFill>
+                <a:latin typeface="Arial"/>
+              </a:defRPr>
+            </a:pPr>
+            <a:r>
+              <a:t>✓ Solusi 1: Pastikan kursor input (focus) sedang aktif di kotak teks scanner pada tablet stasiun perakitan operator, dan Wi-Fi tablet dalam kondisi terhubung internet pabrik.</a:t>
+            </a:r>
+          </a:p>
+          <a:p>
+            <a:pPr>
+              <a:lnSpc>
+                <a:spcPct val="120000"/>
+              </a:lnSpc>
+              <a:spcAft>
+                <a:spcPts val="1200"/>
+              </a:spcAft>
+              <a:defRPr sz="1250">
+                <a:solidFill>
+                  <a:srgbClr val="1E293B"/>
+                </a:solidFill>
+                <a:latin typeface="Arial"/>
+              </a:defRPr>
+            </a:pPr>
+            <a:r>
+              <a:t>✓ Solusi 2: Pastikan stasiun kerja di stasiun Quality Inspection dan stasiun Order Execution terdaftar menggunakan ID stasiun yang sama persis di database Supabase.</a:t>
+            </a:r>
+          </a:p>
+          <a:p>
+            <a:pPr>
+              <a:lnSpc>
+                <a:spcPct val="120000"/>
+              </a:lnSpc>
+              <a:spcAft>
+                <a:spcPts val="1200"/>
+              </a:spcAft>
+              <a:defRPr sz="1250">
+                <a:solidFill>
+                  <a:srgbClr val="1E293B"/>
+                </a:solidFill>
+                <a:latin typeface="Arial"/>
+              </a:defRPr>
+            </a:pPr>
+            <a:r>
+              <a:t>✓ Solusi 3: Periksa tabel Station_Activity_History. Pastikan stasiun telah menyelesaikan minimal 1 work order agar kalkulasi rasio kualitas/performance OEE terakumulasi secara utuh.</a:t>
+            </a:r>
+          </a:p>
+        </p:txBody>
+      </p:sp>
+    </p:spTree>
+  </p:cSld>
+  <p:clrMapOvr>
+    <a:masterClrMapping/>
+  </p:clrMapOvr>
+</p:sld>
+</file>
+
+<file path=ppt/slides/slide16.xml><?xml version="1.0" encoding="utf-8"?>
+<p:sld xmlns:a="http://schemas.openxmlformats.org/drawingml/2006/main" xmlns:r="http://schemas.openxmlformats.org/officeDocument/2006/relationships" xmlns:p="http://schemas.openxmlformats.org/presentationml/2006/main">
   <p:cSld>
     <p:bg>
       <p:bgPr>
@@ -3198,7 +6229,14 @@
         <p:cNvGrpSpPr/>
         <p:nvPr/>
       </p:nvGrpSpPr>
-      <p:grpSpPr/>
+      <p:grpSpPr>
+        <a:xfrm>
+          <a:off x="0" y="0"/>
+          <a:ext cx="0" cy="0"/>
+          <a:chOff x="0" y="0"/>
+          <a:chExt cx="0" cy="0"/>
+        </a:xfrm>
+      </p:grpSpPr>
       <p:sp>
         <p:nvSpPr>
           <p:cNvPr id="2" name="TextBox 1"/>
@@ -3323,7 +6361,1002 @@
 </file>
 
 <file path=ppt/slides/slide2.xml><?xml version="1.0" encoding="utf-8"?>
-<p:sld xmlns:a="http://schemas.openxmlformats.org/drawingml/2006/main" xmlns:p="http://schemas.openxmlformats.org/presentationml/2006/main" xmlns:r="http://schemas.openxmlformats.org/officeDocument/2006/relationships">
+<p:sld xmlns:a="http://schemas.openxmlformats.org/drawingml/2006/main" xmlns:r="http://schemas.openxmlformats.org/officeDocument/2006/relationships" xmlns:p="http://schemas.openxmlformats.org/presentationml/2006/main">
+  <p:cSld>
+    <p:spTree>
+      <p:nvGrpSpPr>
+        <p:cNvPr id="1" name=""/>
+        <p:cNvGrpSpPr/>
+        <p:nvPr/>
+      </p:nvGrpSpPr>
+      <p:grpSpPr>
+        <a:xfrm>
+          <a:off x="0" y="0"/>
+          <a:ext cx="0" cy="0"/>
+          <a:chOff x="0" y="0"/>
+          <a:chExt cx="0" cy="0"/>
+        </a:xfrm>
+      </p:grpSpPr>
+      <p:pic>
+        <p:nvPicPr>
+          <p:cNvPr id="3" name="Picture 2">
+            <a:extLst>
+              <a:ext uri="{FF2B5EF4-FFF2-40B4-BE49-F238E27FC236}">
+                <a16:creationId xmlns:a16="http://schemas.microsoft.com/office/drawing/2014/main" id="{122C07A5-808F-4E25-9261-5D6094532A3D}"/>
+              </a:ext>
+            </a:extLst>
+          </p:cNvPr>
+          <p:cNvPicPr>
+            <a:picLocks noChangeAspect="1"/>
+          </p:cNvPicPr>
+          <p:nvPr/>
+        </p:nvPicPr>
+        <p:blipFill rotWithShape="1">
+          <a:blip r:embed="rId2"/>
+          <a:srcRect l="5561" t="4245" b="4750"/>
+          <a:stretch/>
+        </p:blipFill>
+        <p:spPr>
+          <a:xfrm>
+            <a:off x="364066" y="1202266"/>
+            <a:ext cx="6326371" cy="4597401"/>
+          </a:xfrm>
+          <a:prstGeom prst="rect">
+            <a:avLst/>
+          </a:prstGeom>
+        </p:spPr>
+      </p:pic>
+      <p:sp>
+        <p:nvSpPr>
+          <p:cNvPr id="7" name="TextBox 6">
+            <a:extLst>
+              <a:ext uri="{FF2B5EF4-FFF2-40B4-BE49-F238E27FC236}">
+                <a16:creationId xmlns:a16="http://schemas.microsoft.com/office/drawing/2014/main" id="{6ABBDFAC-82E3-408C-B595-1308DA107931}"/>
+              </a:ext>
+            </a:extLst>
+          </p:cNvPr>
+          <p:cNvSpPr txBox="1"/>
+          <p:nvPr/>
+        </p:nvSpPr>
+        <p:spPr>
+          <a:xfrm>
+            <a:off x="6908800" y="1997839"/>
+            <a:ext cx="4978400" cy="2862322"/>
+          </a:xfrm>
+          <a:prstGeom prst="rect">
+            <a:avLst/>
+          </a:prstGeom>
+          <a:noFill/>
+        </p:spPr>
+        <p:txBody>
+          <a:bodyPr wrap="square">
+            <a:spAutoFit/>
+          </a:bodyPr>
+          <a:lstStyle/>
+          <a:p>
+            <a:r>
+              <a:rPr lang="nn-NO" b="1" dirty="0"/>
+              <a:t>Dorong keputusan yang berdampak besar dengan data operasional real-time</a:t>
+            </a:r>
+            <a:endParaRPr lang="nn-NO" dirty="0"/>
+          </a:p>
+          <a:p>
+            <a:r>
+              <a:rPr lang="nn-NO" b="1" dirty="0"/>
+              <a:t>Apa yang dapat dilakukan oleh aplikasi-aplikasi ini untuk Anda?</a:t>
+            </a:r>
+            <a:endParaRPr lang="nn-NO" dirty="0"/>
+          </a:p>
+          <a:p>
+            <a:pPr lvl="1">
+              <a:buFont typeface="Arial" panose="020B0604020202020204" pitchFamily="34" charset="0"/>
+              <a:buChar char="•"/>
+            </a:pPr>
+            <a:r>
+              <a:rPr lang="nn-NO" dirty="0"/>
+              <a:t>Dapatkan visibilitas real-time terhadap proses produksi</a:t>
+            </a:r>
+          </a:p>
+          <a:p>
+            <a:pPr lvl="1">
+              <a:buFont typeface="Arial" panose="020B0604020202020204" pitchFamily="34" charset="0"/>
+              <a:buChar char="•"/>
+            </a:pPr>
+            <a:r>
+              <a:rPr lang="nn-NO" dirty="0"/>
+              <a:t>Tingkatkan produktivitas dengan peringatan real-time dan analisis kinerja</a:t>
+            </a:r>
+          </a:p>
+          <a:p>
+            <a:pPr lvl="1">
+              <a:buFont typeface="Arial" panose="020B0604020202020204" pitchFamily="34" charset="0"/>
+              <a:buChar char="•"/>
+            </a:pPr>
+            <a:r>
+              <a:rPr lang="nn-NO" dirty="0"/>
+              <a:t>Pantau mesin, perakitan (assembly), dan proses di sepanjang lini produksi</a:t>
+            </a:r>
+          </a:p>
+        </p:txBody>
+      </p:sp>
+      <p:sp>
+        <p:nvSpPr>
+          <p:cNvPr id="9" name="TextBox 8">
+            <a:extLst>
+              <a:ext uri="{FF2B5EF4-FFF2-40B4-BE49-F238E27FC236}">
+                <a16:creationId xmlns:a16="http://schemas.microsoft.com/office/drawing/2014/main" id="{ACDF0BD7-5D7F-41B6-8E14-BAEAE9BD502D}"/>
+              </a:ext>
+            </a:extLst>
+          </p:cNvPr>
+          <p:cNvSpPr txBox="1"/>
+          <p:nvPr/>
+        </p:nvSpPr>
+        <p:spPr>
+          <a:xfrm>
+            <a:off x="364066" y="518067"/>
+            <a:ext cx="6096000" cy="369332"/>
+          </a:xfrm>
+          <a:prstGeom prst="rect">
+            <a:avLst/>
+          </a:prstGeom>
+          <a:noFill/>
+        </p:spPr>
+        <p:txBody>
+          <a:bodyPr wrap="square">
+            <a:spAutoFit/>
+          </a:bodyPr>
+          <a:lstStyle/>
+          <a:p>
+            <a:r>
+              <a:rPr lang="en-ID" b="1" i="0" dirty="0">
+                <a:solidFill>
+                  <a:srgbClr val="194F91"/>
+                </a:solidFill>
+                <a:effectLst/>
+                <a:latin typeface="Messina"/>
+              </a:rPr>
+              <a:t>Production Management</a:t>
+            </a:r>
+            <a:endParaRPr lang="en-ID" dirty="0"/>
+          </a:p>
+        </p:txBody>
+      </p:sp>
+    </p:spTree>
+    <p:extLst>
+      <p:ext uri="{BB962C8B-B14F-4D97-AF65-F5344CB8AC3E}">
+        <p14:creationId xmlns:p14="http://schemas.microsoft.com/office/powerpoint/2010/main" val="721756381"/>
+      </p:ext>
+    </p:extLst>
+  </p:cSld>
+  <p:clrMapOvr>
+    <a:masterClrMapping/>
+  </p:clrMapOvr>
+</p:sld>
+</file>
+
+<file path=ppt/slides/slide3.xml><?xml version="1.0" encoding="utf-8"?>
+<p:sld xmlns:a="http://schemas.openxmlformats.org/drawingml/2006/main" xmlns:r="http://schemas.openxmlformats.org/officeDocument/2006/relationships" xmlns:p="http://schemas.openxmlformats.org/presentationml/2006/main">
+  <p:cSld>
+    <p:spTree>
+      <p:nvGrpSpPr>
+        <p:cNvPr id="1" name=""/>
+        <p:cNvGrpSpPr/>
+        <p:nvPr/>
+      </p:nvGrpSpPr>
+      <p:grpSpPr>
+        <a:xfrm>
+          <a:off x="0" y="0"/>
+          <a:ext cx="0" cy="0"/>
+          <a:chOff x="0" y="0"/>
+          <a:chExt cx="0" cy="0"/>
+        </a:xfrm>
+      </p:grpSpPr>
+      <p:pic>
+        <p:nvPicPr>
+          <p:cNvPr id="3" name="Picture 2">
+            <a:extLst>
+              <a:ext uri="{FF2B5EF4-FFF2-40B4-BE49-F238E27FC236}">
+                <a16:creationId xmlns:a16="http://schemas.microsoft.com/office/drawing/2014/main" id="{A2A8920B-A405-4D38-80EC-CF7DDBEA42FE}"/>
+              </a:ext>
+            </a:extLst>
+          </p:cNvPr>
+          <p:cNvPicPr>
+            <a:picLocks noChangeAspect="1"/>
+          </p:cNvPicPr>
+          <p:nvPr/>
+        </p:nvPicPr>
+        <p:blipFill rotWithShape="1">
+          <a:blip r:embed="rId2"/>
+          <a:srcRect l="8949"/>
+          <a:stretch/>
+        </p:blipFill>
+        <p:spPr>
+          <a:xfrm>
+            <a:off x="1" y="956734"/>
+            <a:ext cx="6883400" cy="5433710"/>
+          </a:xfrm>
+          <a:prstGeom prst="rect">
+            <a:avLst/>
+          </a:prstGeom>
+        </p:spPr>
+      </p:pic>
+      <p:sp>
+        <p:nvSpPr>
+          <p:cNvPr id="5" name="TextBox 4">
+            <a:extLst>
+              <a:ext uri="{FF2B5EF4-FFF2-40B4-BE49-F238E27FC236}">
+                <a16:creationId xmlns:a16="http://schemas.microsoft.com/office/drawing/2014/main" id="{E498110A-5DBC-4162-884E-7C4C281472E9}"/>
+              </a:ext>
+            </a:extLst>
+          </p:cNvPr>
+          <p:cNvSpPr txBox="1"/>
+          <p:nvPr/>
+        </p:nvSpPr>
+        <p:spPr>
+          <a:xfrm>
+            <a:off x="6883401" y="2054705"/>
+            <a:ext cx="4775199" cy="2862322"/>
+          </a:xfrm>
+          <a:prstGeom prst="rect">
+            <a:avLst/>
+          </a:prstGeom>
+          <a:noFill/>
+        </p:spPr>
+        <p:txBody>
+          <a:bodyPr wrap="square">
+            <a:spAutoFit/>
+          </a:bodyPr>
+          <a:lstStyle/>
+          <a:p>
+            <a:r>
+              <a:rPr lang="en-ID" b="1" dirty="0" err="1"/>
+              <a:t>Lacak</a:t>
+            </a:r>
+            <a:r>
+              <a:rPr lang="en-ID" b="1" dirty="0"/>
+              <a:t> material </a:t>
+            </a:r>
+            <a:r>
+              <a:rPr lang="en-ID" b="1" dirty="0" err="1"/>
+              <a:t>saat</a:t>
+            </a:r>
+            <a:r>
+              <a:rPr lang="en-ID" b="1" dirty="0"/>
+              <a:t> </a:t>
+            </a:r>
+            <a:r>
+              <a:rPr lang="en-ID" b="1" dirty="0" err="1"/>
+              <a:t>bergerak</a:t>
+            </a:r>
+            <a:r>
+              <a:rPr lang="en-ID" b="1" dirty="0"/>
+              <a:t> di </a:t>
+            </a:r>
+            <a:r>
+              <a:rPr lang="en-ID" b="1" dirty="0" err="1"/>
+              <a:t>sepanjang</a:t>
+            </a:r>
+            <a:r>
+              <a:rPr lang="en-ID" b="1" dirty="0"/>
+              <a:t> proses </a:t>
+            </a:r>
+            <a:r>
+              <a:rPr lang="en-ID" b="1" dirty="0" err="1"/>
+              <a:t>produksi</a:t>
+            </a:r>
+            <a:endParaRPr lang="en-ID" dirty="0"/>
+          </a:p>
+          <a:p>
+            <a:r>
+              <a:rPr lang="en-ID" b="1" dirty="0" err="1"/>
+              <a:t>Apa</a:t>
+            </a:r>
+            <a:r>
+              <a:rPr lang="en-ID" b="1" dirty="0"/>
+              <a:t> yang </a:t>
+            </a:r>
+            <a:r>
+              <a:rPr lang="en-ID" b="1" dirty="0" err="1"/>
+              <a:t>dapat</a:t>
+            </a:r>
+            <a:r>
+              <a:rPr lang="en-ID" b="1" dirty="0"/>
+              <a:t> </a:t>
+            </a:r>
+            <a:r>
+              <a:rPr lang="en-ID" b="1" dirty="0" err="1"/>
+              <a:t>dilakukan</a:t>
+            </a:r>
+            <a:r>
+              <a:rPr lang="en-ID" b="1" dirty="0"/>
+              <a:t> oleh </a:t>
+            </a:r>
+            <a:r>
+              <a:rPr lang="en-ID" b="1" dirty="0" err="1"/>
+              <a:t>aplikasi-aplikasi</a:t>
+            </a:r>
+            <a:r>
+              <a:rPr lang="en-ID" b="1" dirty="0"/>
+              <a:t> </a:t>
+            </a:r>
+            <a:r>
+              <a:rPr lang="en-ID" b="1" dirty="0" err="1"/>
+              <a:t>ini</a:t>
+            </a:r>
+            <a:r>
+              <a:rPr lang="en-ID" b="1" dirty="0"/>
+              <a:t> </a:t>
+            </a:r>
+            <a:r>
+              <a:rPr lang="en-ID" b="1" dirty="0" err="1"/>
+              <a:t>untuk</a:t>
+            </a:r>
+            <a:r>
+              <a:rPr lang="en-ID" b="1" dirty="0"/>
+              <a:t> Anda?</a:t>
+            </a:r>
+            <a:endParaRPr lang="en-ID" dirty="0"/>
+          </a:p>
+          <a:p>
+            <a:pPr lvl="1">
+              <a:buFont typeface="Arial" panose="020B0604020202020204" pitchFamily="34" charset="0"/>
+              <a:buChar char="•"/>
+            </a:pPr>
+            <a:r>
+              <a:rPr lang="en-ID" dirty="0" err="1"/>
+              <a:t>Sediakan</a:t>
+            </a:r>
+            <a:r>
+              <a:rPr lang="en-ID" dirty="0"/>
+              <a:t> status </a:t>
+            </a:r>
+            <a:r>
+              <a:rPr lang="en-ID" dirty="0" err="1"/>
+              <a:t>tingkat</a:t>
+            </a:r>
+            <a:r>
+              <a:rPr lang="en-ID" dirty="0"/>
+              <a:t> </a:t>
+            </a:r>
+            <a:r>
+              <a:rPr lang="en-ID" dirty="0" err="1"/>
+              <a:t>persediaan</a:t>
+            </a:r>
+            <a:r>
+              <a:rPr lang="en-ID" dirty="0"/>
+              <a:t> (inventory) </a:t>
+            </a:r>
+            <a:r>
+              <a:rPr lang="en-ID" dirty="0" err="1"/>
+              <a:t>secara</a:t>
+            </a:r>
+            <a:r>
+              <a:rPr lang="en-ID" dirty="0"/>
+              <a:t> real-time</a:t>
+            </a:r>
+          </a:p>
+          <a:p>
+            <a:pPr lvl="1">
+              <a:buFont typeface="Arial" panose="020B0604020202020204" pitchFamily="34" charset="0"/>
+              <a:buChar char="•"/>
+            </a:pPr>
+            <a:r>
+              <a:rPr lang="en-ID" dirty="0" err="1"/>
+              <a:t>Tingkatkan</a:t>
+            </a:r>
+            <a:r>
+              <a:rPr lang="en-ID" dirty="0"/>
+              <a:t> </a:t>
+            </a:r>
+            <a:r>
+              <a:rPr lang="en-ID" dirty="0" err="1"/>
+              <a:t>visibilitas</a:t>
+            </a:r>
+            <a:r>
+              <a:rPr lang="en-ID" dirty="0"/>
+              <a:t> </a:t>
+            </a:r>
+            <a:r>
+              <a:rPr lang="en-ID" dirty="0" err="1"/>
+              <a:t>aliran</a:t>
+            </a:r>
+            <a:r>
+              <a:rPr lang="en-ID" dirty="0"/>
+              <a:t> material (material flow)</a:t>
+            </a:r>
+          </a:p>
+          <a:p>
+            <a:pPr lvl="1">
+              <a:buFont typeface="Arial" panose="020B0604020202020204" pitchFamily="34" charset="0"/>
+              <a:buChar char="•"/>
+            </a:pPr>
+            <a:r>
+              <a:rPr lang="en-ID" dirty="0" err="1"/>
+              <a:t>Prediksi</a:t>
+            </a:r>
+            <a:r>
+              <a:rPr lang="en-ID" dirty="0"/>
+              <a:t> </a:t>
+            </a:r>
+            <a:r>
+              <a:rPr lang="en-ID" dirty="0" err="1"/>
+              <a:t>tingkat</a:t>
+            </a:r>
+            <a:r>
+              <a:rPr lang="en-ID" dirty="0"/>
+              <a:t> </a:t>
+            </a:r>
+            <a:r>
+              <a:rPr lang="en-ID" dirty="0" err="1"/>
+              <a:t>persediaan</a:t>
+            </a:r>
+            <a:r>
+              <a:rPr lang="en-ID" dirty="0"/>
+              <a:t> </a:t>
+            </a:r>
+            <a:r>
+              <a:rPr lang="en-ID" dirty="0" err="1"/>
+              <a:t>untuk</a:t>
+            </a:r>
+            <a:r>
+              <a:rPr lang="en-ID" dirty="0"/>
+              <a:t> </a:t>
+            </a:r>
+            <a:r>
+              <a:rPr lang="en-ID" dirty="0" err="1"/>
+              <a:t>mengeliminasi</a:t>
+            </a:r>
+            <a:r>
+              <a:rPr lang="en-ID" dirty="0"/>
+              <a:t> </a:t>
+            </a:r>
+            <a:r>
+              <a:rPr lang="en-ID" dirty="0" err="1"/>
+              <a:t>kehabisan</a:t>
+            </a:r>
+            <a:r>
+              <a:rPr lang="en-ID" dirty="0"/>
+              <a:t> </a:t>
+            </a:r>
+            <a:r>
+              <a:rPr lang="en-ID" dirty="0" err="1"/>
+              <a:t>stok</a:t>
+            </a:r>
+            <a:r>
+              <a:rPr lang="en-ID" dirty="0"/>
+              <a:t> (stock-outs)</a:t>
+            </a:r>
+          </a:p>
+        </p:txBody>
+      </p:sp>
+      <p:sp>
+        <p:nvSpPr>
+          <p:cNvPr id="6" name="TextBox 5">
+            <a:extLst>
+              <a:ext uri="{FF2B5EF4-FFF2-40B4-BE49-F238E27FC236}">
+                <a16:creationId xmlns:a16="http://schemas.microsoft.com/office/drawing/2014/main" id="{02502489-FEAE-4D81-9603-682DB9CAF28C}"/>
+              </a:ext>
+            </a:extLst>
+          </p:cNvPr>
+          <p:cNvSpPr txBox="1"/>
+          <p:nvPr/>
+        </p:nvSpPr>
+        <p:spPr>
+          <a:xfrm>
+            <a:off x="364066" y="518067"/>
+            <a:ext cx="6096000" cy="369332"/>
+          </a:xfrm>
+          <a:prstGeom prst="rect">
+            <a:avLst/>
+          </a:prstGeom>
+          <a:noFill/>
+        </p:spPr>
+        <p:txBody>
+          <a:bodyPr wrap="square">
+            <a:spAutoFit/>
+          </a:bodyPr>
+          <a:lstStyle/>
+          <a:p>
+            <a:r>
+              <a:rPr lang="en-ID" b="1" i="0" dirty="0">
+                <a:solidFill>
+                  <a:srgbClr val="194F91"/>
+                </a:solidFill>
+                <a:effectLst/>
+                <a:latin typeface="Messina"/>
+              </a:rPr>
+              <a:t>Inventory  Management</a:t>
+            </a:r>
+            <a:endParaRPr lang="en-ID" dirty="0"/>
+          </a:p>
+        </p:txBody>
+      </p:sp>
+    </p:spTree>
+    <p:extLst>
+      <p:ext uri="{BB962C8B-B14F-4D97-AF65-F5344CB8AC3E}">
+        <p14:creationId xmlns:p14="http://schemas.microsoft.com/office/powerpoint/2010/main" val="2755859636"/>
+      </p:ext>
+    </p:extLst>
+  </p:cSld>
+  <p:clrMapOvr>
+    <a:masterClrMapping/>
+  </p:clrMapOvr>
+</p:sld>
+</file>
+
+<file path=ppt/slides/slide4.xml><?xml version="1.0" encoding="utf-8"?>
+<p:sld xmlns:a="http://schemas.openxmlformats.org/drawingml/2006/main" xmlns:r="http://schemas.openxmlformats.org/officeDocument/2006/relationships" xmlns:p="http://schemas.openxmlformats.org/presentationml/2006/main">
+  <p:cSld>
+    <p:spTree>
+      <p:nvGrpSpPr>
+        <p:cNvPr id="1" name=""/>
+        <p:cNvGrpSpPr/>
+        <p:nvPr/>
+      </p:nvGrpSpPr>
+      <p:grpSpPr>
+        <a:xfrm>
+          <a:off x="0" y="0"/>
+          <a:ext cx="0" cy="0"/>
+          <a:chOff x="0" y="0"/>
+          <a:chExt cx="0" cy="0"/>
+        </a:xfrm>
+      </p:grpSpPr>
+      <p:pic>
+        <p:nvPicPr>
+          <p:cNvPr id="4" name="Picture 3">
+            <a:extLst>
+              <a:ext uri="{FF2B5EF4-FFF2-40B4-BE49-F238E27FC236}">
+                <a16:creationId xmlns:a16="http://schemas.microsoft.com/office/drawing/2014/main" id="{6D1474C5-7052-46C1-81FB-6BA80C48E69E}"/>
+              </a:ext>
+            </a:extLst>
+          </p:cNvPr>
+          <p:cNvPicPr>
+            <a:picLocks noChangeAspect="1"/>
+          </p:cNvPicPr>
+          <p:nvPr/>
+        </p:nvPicPr>
+        <p:blipFill>
+          <a:blip r:embed="rId2"/>
+          <a:stretch>
+            <a:fillRect/>
+          </a:stretch>
+        </p:blipFill>
+        <p:spPr>
+          <a:xfrm>
+            <a:off x="-297170" y="1320800"/>
+            <a:ext cx="6689503" cy="4934879"/>
+          </a:xfrm>
+          <a:prstGeom prst="rect">
+            <a:avLst/>
+          </a:prstGeom>
+        </p:spPr>
+      </p:pic>
+      <p:sp>
+        <p:nvSpPr>
+          <p:cNvPr id="6" name="TextBox 5">
+            <a:extLst>
+              <a:ext uri="{FF2B5EF4-FFF2-40B4-BE49-F238E27FC236}">
+                <a16:creationId xmlns:a16="http://schemas.microsoft.com/office/drawing/2014/main" id="{6D6D996A-D296-4D39-8512-299E00FD5AA2}"/>
+              </a:ext>
+            </a:extLst>
+          </p:cNvPr>
+          <p:cNvSpPr txBox="1"/>
+          <p:nvPr/>
+        </p:nvSpPr>
+        <p:spPr>
+          <a:xfrm>
+            <a:off x="6094412" y="1535205"/>
+            <a:ext cx="6249988" cy="2308324"/>
+          </a:xfrm>
+          <a:prstGeom prst="rect">
+            <a:avLst/>
+          </a:prstGeom>
+          <a:noFill/>
+        </p:spPr>
+        <p:txBody>
+          <a:bodyPr wrap="square">
+            <a:spAutoFit/>
+          </a:bodyPr>
+          <a:lstStyle/>
+          <a:p>
+            <a:r>
+              <a:rPr lang="en-ID" b="1" dirty="0" err="1"/>
+              <a:t>Pastikan</a:t>
+            </a:r>
+            <a:r>
+              <a:rPr lang="en-ID" b="1" dirty="0"/>
+              <a:t> </a:t>
+            </a:r>
+            <a:r>
+              <a:rPr lang="en-ID" b="1" dirty="0" err="1"/>
+              <a:t>kualitas</a:t>
+            </a:r>
+            <a:r>
+              <a:rPr lang="en-ID" b="1" dirty="0"/>
+              <a:t> di </a:t>
+            </a:r>
+            <a:r>
+              <a:rPr lang="en-ID" b="1" dirty="0" err="1"/>
+              <a:t>setiap</a:t>
+            </a:r>
+            <a:r>
+              <a:rPr lang="en-ID" b="1" dirty="0"/>
+              <a:t> </a:t>
+            </a:r>
+            <a:r>
+              <a:rPr lang="en-ID" b="1" dirty="0" err="1"/>
+              <a:t>tahapan</a:t>
+            </a:r>
+            <a:r>
+              <a:rPr lang="en-ID" b="1" dirty="0"/>
+              <a:t> </a:t>
+            </a:r>
+            <a:r>
+              <a:rPr lang="en-ID" b="1" dirty="0" err="1"/>
+              <a:t>produksi</a:t>
+            </a:r>
+            <a:r>
+              <a:rPr lang="en-ID" b="1" dirty="0"/>
+              <a:t> Anda</a:t>
+            </a:r>
+            <a:endParaRPr lang="en-ID" dirty="0"/>
+          </a:p>
+          <a:p>
+            <a:r>
+              <a:rPr lang="en-ID" b="1" dirty="0" err="1"/>
+              <a:t>Apa</a:t>
+            </a:r>
+            <a:r>
+              <a:rPr lang="en-ID" b="1" dirty="0"/>
+              <a:t> yang </a:t>
+            </a:r>
+            <a:r>
+              <a:rPr lang="en-ID" b="1" dirty="0" err="1"/>
+              <a:t>dapat</a:t>
+            </a:r>
+            <a:r>
+              <a:rPr lang="en-ID" b="1" dirty="0"/>
+              <a:t> </a:t>
+            </a:r>
+            <a:r>
+              <a:rPr lang="en-ID" b="1" dirty="0" err="1"/>
+              <a:t>dilakukan</a:t>
+            </a:r>
+            <a:r>
+              <a:rPr lang="en-ID" b="1" dirty="0"/>
+              <a:t> oleh </a:t>
+            </a:r>
+            <a:r>
+              <a:rPr lang="en-ID" b="1" dirty="0" err="1"/>
+              <a:t>aplikasi-aplikasi</a:t>
+            </a:r>
+            <a:r>
+              <a:rPr lang="en-ID" b="1" dirty="0"/>
+              <a:t> </a:t>
+            </a:r>
+            <a:r>
+              <a:rPr lang="en-ID" b="1" dirty="0" err="1"/>
+              <a:t>ini</a:t>
+            </a:r>
+            <a:r>
+              <a:rPr lang="en-ID" b="1" dirty="0"/>
+              <a:t> </a:t>
+            </a:r>
+            <a:r>
+              <a:rPr lang="en-ID" b="1" dirty="0" err="1"/>
+              <a:t>untuk</a:t>
+            </a:r>
+            <a:r>
+              <a:rPr lang="en-ID" b="1" dirty="0"/>
+              <a:t> Anda?</a:t>
+            </a:r>
+            <a:endParaRPr lang="en-ID" dirty="0"/>
+          </a:p>
+          <a:p>
+            <a:pPr lvl="1">
+              <a:buFont typeface="Arial" panose="020B0604020202020204" pitchFamily="34" charset="0"/>
+              <a:buChar char="•"/>
+            </a:pPr>
+            <a:r>
+              <a:rPr lang="en-ID" dirty="0" err="1"/>
+              <a:t>Tegakkan</a:t>
+            </a:r>
+            <a:r>
+              <a:rPr lang="en-ID" dirty="0"/>
+              <a:t> SOP dan </a:t>
+            </a:r>
+            <a:r>
+              <a:rPr lang="en-ID" dirty="0" err="1"/>
+              <a:t>cegah</a:t>
+            </a:r>
+            <a:r>
+              <a:rPr lang="en-ID" dirty="0"/>
+              <a:t> </a:t>
+            </a:r>
+            <a:r>
+              <a:rPr lang="en-ID" dirty="0" err="1"/>
+              <a:t>kesalahan</a:t>
+            </a:r>
+            <a:r>
+              <a:rPr lang="en-ID" dirty="0"/>
+              <a:t> (</a:t>
+            </a:r>
+            <a:r>
+              <a:rPr lang="en-ID" i="1" dirty="0"/>
+              <a:t>error-proofing</a:t>
+            </a:r>
+            <a:r>
+              <a:rPr lang="en-ID" dirty="0"/>
+              <a:t> / Poka-Yoke) pada </a:t>
+            </a:r>
+            <a:r>
+              <a:rPr lang="en-ID" dirty="0" err="1"/>
+              <a:t>alur</a:t>
+            </a:r>
+            <a:r>
+              <a:rPr lang="en-ID" dirty="0"/>
+              <a:t> </a:t>
+            </a:r>
+            <a:r>
+              <a:rPr lang="en-ID" dirty="0" err="1"/>
+              <a:t>kerja</a:t>
+            </a:r>
+            <a:r>
+              <a:rPr lang="en-ID" dirty="0"/>
+              <a:t> operator</a:t>
+            </a:r>
+          </a:p>
+          <a:p>
+            <a:pPr lvl="1">
+              <a:buFont typeface="Arial" panose="020B0604020202020204" pitchFamily="34" charset="0"/>
+              <a:buChar char="•"/>
+            </a:pPr>
+            <a:r>
+              <a:rPr lang="en-ID" dirty="0" err="1"/>
+              <a:t>Minimalkan</a:t>
+            </a:r>
+            <a:r>
+              <a:rPr lang="en-ID" dirty="0"/>
+              <a:t> </a:t>
+            </a:r>
+            <a:r>
+              <a:rPr lang="en-ID" dirty="0" err="1"/>
+              <a:t>cacat</a:t>
+            </a:r>
+            <a:r>
+              <a:rPr lang="en-ID" dirty="0"/>
+              <a:t> </a:t>
+            </a:r>
+            <a:r>
+              <a:rPr lang="en-ID" dirty="0" err="1"/>
+              <a:t>produksi</a:t>
+            </a:r>
+            <a:r>
+              <a:rPr lang="en-ID" dirty="0"/>
+              <a:t> (</a:t>
+            </a:r>
+            <a:r>
+              <a:rPr lang="en-ID" i="1" dirty="0"/>
+              <a:t>defects</a:t>
+            </a:r>
+            <a:r>
+              <a:rPr lang="en-ID" dirty="0"/>
+              <a:t>) </a:t>
+            </a:r>
+            <a:r>
+              <a:rPr lang="en-ID" dirty="0" err="1"/>
+              <a:t>dengan</a:t>
+            </a:r>
+            <a:r>
+              <a:rPr lang="en-ID" dirty="0"/>
+              <a:t> </a:t>
+            </a:r>
+            <a:r>
+              <a:rPr lang="en-ID" dirty="0" err="1"/>
+              <a:t>pemeriksaan</a:t>
+            </a:r>
+            <a:r>
+              <a:rPr lang="en-ID" dirty="0"/>
+              <a:t> </a:t>
+            </a:r>
+            <a:r>
+              <a:rPr lang="en-ID" dirty="0" err="1"/>
+              <a:t>kualitas</a:t>
+            </a:r>
+            <a:r>
+              <a:rPr lang="en-ID" dirty="0"/>
+              <a:t> yang </a:t>
+            </a:r>
+            <a:r>
+              <a:rPr lang="en-ID" dirty="0" err="1"/>
+              <a:t>ditempatkan</a:t>
+            </a:r>
+            <a:r>
+              <a:rPr lang="en-ID" dirty="0"/>
+              <a:t> </a:t>
+            </a:r>
+            <a:r>
+              <a:rPr lang="en-ID" dirty="0" err="1"/>
+              <a:t>secara</a:t>
+            </a:r>
+            <a:r>
+              <a:rPr lang="en-ID" dirty="0"/>
+              <a:t> </a:t>
+            </a:r>
+            <a:r>
+              <a:rPr lang="en-ID" dirty="0" err="1"/>
+              <a:t>logis</a:t>
+            </a:r>
+            <a:endParaRPr lang="en-ID" dirty="0"/>
+          </a:p>
+          <a:p>
+            <a:pPr lvl="1">
+              <a:buFont typeface="Arial" panose="020B0604020202020204" pitchFamily="34" charset="0"/>
+              <a:buChar char="•"/>
+            </a:pPr>
+            <a:r>
+              <a:rPr lang="en-ID" dirty="0" err="1"/>
+              <a:t>Lacak</a:t>
+            </a:r>
+            <a:r>
+              <a:rPr lang="en-ID" dirty="0"/>
+              <a:t> </a:t>
+            </a:r>
+            <a:r>
+              <a:rPr lang="en-ID" dirty="0" err="1"/>
+              <a:t>produk</a:t>
+            </a:r>
+            <a:r>
+              <a:rPr lang="en-ID" dirty="0"/>
+              <a:t> </a:t>
+            </a:r>
+            <a:r>
+              <a:rPr lang="en-ID" dirty="0" err="1"/>
+              <a:t>cacat</a:t>
+            </a:r>
+            <a:r>
+              <a:rPr lang="en-ID" dirty="0"/>
+              <a:t> (</a:t>
+            </a:r>
+            <a:r>
+              <a:rPr lang="en-ID" i="1" dirty="0"/>
+              <a:t>defects</a:t>
+            </a:r>
+            <a:r>
+              <a:rPr lang="en-ID" dirty="0"/>
+              <a:t>), </a:t>
+            </a:r>
+            <a:r>
+              <a:rPr lang="en-ID" dirty="0" err="1"/>
+              <a:t>sisa</a:t>
+            </a:r>
+            <a:r>
+              <a:rPr lang="en-ID" dirty="0"/>
+              <a:t> material (</a:t>
+            </a:r>
+            <a:r>
+              <a:rPr lang="en-ID" i="1" dirty="0"/>
+              <a:t>scrap</a:t>
+            </a:r>
+            <a:r>
+              <a:rPr lang="en-ID" dirty="0"/>
+              <a:t>), dan </a:t>
+            </a:r>
+            <a:r>
+              <a:rPr lang="en-ID" dirty="0" err="1"/>
+              <a:t>tindakan</a:t>
+            </a:r>
+            <a:r>
+              <a:rPr lang="en-ID" dirty="0"/>
+              <a:t> </a:t>
+            </a:r>
+            <a:r>
+              <a:rPr lang="en-ID" dirty="0" err="1"/>
+              <a:t>perbaikan</a:t>
+            </a:r>
+            <a:r>
+              <a:rPr lang="en-ID" dirty="0"/>
+              <a:t> (</a:t>
+            </a:r>
+            <a:r>
+              <a:rPr lang="en-ID" i="1" dirty="0"/>
+              <a:t>corrective actions</a:t>
+            </a:r>
+            <a:r>
+              <a:rPr lang="en-ID" dirty="0"/>
+              <a:t>) </a:t>
+            </a:r>
+            <a:r>
+              <a:rPr lang="en-ID" dirty="0" err="1"/>
+              <a:t>dalam</a:t>
+            </a:r>
+            <a:r>
+              <a:rPr lang="en-ID" dirty="0"/>
+              <a:t> </a:t>
+            </a:r>
+            <a:r>
+              <a:rPr lang="en-ID" dirty="0" err="1"/>
+              <a:t>satu</a:t>
+            </a:r>
+            <a:r>
+              <a:rPr lang="en-ID" dirty="0"/>
+              <a:t> </a:t>
+            </a:r>
+            <a:r>
+              <a:rPr lang="en-ID" dirty="0" err="1"/>
+              <a:t>sistem</a:t>
+            </a:r>
+            <a:endParaRPr lang="en-ID" dirty="0"/>
+          </a:p>
+        </p:txBody>
+      </p:sp>
+      <p:sp>
+        <p:nvSpPr>
+          <p:cNvPr id="7" name="TextBox 6">
+            <a:extLst>
+              <a:ext uri="{FF2B5EF4-FFF2-40B4-BE49-F238E27FC236}">
+                <a16:creationId xmlns:a16="http://schemas.microsoft.com/office/drawing/2014/main" id="{F734FD6B-57B6-4937-B177-023E99BA29FE}"/>
+              </a:ext>
+            </a:extLst>
+          </p:cNvPr>
+          <p:cNvSpPr txBox="1"/>
+          <p:nvPr/>
+        </p:nvSpPr>
+        <p:spPr>
+          <a:xfrm>
+            <a:off x="364066" y="518067"/>
+            <a:ext cx="6096000" cy="369332"/>
+          </a:xfrm>
+          <a:prstGeom prst="rect">
+            <a:avLst/>
+          </a:prstGeom>
+          <a:noFill/>
+        </p:spPr>
+        <p:txBody>
+          <a:bodyPr wrap="square">
+            <a:spAutoFit/>
+          </a:bodyPr>
+          <a:lstStyle/>
+          <a:p>
+            <a:r>
+              <a:rPr lang="en-ID" b="1" i="0" dirty="0">
+                <a:solidFill>
+                  <a:srgbClr val="194F91"/>
+                </a:solidFill>
+                <a:effectLst/>
+                <a:latin typeface="Messina"/>
+              </a:rPr>
+              <a:t>Front line Quality </a:t>
+            </a:r>
+            <a:r>
+              <a:rPr lang="en-ID" b="1" i="0" dirty="0" err="1">
+                <a:solidFill>
+                  <a:srgbClr val="194F91"/>
+                </a:solidFill>
+                <a:effectLst/>
+                <a:latin typeface="Messina"/>
+              </a:rPr>
+              <a:t>Controll</a:t>
+            </a:r>
+            <a:endParaRPr lang="en-ID" dirty="0"/>
+          </a:p>
+        </p:txBody>
+      </p:sp>
+    </p:spTree>
+    <p:extLst>
+      <p:ext uri="{BB962C8B-B14F-4D97-AF65-F5344CB8AC3E}">
+        <p14:creationId xmlns:p14="http://schemas.microsoft.com/office/powerpoint/2010/main" val="1399350581"/>
+      </p:ext>
+    </p:extLst>
+  </p:cSld>
+  <p:clrMapOvr>
+    <a:masterClrMapping/>
+  </p:clrMapOvr>
+</p:sld>
+</file>
+
+<file path=ppt/slides/slide5.xml><?xml version="1.0" encoding="utf-8"?>
+<p:sld xmlns:a="http://schemas.openxmlformats.org/drawingml/2006/main" xmlns:r="http://schemas.openxmlformats.org/officeDocument/2006/relationships" xmlns:p="http://schemas.openxmlformats.org/presentationml/2006/main">
   <p:cSld>
     <p:bg>
       <p:bgPr>
@@ -3339,7 +7372,14 @@
         <p:cNvGrpSpPr/>
         <p:nvPr/>
       </p:nvGrpSpPr>
-      <p:grpSpPr/>
+      <p:grpSpPr>
+        <a:xfrm>
+          <a:off x="0" y="0"/>
+          <a:ext cx="0" cy="0"/>
+          <a:chOff x="0" y="0"/>
+          <a:chExt cx="0" cy="0"/>
+        </a:xfrm>
+      </p:grpSpPr>
       <p:sp>
         <p:nvSpPr>
           <p:cNvPr id="2" name="TextBox 1"/>
@@ -3704,8 +7744,8 @@
 </p:sld>
 </file>
 
-<file path=ppt/slides/slide3.xml><?xml version="1.0" encoding="utf-8"?>
-<p:sld xmlns:a="http://schemas.openxmlformats.org/drawingml/2006/main" xmlns:p="http://schemas.openxmlformats.org/presentationml/2006/main" xmlns:r="http://schemas.openxmlformats.org/officeDocument/2006/relationships">
+<file path=ppt/slides/slide6.xml><?xml version="1.0" encoding="utf-8"?>
+<p:sld xmlns:a="http://schemas.openxmlformats.org/drawingml/2006/main" xmlns:r="http://schemas.openxmlformats.org/officeDocument/2006/relationships" xmlns:p="http://schemas.openxmlformats.org/presentationml/2006/main">
   <p:cSld>
     <p:bg>
       <p:bgPr>
@@ -3721,7 +7761,14 @@
         <p:cNvGrpSpPr/>
         <p:nvPr/>
       </p:nvGrpSpPr>
-      <p:grpSpPr/>
+      <p:grpSpPr>
+        <a:xfrm>
+          <a:off x="0" y="0"/>
+          <a:ext cx="0" cy="0"/>
+          <a:chOff x="0" y="0"/>
+          <a:chExt cx="0" cy="0"/>
+        </a:xfrm>
+      </p:grpSpPr>
       <p:sp>
         <p:nvSpPr>
           <p:cNvPr id="2" name="TextBox 1"/>
@@ -3981,8 +8028,8 @@
 </p:sld>
 </file>
 
-<file path=ppt/slides/slide4.xml><?xml version="1.0" encoding="utf-8"?>
-<p:sld xmlns:a="http://schemas.openxmlformats.org/drawingml/2006/main" xmlns:p="http://schemas.openxmlformats.org/presentationml/2006/main" xmlns:r="http://schemas.openxmlformats.org/officeDocument/2006/relationships">
+<file path=ppt/slides/slide7.xml><?xml version="1.0" encoding="utf-8"?>
+<p:sld xmlns:a="http://schemas.openxmlformats.org/drawingml/2006/main" xmlns:r="http://schemas.openxmlformats.org/officeDocument/2006/relationships" xmlns:p="http://schemas.openxmlformats.org/presentationml/2006/main">
   <p:cSld>
     <p:bg>
       <p:bgPr>
@@ -3998,7 +8045,14 @@
         <p:cNvGrpSpPr/>
         <p:nvPr/>
       </p:nvGrpSpPr>
-      <p:grpSpPr/>
+      <p:grpSpPr>
+        <a:xfrm>
+          <a:off x="0" y="0"/>
+          <a:ext cx="0" cy="0"/>
+          <a:chOff x="0" y="0"/>
+          <a:chExt cx="0" cy="0"/>
+        </a:xfrm>
+      </p:grpSpPr>
       <p:sp>
         <p:nvSpPr>
           <p:cNvPr id="2" name="TextBox 1"/>
@@ -4258,8 +8312,8 @@
 </p:sld>
 </file>
 
-<file path=ppt/slides/slide5.xml><?xml version="1.0" encoding="utf-8"?>
-<p:sld xmlns:a="http://schemas.openxmlformats.org/drawingml/2006/main" xmlns:p="http://schemas.openxmlformats.org/presentationml/2006/main" xmlns:r="http://schemas.openxmlformats.org/officeDocument/2006/relationships">
+<file path=ppt/slides/slide8.xml><?xml version="1.0" encoding="utf-8"?>
+<p:sld xmlns:a="http://schemas.openxmlformats.org/drawingml/2006/main" xmlns:r="http://schemas.openxmlformats.org/officeDocument/2006/relationships" xmlns:p="http://schemas.openxmlformats.org/presentationml/2006/main">
   <p:cSld>
     <p:bg>
       <p:bgPr>
@@ -4275,7 +8329,14 @@
         <p:cNvGrpSpPr/>
         <p:nvPr/>
       </p:nvGrpSpPr>
-      <p:grpSpPr/>
+      <p:grpSpPr>
+        <a:xfrm>
+          <a:off x="0" y="0"/>
+          <a:ext cx="0" cy="0"/>
+          <a:chOff x="0" y="0"/>
+          <a:chExt cx="0" cy="0"/>
+        </a:xfrm>
+      </p:grpSpPr>
       <p:sp>
         <p:nvSpPr>
           <p:cNvPr id="2" name="TextBox 1"/>
@@ -4539,8 +8600,8 @@
 </p:sld>
 </file>
 
-<file path=ppt/slides/slide6.xml><?xml version="1.0" encoding="utf-8"?>
-<p:sld xmlns:a="http://schemas.openxmlformats.org/drawingml/2006/main" xmlns:p="http://schemas.openxmlformats.org/presentationml/2006/main" xmlns:r="http://schemas.openxmlformats.org/officeDocument/2006/relationships">
+<file path=ppt/slides/slide9.xml><?xml version="1.0" encoding="utf-8"?>
+<p:sld xmlns:a="http://schemas.openxmlformats.org/drawingml/2006/main" xmlns:r="http://schemas.openxmlformats.org/officeDocument/2006/relationships" xmlns:p="http://schemas.openxmlformats.org/presentationml/2006/main">
   <p:cSld>
     <p:bg>
       <p:bgPr>
@@ -4556,7 +8617,14 @@
         <p:cNvGrpSpPr/>
         <p:nvPr/>
       </p:nvGrpSpPr>
-      <p:grpSpPr/>
+      <p:grpSpPr>
+        <a:xfrm>
+          <a:off x="0" y="0"/>
+          <a:ext cx="0" cy="0"/>
+          <a:chOff x="0" y="0"/>
+          <a:chExt cx="0" cy="0"/>
+        </a:xfrm>
+      </p:grpSpPr>
       <p:sp>
         <p:nvSpPr>
           <p:cNvPr id="2" name="TextBox 1"/>
@@ -4808,1932 +8876,6 @@
             <a:br/>
             <a:r>
               <a:t>Tabel defect terisi contoh riil gagal uji silinder aktuator PU-58130425022025 lengkap dengan alasan kegagalan kelurusan untuk simulasi alur penanganan deviasi kualitas.</a:t>
-            </a:r>
-          </a:p>
-        </p:txBody>
-      </p:sp>
-    </p:spTree>
-  </p:cSld>
-  <p:clrMapOvr>
-    <a:masterClrMapping/>
-  </p:clrMapOvr>
-</p:sld>
-</file>
-
-<file path=ppt/slides/slide7.xml><?xml version="1.0" encoding="utf-8"?>
-<p:sld xmlns:a="http://schemas.openxmlformats.org/drawingml/2006/main" xmlns:p="http://schemas.openxmlformats.org/presentationml/2006/main" xmlns:r="http://schemas.openxmlformats.org/officeDocument/2006/relationships">
-  <p:cSld>
-    <p:bg>
-      <p:bgPr>
-        <a:solidFill>
-          <a:srgbClr val="FFFFFF"/>
-        </a:solidFill>
-        <a:effectLst/>
-      </p:bgPr>
-    </p:bg>
-    <p:spTree>
-      <p:nvGrpSpPr>
-        <p:cNvPr id="1" name=""/>
-        <p:cNvGrpSpPr/>
-        <p:nvPr/>
-      </p:nvGrpSpPr>
-      <p:grpSpPr/>
-      <p:sp>
-        <p:nvSpPr>
-          <p:cNvPr id="2" name="TextBox 1"/>
-          <p:cNvSpPr txBox="1"/>
-          <p:nvPr/>
-        </p:nvSpPr>
-        <p:spPr>
-          <a:xfrm>
-            <a:off x="731520" y="365760"/>
-            <a:ext cx="10725912" cy="365760"/>
-          </a:xfrm>
-          <a:prstGeom prst="rect">
-            <a:avLst/>
-          </a:prstGeom>
-          <a:noFill/>
-        </p:spPr>
-        <p:txBody>
-          <a:bodyPr wrap="square">
-            <a:spAutoFit/>
-          </a:bodyPr>
-          <a:lstStyle/>
-          <a:p>
-            <a:pPr>
-              <a:defRPr sz="1000" b="1">
-                <a:solidFill>
-                  <a:srgbClr val="0D9488"/>
-                </a:solidFill>
-                <a:latin typeface="Arial"/>
-              </a:defRPr>
-            </a:pPr>
-            <a:r>
-              <a:t>PILLAR 4: OPERATIONS ANALYTICS</a:t>
-            </a:r>
-          </a:p>
-        </p:txBody>
-      </p:sp>
-      <p:sp>
-        <p:nvSpPr>
-          <p:cNvPr id="3" name="TextBox 2"/>
-          <p:cNvSpPr txBox="1"/>
-          <p:nvPr/>
-        </p:nvSpPr>
-        <p:spPr>
-          <a:xfrm>
-            <a:off x="731520" y="640080"/>
-            <a:ext cx="10725912" cy="731520"/>
-          </a:xfrm>
-          <a:prstGeom prst="rect">
-            <a:avLst/>
-          </a:prstGeom>
-          <a:noFill/>
-        </p:spPr>
-        <p:txBody>
-          <a:bodyPr wrap="square">
-            <a:spAutoFit/>
-          </a:bodyPr>
-          <a:lstStyle/>
-          <a:p>
-            <a:pPr>
-              <a:defRPr sz="2800" b="1">
-                <a:solidFill>
-                  <a:srgbClr val="0F172A"/>
-                </a:solidFill>
-                <a:latin typeface="Arial"/>
-              </a:defRPr>
-            </a:pPr>
-            <a:r>
-              <a:t>5. Dasbor Analitik OEE &amp; Kinerja Pabrik</a:t>
-            </a:r>
-          </a:p>
-        </p:txBody>
-      </p:sp>
-      <p:sp>
-        <p:nvSpPr>
-          <p:cNvPr id="4" name="TextBox 3"/>
-          <p:cNvSpPr txBox="1"/>
-          <p:nvPr/>
-        </p:nvSpPr>
-        <p:spPr>
-          <a:xfrm>
-            <a:off x="731520" y="1828800"/>
-            <a:ext cx="5029200" cy="4114800"/>
-          </a:xfrm>
-          <a:prstGeom prst="rect">
-            <a:avLst/>
-          </a:prstGeom>
-          <a:noFill/>
-        </p:spPr>
-        <p:txBody>
-          <a:bodyPr wrap="square">
-            <a:spAutoFit/>
-          </a:bodyPr>
-          <a:lstStyle/>
-          <a:p>
-            <a:pPr>
-              <a:spcAft>
-                <a:spcPts val="1200"/>
-              </a:spcAft>
-              <a:defRPr sz="2000" b="1">
-                <a:solidFill>
-                  <a:srgbClr val="0F172A"/>
-                </a:solidFill>
-                <a:latin typeface="Arial"/>
-              </a:defRPr>
-            </a:pPr>
-            <a:r>
-              <a:t>Wawasan Real-Time untuk Keputusan Tepat</a:t>
-            </a:r>
-          </a:p>
-          <a:p>
-            <a:pPr>
-              <a:lnSpc>
-                <a:spcPct val="120000"/>
-              </a:lnSpc>
-              <a:spcAft>
-                <a:spcPts val="1200"/>
-              </a:spcAft>
-              <a:defRPr sz="1300">
-                <a:solidFill>
-                  <a:srgbClr val="1E293B"/>
-                </a:solidFill>
-                <a:latin typeface="Arial"/>
-              </a:defRPr>
-            </a:pPr>
-            <a:r>
-              <a:t>• Inventory Dashboard: Memantau durasi penyelesaian loop pengisian material, membantu optimasi logistik tangkas pabrik.</a:t>
-            </a:r>
-          </a:p>
-          <a:p>
-            <a:pPr>
-              <a:lnSpc>
-                <a:spcPct val="120000"/>
-              </a:lnSpc>
-              <a:spcAft>
-                <a:spcPts val="1200"/>
-              </a:spcAft>
-              <a:defRPr sz="1300">
-                <a:solidFill>
-                  <a:srgbClr val="1E293B"/>
-                </a:solidFill>
-                <a:latin typeface="Arial"/>
-              </a:defRPr>
-            </a:pPr>
-            <a:r>
-              <a:t>• Operations Management Dashboard: Mengonsolidasikan OEE stasiun kerja secara langsung, grafik volume produksi per jam, dan rasio kualitas.</a:t>
-            </a:r>
-          </a:p>
-          <a:p>
-            <a:pPr>
-              <a:lnSpc>
-                <a:spcPct val="120000"/>
-              </a:lnSpc>
-              <a:spcAft>
-                <a:spcPts val="1200"/>
-              </a:spcAft>
-              <a:defRPr sz="1300">
-                <a:solidFill>
-                  <a:srgbClr val="1E293B"/>
-                </a:solidFill>
-                <a:latin typeface="Arial"/>
-              </a:defRPr>
-            </a:pPr>
-            <a:r>
-              <a:t>• Downtime &amp; Defect Analytics: Memetakan sebaran penyebab terhentinya produksi (Andon) dan pola defect kualitas terbanyak.</a:t>
-            </a:r>
-          </a:p>
-        </p:txBody>
-      </p:sp>
-      <p:sp>
-        <p:nvSpPr>
-          <p:cNvPr id="5" name="TextBox 4"/>
-          <p:cNvSpPr txBox="1"/>
-          <p:nvPr/>
-        </p:nvSpPr>
-        <p:spPr>
-          <a:xfrm>
-            <a:off x="6217920" y="1828800"/>
-            <a:ext cx="5212080" cy="4114800"/>
-          </a:xfrm>
-          <a:prstGeom prst="rect">
-            <a:avLst/>
-          </a:prstGeom>
-          <a:noFill/>
-        </p:spPr>
-        <p:txBody>
-          <a:bodyPr wrap="square">
-            <a:spAutoFit/>
-          </a:bodyPr>
-          <a:lstStyle/>
-          <a:p>
-            <a:pPr>
-              <a:spcAft>
-                <a:spcPts val="1000"/>
-              </a:spcAft>
-              <a:defRPr sz="1400" b="1">
-                <a:solidFill>
-                  <a:srgbClr val="0D9488"/>
-                </a:solidFill>
-                <a:latin typeface="Arial"/>
-              </a:defRPr>
-            </a:pPr>
-            <a:r>
-              <a:t>OPTIMASI PROSES PABRIK</a:t>
-            </a:r>
-          </a:p>
-          <a:p>
-            <a:pPr>
-              <a:spcAft>
-                <a:spcPts val="1500"/>
-              </a:spcAft>
-              <a:defRPr sz="1200" b="1">
-                <a:solidFill>
-                  <a:srgbClr val="0F172A"/>
-                </a:solidFill>
-                <a:latin typeface="Courier New"/>
-              </a:defRPr>
-            </a:pPr>
-            <a:r>
-              <a:t>Sumber Data Analitik Terpadu:</a:t>
-            </a:r>
-            <a:br/>
-            <a:r>
-              <a:t>• Station_Activity_History: Sejarah waktu jalan/downtime mesin.</a:t>
-            </a:r>
-            <a:br/>
-            <a:r>
-              <a:t>• Material_Requests: Durasi loop replenishment.</a:t>
-            </a:r>
-            <a:br/>
-            <a:r>
-              <a:t>• Production_Counts: Metrik volume per shift.</a:t>
-            </a:r>
-          </a:p>
-          <a:p>
-            <a:pPr>
-              <a:defRPr sz="1300">
-                <a:latin typeface="Arial"/>
-              </a:defRPr>
-            </a:pPr>
-            <a:r>
-              <a:t>💡 Value Creation:</a:t>
-            </a:r>
-            <a:br/>
-            <a:r>
-              <a:t>Manajer dapat mengidentifikasi stasiun dengan downtime tertinggi dan membandingkannya dengan deviasi QMS aktif untuk perbaikan berkelanjutan (Kaizen).</a:t>
-            </a:r>
-          </a:p>
-        </p:txBody>
-      </p:sp>
-    </p:spTree>
-  </p:cSld>
-  <p:clrMapOvr>
-    <a:masterClrMapping/>
-  </p:clrMapOvr>
-</p:sld>
-</file>
-
-<file path=ppt/slides/slide8.xml><?xml version="1.0" encoding="utf-8"?>
-<p:sld xmlns:a="http://schemas.openxmlformats.org/drawingml/2006/main" xmlns:p="http://schemas.openxmlformats.org/presentationml/2006/main" xmlns:r="http://schemas.openxmlformats.org/officeDocument/2006/relationships">
-  <p:cSld>
-    <p:bg>
-      <p:bgPr>
-        <a:solidFill>
-          <a:srgbClr val="FFFFFF"/>
-        </a:solidFill>
-        <a:effectLst/>
-      </p:bgPr>
-    </p:bg>
-    <p:spTree>
-      <p:nvGrpSpPr>
-        <p:cNvPr id="1" name=""/>
-        <p:cNvGrpSpPr/>
-        <p:nvPr/>
-      </p:nvGrpSpPr>
-      <p:grpSpPr/>
-      <p:sp>
-        <p:nvSpPr>
-          <p:cNvPr id="2" name="TextBox 1"/>
-          <p:cNvSpPr txBox="1"/>
-          <p:nvPr/>
-        </p:nvSpPr>
-        <p:spPr>
-          <a:xfrm>
-            <a:off x="731520" y="365760"/>
-            <a:ext cx="10725912" cy="365760"/>
-          </a:xfrm>
-          <a:prstGeom prst="rect">
-            <a:avLst/>
-          </a:prstGeom>
-          <a:noFill/>
-        </p:spPr>
-        <p:txBody>
-          <a:bodyPr wrap="square">
-            <a:spAutoFit/>
-          </a:bodyPr>
-          <a:lstStyle/>
-          <a:p>
-            <a:pPr>
-              <a:defRPr sz="1000" b="1">
-                <a:solidFill>
-                  <a:srgbClr val="0D9488"/>
-                </a:solidFill>
-                <a:latin typeface="Arial"/>
-              </a:defRPr>
-            </a:pPr>
-            <a:r>
-              <a:t>PILLAR 5: DEPLOYMENT PLAN</a:t>
-            </a:r>
-          </a:p>
-        </p:txBody>
-      </p:sp>
-      <p:sp>
-        <p:nvSpPr>
-          <p:cNvPr id="3" name="TextBox 2"/>
-          <p:cNvSpPr txBox="1"/>
-          <p:nvPr/>
-        </p:nvSpPr>
-        <p:spPr>
-          <a:xfrm>
-            <a:off x="731520" y="640080"/>
-            <a:ext cx="10725912" cy="731520"/>
-          </a:xfrm>
-          <a:prstGeom prst="rect">
-            <a:avLst/>
-          </a:prstGeom>
-          <a:noFill/>
-        </p:spPr>
-        <p:txBody>
-          <a:bodyPr wrap="square">
-            <a:spAutoFit/>
-          </a:bodyPr>
-          <a:lstStyle/>
-          <a:p>
-            <a:pPr>
-              <a:defRPr sz="2800" b="1">
-                <a:solidFill>
-                  <a:srgbClr val="0F172A"/>
-                </a:solidFill>
-                <a:latin typeface="Arial"/>
-              </a:defRPr>
-            </a:pPr>
-            <a:r>
-              <a:t>Urutan Instalasi &amp; Panduan Dependensi Suite</a:t>
-            </a:r>
-          </a:p>
-        </p:txBody>
-      </p:sp>
-      <p:sp>
-        <p:nvSpPr>
-          <p:cNvPr id="4" name="Rounded Rectangle 3"/>
-          <p:cNvSpPr/>
-          <p:nvPr/>
-        </p:nvSpPr>
-        <p:spPr>
-          <a:xfrm>
-            <a:off x="731520" y="2011680"/>
-            <a:ext cx="2377440" cy="4206240"/>
-          </a:xfrm>
-          <a:prstGeom prst="roundRect">
-            <a:avLst/>
-          </a:prstGeom>
-          <a:solidFill>
-            <a:srgbClr val="F0F9FF"/>
-          </a:solidFill>
-          <a:ln w="31750">
-            <a:solidFill>
-              <a:srgbClr val="0D9488"/>
-            </a:solidFill>
-          </a:ln>
-        </p:spPr>
-        <p:style>
-          <a:lnRef idx="1">
-            <a:schemeClr val="accent1"/>
-          </a:lnRef>
-          <a:fillRef idx="3">
-            <a:schemeClr val="accent1"/>
-          </a:fillRef>
-          <a:effectRef idx="2">
-            <a:schemeClr val="accent1"/>
-          </a:effectRef>
-          <a:fontRef idx="minor">
-            <a:schemeClr val="lt1"/>
-          </a:fontRef>
-        </p:style>
-        <p:txBody>
-          <a:bodyPr rtlCol="0" anchor="ctr" wrap="square"/>
-          <a:lstStyle/>
-          <a:p>
-            <a:pPr algn="ctr">
-              <a:spcAft>
-                <a:spcPts val="400"/>
-              </a:spcAft>
-              <a:defRPr sz="1100" b="1">
-                <a:solidFill>
-                  <a:srgbClr val="0D9488"/>
-                </a:solidFill>
-                <a:latin typeface="Arial"/>
-              </a:defRPr>
-            </a:pPr>
-            <a:r>
-              <a:t>LANGKAH 01</a:t>
-            </a:r>
-          </a:p>
-          <a:p>
-            <a:pPr algn="ctr">
-              <a:spcAft>
-                <a:spcPts val="800"/>
-              </a:spcAft>
-              <a:defRPr sz="1500" b="1">
-                <a:solidFill>
-                  <a:srgbClr val="0F172A"/>
-                </a:solidFill>
-                <a:latin typeface="Arial"/>
-              </a:defRPr>
-            </a:pPr>
-            <a:r>
-              <a:t>INVENTORY</a:t>
-            </a:r>
-          </a:p>
-          <a:p>
-            <a:pPr>
-              <a:lnSpc>
-                <a:spcPct val="110000"/>
-              </a:lnSpc>
-              <a:spcAft>
-                <a:spcPts val="800"/>
-              </a:spcAft>
-              <a:defRPr sz="1050" b="1">
-                <a:solidFill>
-                  <a:srgbClr val="0F172A"/>
-                </a:solidFill>
-                <a:latin typeface="Arial"/>
-              </a:defRPr>
-            </a:pPr>
-            <a:r>
-              <a:t>App Store Templates:</a:t>
-            </a:r>
-            <a:br/>
-            <a:r>
-              <a:t>• Material Warehouse</a:t>
-            </a:r>
-            <a:br/>
-            <a:r>
-              <a:t>• Inventory App Suite</a:t>
-            </a:r>
-          </a:p>
-          <a:p>
-            <a:pPr>
-              <a:lnSpc>
-                <a:spcPct val="110000"/>
-              </a:lnSpc>
-              <a:spcAft>
-                <a:spcPts val="800"/>
-              </a:spcAft>
-              <a:defRPr sz="1000">
-                <a:solidFill>
-                  <a:srgbClr val="1E293B"/>
-                </a:solidFill>
-                <a:latin typeface="Arial"/>
-              </a:defRPr>
-            </a:pPr>
-            <a:r>
-              <a:t>Fungsi:</a:t>
-            </a:r>
-            <a:br/>
-            <a:r>
-              <a:t>Membangun tabel fondasi 'Inventory_Items' &amp; 'Material_Definitions'.</a:t>
-            </a:r>
-          </a:p>
-          <a:p>
-            <a:pPr>
-              <a:lnSpc>
-                <a:spcPct val="110000"/>
-              </a:lnSpc>
-              <a:defRPr sz="1000" b="1">
-                <a:solidFill>
-                  <a:srgbClr val="0D9488"/>
-                </a:solidFill>
-                <a:latin typeface="Arial"/>
-              </a:defRPr>
-            </a:pPr>
-            <a:r>
-              <a:t>💡 Langkah Verifikasi:</a:t>
-            </a:r>
-            <a:br/>
-            <a:r>
-              <a:t>Buka Material Warehouse App. Pastikan dummy unit 'DEMO-CYL-A1' muncul di Rak BIN-12.</a:t>
-            </a:r>
-          </a:p>
-        </p:txBody>
-      </p:sp>
-      <p:sp>
-        <p:nvSpPr>
-          <p:cNvPr id="5" name="Right Arrow 4"/>
-          <p:cNvSpPr/>
-          <p:nvPr/>
-        </p:nvSpPr>
-        <p:spPr>
-          <a:xfrm>
-            <a:off x="3200400" y="4023360"/>
-            <a:ext cx="182880" cy="182880"/>
-          </a:xfrm>
-          <a:prstGeom prst="rightArrow">
-            <a:avLst/>
-          </a:prstGeom>
-          <a:solidFill>
-            <a:srgbClr val="0D9488"/>
-          </a:solidFill>
-          <a:ln>
-            <a:noFill/>
-          </a:ln>
-        </p:spPr>
-        <p:style>
-          <a:lnRef idx="1">
-            <a:schemeClr val="accent1"/>
-          </a:lnRef>
-          <a:fillRef idx="3">
-            <a:schemeClr val="accent1"/>
-          </a:fillRef>
-          <a:effectRef idx="2">
-            <a:schemeClr val="accent1"/>
-          </a:effectRef>
-          <a:fontRef idx="minor">
-            <a:schemeClr val="lt1"/>
-          </a:fontRef>
-        </p:style>
-        <p:txBody>
-          <a:bodyPr rtlCol="0" anchor="ctr"/>
-          <a:lstStyle/>
-          <a:p>
-            <a:pPr algn="ctr"/>
-          </a:p>
-        </p:txBody>
-      </p:sp>
-      <p:sp>
-        <p:nvSpPr>
-          <p:cNvPr id="6" name="Rounded Rectangle 5"/>
-          <p:cNvSpPr/>
-          <p:nvPr/>
-        </p:nvSpPr>
-        <p:spPr>
-          <a:xfrm>
-            <a:off x="3657600" y="2011680"/>
-            <a:ext cx="2377440" cy="4206240"/>
-          </a:xfrm>
-          <a:prstGeom prst="roundRect">
-            <a:avLst/>
-          </a:prstGeom>
-          <a:solidFill>
-            <a:srgbClr val="F0F9FF"/>
-          </a:solidFill>
-          <a:ln w="31750">
-            <a:solidFill>
-              <a:srgbClr val="EA580C"/>
-            </a:solidFill>
-          </a:ln>
-        </p:spPr>
-        <p:style>
-          <a:lnRef idx="1">
-            <a:schemeClr val="accent1"/>
-          </a:lnRef>
-          <a:fillRef idx="3">
-            <a:schemeClr val="accent1"/>
-          </a:fillRef>
-          <a:effectRef idx="2">
-            <a:schemeClr val="accent1"/>
-          </a:effectRef>
-          <a:fontRef idx="minor">
-            <a:schemeClr val="lt1"/>
-          </a:fontRef>
-        </p:style>
-        <p:txBody>
-          <a:bodyPr rtlCol="0" anchor="ctr" wrap="square"/>
-          <a:lstStyle/>
-          <a:p>
-            <a:pPr algn="ctr">
-              <a:spcAft>
-                <a:spcPts val="400"/>
-              </a:spcAft>
-              <a:defRPr sz="1100" b="1">
-                <a:solidFill>
-                  <a:srgbClr val="EA580C"/>
-                </a:solidFill>
-                <a:latin typeface="Arial"/>
-              </a:defRPr>
-            </a:pPr>
-            <a:r>
-              <a:t>LANGKAH 02</a:t>
-            </a:r>
-          </a:p>
-          <a:p>
-            <a:pPr algn="ctr">
-              <a:spcAft>
-                <a:spcPts val="800"/>
-              </a:spcAft>
-              <a:defRPr sz="1500" b="1">
-                <a:solidFill>
-                  <a:srgbClr val="0F172A"/>
-                </a:solidFill>
-                <a:latin typeface="Arial"/>
-              </a:defRPr>
-            </a:pPr>
-            <a:r>
-              <a:t>PRODUCTION</a:t>
-            </a:r>
-          </a:p>
-          <a:p>
-            <a:pPr>
-              <a:lnSpc>
-                <a:spcPct val="110000"/>
-              </a:lnSpc>
-              <a:spcAft>
-                <a:spcPts val="800"/>
-              </a:spcAft>
-              <a:defRPr sz="1050" b="1">
-                <a:solidFill>
-                  <a:srgbClr val="0F172A"/>
-                </a:solidFill>
-                <a:latin typeface="Arial"/>
-              </a:defRPr>
-            </a:pPr>
-            <a:r>
-              <a:t>App Store Templates:</a:t>
-            </a:r>
-            <a:br/>
-            <a:r>
-              <a:t>• Composable MES</a:t>
-            </a:r>
-            <a:br/>
-            <a:r>
-              <a:t>• Andon Terminal</a:t>
-            </a:r>
-            <a:br/>
-            <a:r>
-              <a:t>• Andon Management</a:t>
-            </a:r>
-          </a:p>
-          <a:p>
-            <a:pPr>
-              <a:lnSpc>
-                <a:spcPct val="110000"/>
-              </a:lnSpc>
-              <a:spcAft>
-                <a:spcPts val="800"/>
-              </a:spcAft>
-              <a:defRPr sz="1000">
-                <a:solidFill>
-                  <a:srgbClr val="1E293B"/>
-                </a:solidFill>
-                <a:latin typeface="Arial"/>
-              </a:defRPr>
-            </a:pPr>
-            <a:r>
-              <a:t>Fungsi:</a:t>
-            </a:r>
-            <a:br/>
-            <a:r>
-              <a:t>Menghubungkan perakitan &amp; downtime stasiun kerja yang memotong stok.</a:t>
-            </a:r>
-          </a:p>
-          <a:p>
-            <a:pPr>
-              <a:lnSpc>
-                <a:spcPct val="110000"/>
-              </a:lnSpc>
-              <a:defRPr sz="1000" b="1">
-                <a:solidFill>
-                  <a:srgbClr val="0D9488"/>
-                </a:solidFill>
-                <a:latin typeface="Arial"/>
-              </a:defRPr>
-            </a:pPr>
-            <a:r>
-              <a:t>💡 Langkah Verifikasi:</a:t>
-            </a:r>
-            <a:br/>
-            <a:r>
-              <a:t>Picu downtime stasiun, pastikan status stasiun DOWN terupdate real-time.</a:t>
-            </a:r>
-          </a:p>
-        </p:txBody>
-      </p:sp>
-      <p:sp>
-        <p:nvSpPr>
-          <p:cNvPr id="7" name="Right Arrow 6"/>
-          <p:cNvSpPr/>
-          <p:nvPr/>
-        </p:nvSpPr>
-        <p:spPr>
-          <a:xfrm>
-            <a:off x="6126480" y="4023360"/>
-            <a:ext cx="182880" cy="182880"/>
-          </a:xfrm>
-          <a:prstGeom prst="rightArrow">
-            <a:avLst/>
-          </a:prstGeom>
-          <a:solidFill>
-            <a:srgbClr val="0D9488"/>
-          </a:solidFill>
-          <a:ln>
-            <a:noFill/>
-          </a:ln>
-        </p:spPr>
-        <p:style>
-          <a:lnRef idx="1">
-            <a:schemeClr val="accent1"/>
-          </a:lnRef>
-          <a:fillRef idx="3">
-            <a:schemeClr val="accent1"/>
-          </a:fillRef>
-          <a:effectRef idx="2">
-            <a:schemeClr val="accent1"/>
-          </a:effectRef>
-          <a:fontRef idx="minor">
-            <a:schemeClr val="lt1"/>
-          </a:fontRef>
-        </p:style>
-        <p:txBody>
-          <a:bodyPr rtlCol="0" anchor="ctr"/>
-          <a:lstStyle/>
-          <a:p>
-            <a:pPr algn="ctr"/>
-          </a:p>
-        </p:txBody>
-      </p:sp>
-      <p:sp>
-        <p:nvSpPr>
-          <p:cNvPr id="8" name="Rounded Rectangle 7"/>
-          <p:cNvSpPr/>
-          <p:nvPr/>
-        </p:nvSpPr>
-        <p:spPr>
-          <a:xfrm>
-            <a:off x="6583680" y="2011680"/>
-            <a:ext cx="2377440" cy="4206240"/>
-          </a:xfrm>
-          <a:prstGeom prst="roundRect">
-            <a:avLst/>
-          </a:prstGeom>
-          <a:solidFill>
-            <a:srgbClr val="F0F9FF"/>
-          </a:solidFill>
-          <a:ln w="31750">
-            <a:solidFill>
-              <a:srgbClr val="D97706"/>
-            </a:solidFill>
-          </a:ln>
-        </p:spPr>
-        <p:style>
-          <a:lnRef idx="1">
-            <a:schemeClr val="accent1"/>
-          </a:lnRef>
-          <a:fillRef idx="3">
-            <a:schemeClr val="accent1"/>
-          </a:fillRef>
-          <a:effectRef idx="2">
-            <a:schemeClr val="accent1"/>
-          </a:effectRef>
-          <a:fontRef idx="minor">
-            <a:schemeClr val="lt1"/>
-          </a:fontRef>
-        </p:style>
-        <p:txBody>
-          <a:bodyPr rtlCol="0" anchor="ctr" wrap="square"/>
-          <a:lstStyle/>
-          <a:p>
-            <a:pPr algn="ctr">
-              <a:spcAft>
-                <a:spcPts val="400"/>
-              </a:spcAft>
-              <a:defRPr sz="1100" b="1">
-                <a:solidFill>
-                  <a:srgbClr val="D97706"/>
-                </a:solidFill>
-                <a:latin typeface="Arial"/>
-              </a:defRPr>
-            </a:pPr>
-            <a:r>
-              <a:t>LANGKAH 03</a:t>
-            </a:r>
-          </a:p>
-          <a:p>
-            <a:pPr algn="ctr">
-              <a:spcAft>
-                <a:spcPts val="800"/>
-              </a:spcAft>
-              <a:defRPr sz="1500" b="1">
-                <a:solidFill>
-                  <a:srgbClr val="0F172A"/>
-                </a:solidFill>
-                <a:latin typeface="Arial"/>
-              </a:defRPr>
-            </a:pPr>
-            <a:r>
-              <a:t>QUALITY</a:t>
-            </a:r>
-          </a:p>
-          <a:p>
-            <a:pPr>
-              <a:lnSpc>
-                <a:spcPct val="110000"/>
-              </a:lnSpc>
-              <a:spcAft>
-                <a:spcPts val="800"/>
-              </a:spcAft>
-              <a:defRPr sz="1050" b="1">
-                <a:solidFill>
-                  <a:srgbClr val="0F172A"/>
-                </a:solidFill>
-                <a:latin typeface="Arial"/>
-              </a:defRPr>
-            </a:pPr>
-            <a:r>
-              <a:t>App Store Templates:</a:t>
-            </a:r>
-            <a:br/>
-            <a:r>
-              <a:t>• Quality Inspection</a:t>
-            </a:r>
-            <a:br/>
-            <a:r>
-              <a:t>• Frontline QMS App</a:t>
-            </a:r>
-          </a:p>
-          <a:p>
-            <a:pPr>
-              <a:lnSpc>
-                <a:spcPct val="110000"/>
-              </a:lnSpc>
-              <a:spcAft>
-                <a:spcPts val="800"/>
-              </a:spcAft>
-              <a:defRPr sz="1000">
-                <a:solidFill>
-                  <a:srgbClr val="1E293B"/>
-                </a:solidFill>
-                <a:latin typeface="Arial"/>
-              </a:defRPr>
-            </a:pPr>
-            <a:r>
-              <a:t>Fungsi:</a:t>
-            </a:r>
-            <a:br/>
-            <a:r>
-              <a:t>Mengevaluasi hasil lini &amp; menyalurkan defect perakitan ke papan MRB.</a:t>
-            </a:r>
-          </a:p>
-          <a:p>
-            <a:pPr>
-              <a:lnSpc>
-                <a:spcPct val="110000"/>
-              </a:lnSpc>
-              <a:defRPr sz="1000" b="1">
-                <a:solidFill>
-                  <a:srgbClr val="0D9488"/>
-                </a:solidFill>
-                <a:latin typeface="Arial"/>
-              </a:defRPr>
-            </a:pPr>
-            <a:r>
-              <a:t>💡 Langkah Verifikasi:</a:t>
-            </a:r>
-            <a:br/>
-            <a:r>
-              <a:t>Jalankan uji mutu, masukkan kegagalan, pastikan defect terdaftar instan ke MRB.</a:t>
-            </a:r>
-          </a:p>
-        </p:txBody>
-      </p:sp>
-      <p:sp>
-        <p:nvSpPr>
-          <p:cNvPr id="9" name="Right Arrow 8"/>
-          <p:cNvSpPr/>
-          <p:nvPr/>
-        </p:nvSpPr>
-        <p:spPr>
-          <a:xfrm>
-            <a:off x="9052560" y="4023360"/>
-            <a:ext cx="182880" cy="182880"/>
-          </a:xfrm>
-          <a:prstGeom prst="rightArrow">
-            <a:avLst/>
-          </a:prstGeom>
-          <a:solidFill>
-            <a:srgbClr val="0D9488"/>
-          </a:solidFill>
-          <a:ln>
-            <a:noFill/>
-          </a:ln>
-        </p:spPr>
-        <p:style>
-          <a:lnRef idx="1">
-            <a:schemeClr val="accent1"/>
-          </a:lnRef>
-          <a:fillRef idx="3">
-            <a:schemeClr val="accent1"/>
-          </a:fillRef>
-          <a:effectRef idx="2">
-            <a:schemeClr val="accent1"/>
-          </a:effectRef>
-          <a:fontRef idx="minor">
-            <a:schemeClr val="lt1"/>
-          </a:fontRef>
-        </p:style>
-        <p:txBody>
-          <a:bodyPr rtlCol="0" anchor="ctr"/>
-          <a:lstStyle/>
-          <a:p>
-            <a:pPr algn="ctr"/>
-          </a:p>
-        </p:txBody>
-      </p:sp>
-      <p:sp>
-        <p:nvSpPr>
-          <p:cNvPr id="10" name="Rounded Rectangle 9"/>
-          <p:cNvSpPr/>
-          <p:nvPr/>
-        </p:nvSpPr>
-        <p:spPr>
-          <a:xfrm>
-            <a:off x="9509760" y="2011680"/>
-            <a:ext cx="2377440" cy="4206240"/>
-          </a:xfrm>
-          <a:prstGeom prst="roundRect">
-            <a:avLst/>
-          </a:prstGeom>
-          <a:solidFill>
-            <a:srgbClr val="F0F9FF"/>
-          </a:solidFill>
-          <a:ln w="31750">
-            <a:solidFill>
-              <a:srgbClr val="7C3AED"/>
-            </a:solidFill>
-          </a:ln>
-        </p:spPr>
-        <p:style>
-          <a:lnRef idx="1">
-            <a:schemeClr val="accent1"/>
-          </a:lnRef>
-          <a:fillRef idx="3">
-            <a:schemeClr val="accent1"/>
-          </a:fillRef>
-          <a:effectRef idx="2">
-            <a:schemeClr val="accent1"/>
-          </a:effectRef>
-          <a:fontRef idx="minor">
-            <a:schemeClr val="lt1"/>
-          </a:fontRef>
-        </p:style>
-        <p:txBody>
-          <a:bodyPr rtlCol="0" anchor="ctr" wrap="square"/>
-          <a:lstStyle/>
-          <a:p>
-            <a:pPr algn="ctr">
-              <a:spcAft>
-                <a:spcPts val="400"/>
-              </a:spcAft>
-              <a:defRPr sz="1100" b="1">
-                <a:solidFill>
-                  <a:srgbClr val="7C3AED"/>
-                </a:solidFill>
-                <a:latin typeface="Arial"/>
-              </a:defRPr>
-            </a:pPr>
-            <a:r>
-              <a:t>LANGKAH 04</a:t>
-            </a:r>
-          </a:p>
-          <a:p>
-            <a:pPr algn="ctr">
-              <a:spcAft>
-                <a:spcPts val="800"/>
-              </a:spcAft>
-              <a:defRPr sz="1500" b="1">
-                <a:solidFill>
-                  <a:srgbClr val="0F172A"/>
-                </a:solidFill>
-                <a:latin typeface="Arial"/>
-              </a:defRPr>
-            </a:pPr>
-            <a:r>
-              <a:t>ANALYTICS</a:t>
-            </a:r>
-          </a:p>
-          <a:p>
-            <a:pPr>
-              <a:lnSpc>
-                <a:spcPct val="110000"/>
-              </a:lnSpc>
-              <a:spcAft>
-                <a:spcPts val="800"/>
-              </a:spcAft>
-              <a:defRPr sz="1050" b="1">
-                <a:solidFill>
-                  <a:srgbClr val="0F172A"/>
-                </a:solidFill>
-                <a:latin typeface="Arial"/>
-              </a:defRPr>
-            </a:pPr>
-            <a:r>
-              <a:t>App Store Templates:</a:t>
-            </a:r>
-            <a:br/>
-            <a:r>
-              <a:t>• Replenishment App</a:t>
-            </a:r>
-            <a:br/>
-            <a:r>
-              <a:t>• Material Handling</a:t>
-            </a:r>
-            <a:br/>
-            <a:r>
-              <a:t>• OEE MES Dashboard</a:t>
-            </a:r>
-          </a:p>
-          <a:p>
-            <a:pPr>
-              <a:lnSpc>
-                <a:spcPct val="110000"/>
-              </a:lnSpc>
-              <a:spcAft>
-                <a:spcPts val="800"/>
-              </a:spcAft>
-              <a:defRPr sz="1000">
-                <a:solidFill>
-                  <a:srgbClr val="1E293B"/>
-                </a:solidFill>
-                <a:latin typeface="Arial"/>
-              </a:defRPr>
-            </a:pPr>
-            <a:r>
-              <a:t>Fungsi:</a:t>
-            </a:r>
-            <a:br/>
-            <a:r>
-              <a:t>Konsolidasi Kanban loop, OEE, &amp; cycle time historis pabrik secara utuh.</a:t>
-            </a:r>
-          </a:p>
-          <a:p>
-            <a:pPr>
-              <a:lnSpc>
-                <a:spcPct val="110000"/>
-              </a:lnSpc>
-              <a:defRPr sz="1000" b="1">
-                <a:solidFill>
-                  <a:srgbClr val="0D9488"/>
-                </a:solidFill>
-                <a:latin typeface="Arial"/>
-              </a:defRPr>
-            </a:pPr>
-            <a:r>
-              <a:t>💡 Langkah Verifikasi:</a:t>
-            </a:r>
-            <a:br/>
-            <a:r>
-              <a:t>Scan bin kosong, pastikan order baru masuk antrean Water Spider logistik.</a:t>
-            </a:r>
-          </a:p>
-        </p:txBody>
-      </p:sp>
-    </p:spTree>
-  </p:cSld>
-  <p:clrMapOvr>
-    <a:masterClrMapping/>
-  </p:clrMapOvr>
-</p:sld>
-</file>
-
-<file path=ppt/slides/slide9.xml><?xml version="1.0" encoding="utf-8"?>
-<p:sld xmlns:a="http://schemas.openxmlformats.org/drawingml/2006/main" xmlns:p="http://schemas.openxmlformats.org/presentationml/2006/main" xmlns:r="http://schemas.openxmlformats.org/officeDocument/2006/relationships">
-  <p:cSld>
-    <p:bg>
-      <p:bgPr>
-        <a:solidFill>
-          <a:srgbClr val="FFFFFF"/>
-        </a:solidFill>
-        <a:effectLst/>
-      </p:bgPr>
-    </p:bg>
-    <p:spTree>
-      <p:nvGrpSpPr>
-        <p:cNvPr id="1" name=""/>
-        <p:cNvGrpSpPr/>
-        <p:nvPr/>
-      </p:nvGrpSpPr>
-      <p:grpSpPr/>
-      <p:sp>
-        <p:nvSpPr>
-          <p:cNvPr id="2" name="TextBox 1"/>
-          <p:cNvSpPr txBox="1"/>
-          <p:nvPr/>
-        </p:nvSpPr>
-        <p:spPr>
-          <a:xfrm>
-            <a:off x="731520" y="365760"/>
-            <a:ext cx="10725912" cy="365760"/>
-          </a:xfrm>
-          <a:prstGeom prst="rect">
-            <a:avLst/>
-          </a:prstGeom>
-          <a:noFill/>
-        </p:spPr>
-        <p:txBody>
-          <a:bodyPr wrap="square">
-            <a:spAutoFit/>
-          </a:bodyPr>
-          <a:lstStyle/>
-          <a:p>
-            <a:pPr>
-              <a:defRPr sz="1000" b="1">
-                <a:solidFill>
-                  <a:srgbClr val="0D9488"/>
-                </a:solidFill>
-                <a:latin typeface="Arial"/>
-              </a:defRPr>
-            </a:pPr>
-            <a:r>
-              <a:t>PILLAR 6: FACTORY PROCESS MAPPING</a:t>
-            </a:r>
-          </a:p>
-        </p:txBody>
-      </p:sp>
-      <p:sp>
-        <p:nvSpPr>
-          <p:cNvPr id="3" name="TextBox 2"/>
-          <p:cNvSpPr txBox="1"/>
-          <p:nvPr/>
-        </p:nvSpPr>
-        <p:spPr>
-          <a:xfrm>
-            <a:off x="731520" y="640080"/>
-            <a:ext cx="10725912" cy="731520"/>
-          </a:xfrm>
-          <a:prstGeom prst="rect">
-            <a:avLst/>
-          </a:prstGeom>
-          <a:noFill/>
-        </p:spPr>
-        <p:txBody>
-          <a:bodyPr wrap="square">
-            <a:spAutoFit/>
-          </a:bodyPr>
-          <a:lstStyle/>
-          <a:p>
-            <a:pPr>
-              <a:defRPr sz="2800" b="1">
-                <a:solidFill>
-                  <a:srgbClr val="0F172A"/>
-                </a:solidFill>
-                <a:latin typeface="Arial"/>
-              </a:defRPr>
-            </a:pPr>
-            <a:r>
-              <a:t>Pemetaan Proses &amp; Diagram Alur Kerja Template</a:t>
-            </a:r>
-          </a:p>
-        </p:txBody>
-      </p:sp>
-      <p:sp>
-        <p:nvSpPr>
-          <p:cNvPr id="4" name="Rounded Rectangle 3"/>
-          <p:cNvSpPr/>
-          <p:nvPr/>
-        </p:nvSpPr>
-        <p:spPr>
-          <a:xfrm>
-            <a:off x="731520" y="2011680"/>
-            <a:ext cx="1920240" cy="1645920"/>
-          </a:xfrm>
-          <a:prstGeom prst="roundRect">
-            <a:avLst/>
-          </a:prstGeom>
-          <a:solidFill>
-            <a:srgbClr val="F0F9FF"/>
-          </a:solidFill>
-          <a:ln w="25400">
-            <a:solidFill>
-              <a:srgbClr val="0D9488"/>
-            </a:solidFill>
-          </a:ln>
-        </p:spPr>
-        <p:style>
-          <a:lnRef idx="1">
-            <a:schemeClr val="accent1"/>
-          </a:lnRef>
-          <a:fillRef idx="3">
-            <a:schemeClr val="accent1"/>
-          </a:fillRef>
-          <a:effectRef idx="2">
-            <a:schemeClr val="accent1"/>
-          </a:effectRef>
-          <a:fontRef idx="minor">
-            <a:schemeClr val="lt1"/>
-          </a:fontRef>
-        </p:style>
-        <p:txBody>
-          <a:bodyPr rtlCol="0" anchor="ctr" wrap="square"/>
-          <a:lstStyle/>
-          <a:p>
-            <a:pPr algn="ctr">
-              <a:spcAft>
-                <a:spcPts val="800"/>
-              </a:spcAft>
-              <a:defRPr sz="1100" b="1">
-                <a:solidFill>
-                  <a:srgbClr val="0D9488"/>
-                </a:solidFill>
-                <a:latin typeface="Arial"/>
-              </a:defRPr>
-            </a:pPr>
-            <a:r>
-              <a:t>LANGKAH 1</a:t>
-            </a:r>
-          </a:p>
-          <a:p>
-            <a:pPr algn="ctr">
-              <a:defRPr sz="1600" b="1">
-                <a:solidFill>
-                  <a:srgbClr val="0F172A"/>
-                </a:solidFill>
-                <a:latin typeface="Arial"/>
-              </a:defRPr>
-            </a:pPr>
-            <a:r>
-              <a:t>INGESTION</a:t>
-            </a:r>
-          </a:p>
-        </p:txBody>
-      </p:sp>
-      <p:sp>
-        <p:nvSpPr>
-          <p:cNvPr id="5" name="TextBox 4"/>
-          <p:cNvSpPr txBox="1"/>
-          <p:nvPr/>
-        </p:nvSpPr>
-        <p:spPr>
-          <a:xfrm>
-            <a:off x="640080" y="3931920"/>
-            <a:ext cx="2103120" cy="1828800"/>
-          </a:xfrm>
-          <a:prstGeom prst="rect">
-            <a:avLst/>
-          </a:prstGeom>
-          <a:noFill/>
-        </p:spPr>
-        <p:txBody>
-          <a:bodyPr wrap="square">
-            <a:spAutoFit/>
-          </a:bodyPr>
-          <a:lstStyle/>
-          <a:p>
-            <a:pPr algn="ctr">
-              <a:lnSpc>
-                <a:spcPct val="120000"/>
-              </a:lnSpc>
-              <a:defRPr sz="1100">
-                <a:solidFill>
-                  <a:srgbClr val="1E293B"/>
-                </a:solidFill>
-                <a:latin typeface="Arial"/>
-              </a:defRPr>
-            </a:pPr>
-            <a:r>
-              <a:t>Material Loading &amp; Warehouse</a:t>
-            </a:r>
-            <a:br/>
-            <a:r>
-              <a:t>Registrasi &amp; penempatan material baru ke rak penyimpanan.</a:t>
-            </a:r>
-          </a:p>
-        </p:txBody>
-      </p:sp>
-      <p:sp>
-        <p:nvSpPr>
-          <p:cNvPr id="6" name="Right Arrow 5"/>
-          <p:cNvSpPr/>
-          <p:nvPr/>
-        </p:nvSpPr>
-        <p:spPr>
-          <a:xfrm>
-            <a:off x="2743200" y="2743200"/>
-            <a:ext cx="182880" cy="182880"/>
-          </a:xfrm>
-          <a:prstGeom prst="rightArrow">
-            <a:avLst/>
-          </a:prstGeom>
-          <a:solidFill>
-            <a:srgbClr val="0D9488"/>
-          </a:solidFill>
-          <a:ln>
-            <a:noFill/>
-          </a:ln>
-        </p:spPr>
-        <p:style>
-          <a:lnRef idx="1">
-            <a:schemeClr val="accent1"/>
-          </a:lnRef>
-          <a:fillRef idx="3">
-            <a:schemeClr val="accent1"/>
-          </a:fillRef>
-          <a:effectRef idx="2">
-            <a:schemeClr val="accent1"/>
-          </a:effectRef>
-          <a:fontRef idx="minor">
-            <a:schemeClr val="lt1"/>
-          </a:fontRef>
-        </p:style>
-        <p:txBody>
-          <a:bodyPr rtlCol="0" anchor="ctr"/>
-          <a:lstStyle/>
-          <a:p>
-            <a:pPr algn="ctr"/>
-          </a:p>
-        </p:txBody>
-      </p:sp>
-      <p:sp>
-        <p:nvSpPr>
-          <p:cNvPr id="7" name="Rounded Rectangle 6"/>
-          <p:cNvSpPr/>
-          <p:nvPr/>
-        </p:nvSpPr>
-        <p:spPr>
-          <a:xfrm>
-            <a:off x="3017520" y="2011680"/>
-            <a:ext cx="1920240" cy="1645920"/>
-          </a:xfrm>
-          <a:prstGeom prst="roundRect">
-            <a:avLst/>
-          </a:prstGeom>
-          <a:solidFill>
-            <a:srgbClr val="F0F9FF"/>
-          </a:solidFill>
-          <a:ln w="25400">
-            <a:solidFill>
-              <a:srgbClr val="0284C7"/>
-            </a:solidFill>
-          </a:ln>
-        </p:spPr>
-        <p:style>
-          <a:lnRef idx="1">
-            <a:schemeClr val="accent1"/>
-          </a:lnRef>
-          <a:fillRef idx="3">
-            <a:schemeClr val="accent1"/>
-          </a:fillRef>
-          <a:effectRef idx="2">
-            <a:schemeClr val="accent1"/>
-          </a:effectRef>
-          <a:fontRef idx="minor">
-            <a:schemeClr val="lt1"/>
-          </a:fontRef>
-        </p:style>
-        <p:txBody>
-          <a:bodyPr rtlCol="0" anchor="ctr" wrap="square"/>
-          <a:lstStyle/>
-          <a:p>
-            <a:pPr algn="ctr">
-              <a:spcAft>
-                <a:spcPts val="800"/>
-              </a:spcAft>
-              <a:defRPr sz="1100" b="1">
-                <a:solidFill>
-                  <a:srgbClr val="0284C7"/>
-                </a:solidFill>
-                <a:latin typeface="Arial"/>
-              </a:defRPr>
-            </a:pPr>
-            <a:r>
-              <a:t>LANGKAH 2</a:t>
-            </a:r>
-          </a:p>
-          <a:p>
-            <a:pPr algn="ctr">
-              <a:defRPr sz="1600" b="1">
-                <a:solidFill>
-                  <a:srgbClr val="0F172A"/>
-                </a:solidFill>
-                <a:latin typeface="Arial"/>
-              </a:defRPr>
-            </a:pPr>
-            <a:r>
-              <a:t>REPLENISH</a:t>
-            </a:r>
-          </a:p>
-        </p:txBody>
-      </p:sp>
-      <p:sp>
-        <p:nvSpPr>
-          <p:cNvPr id="8" name="TextBox 7"/>
-          <p:cNvSpPr txBox="1"/>
-          <p:nvPr/>
-        </p:nvSpPr>
-        <p:spPr>
-          <a:xfrm>
-            <a:off x="2926080" y="3931920"/>
-            <a:ext cx="2103120" cy="1828800"/>
-          </a:xfrm>
-          <a:prstGeom prst="rect">
-            <a:avLst/>
-          </a:prstGeom>
-          <a:noFill/>
-        </p:spPr>
-        <p:txBody>
-          <a:bodyPr wrap="square">
-            <a:spAutoFit/>
-          </a:bodyPr>
-          <a:lstStyle/>
-          <a:p>
-            <a:pPr algn="ctr">
-              <a:lnSpc>
-                <a:spcPct val="120000"/>
-              </a:lnSpc>
-              <a:defRPr sz="1100">
-                <a:solidFill>
-                  <a:srgbClr val="1E293B"/>
-                </a:solidFill>
-                <a:latin typeface="Arial"/>
-              </a:defRPr>
-            </a:pPr>
-            <a:r>
-              <a:t>Material Request &amp; Replenishment</a:t>
-            </a:r>
-            <a:br/>
-            <a:r>
-              <a:t>Pemicuan loop Kanban saat bin perakitan di lini habis.</a:t>
-            </a:r>
-          </a:p>
-        </p:txBody>
-      </p:sp>
-      <p:sp>
-        <p:nvSpPr>
-          <p:cNvPr id="9" name="Right Arrow 8"/>
-          <p:cNvSpPr/>
-          <p:nvPr/>
-        </p:nvSpPr>
-        <p:spPr>
-          <a:xfrm>
-            <a:off x="5029200" y="2743200"/>
-            <a:ext cx="182880" cy="182880"/>
-          </a:xfrm>
-          <a:prstGeom prst="rightArrow">
-            <a:avLst/>
-          </a:prstGeom>
-          <a:solidFill>
-            <a:srgbClr val="0D9488"/>
-          </a:solidFill>
-          <a:ln>
-            <a:noFill/>
-          </a:ln>
-        </p:spPr>
-        <p:style>
-          <a:lnRef idx="1">
-            <a:schemeClr val="accent1"/>
-          </a:lnRef>
-          <a:fillRef idx="3">
-            <a:schemeClr val="accent1"/>
-          </a:fillRef>
-          <a:effectRef idx="2">
-            <a:schemeClr val="accent1"/>
-          </a:effectRef>
-          <a:fontRef idx="minor">
-            <a:schemeClr val="lt1"/>
-          </a:fontRef>
-        </p:style>
-        <p:txBody>
-          <a:bodyPr rtlCol="0" anchor="ctr"/>
-          <a:lstStyle/>
-          <a:p>
-            <a:pPr algn="ctr"/>
-          </a:p>
-        </p:txBody>
-      </p:sp>
-      <p:sp>
-        <p:nvSpPr>
-          <p:cNvPr id="10" name="Rounded Rectangle 9"/>
-          <p:cNvSpPr/>
-          <p:nvPr/>
-        </p:nvSpPr>
-        <p:spPr>
-          <a:xfrm>
-            <a:off x="5303520" y="2011680"/>
-            <a:ext cx="1920240" cy="1645920"/>
-          </a:xfrm>
-          <a:prstGeom prst="roundRect">
-            <a:avLst/>
-          </a:prstGeom>
-          <a:solidFill>
-            <a:srgbClr val="F0F9FF"/>
-          </a:solidFill>
-          <a:ln w="25400">
-            <a:solidFill>
-              <a:srgbClr val="EA580C"/>
-            </a:solidFill>
-          </a:ln>
-        </p:spPr>
-        <p:style>
-          <a:lnRef idx="1">
-            <a:schemeClr val="accent1"/>
-          </a:lnRef>
-          <a:fillRef idx="3">
-            <a:schemeClr val="accent1"/>
-          </a:fillRef>
-          <a:effectRef idx="2">
-            <a:schemeClr val="accent1"/>
-          </a:effectRef>
-          <a:fontRef idx="minor">
-            <a:schemeClr val="lt1"/>
-          </a:fontRef>
-        </p:style>
-        <p:txBody>
-          <a:bodyPr rtlCol="0" anchor="ctr" wrap="square"/>
-          <a:lstStyle/>
-          <a:p>
-            <a:pPr algn="ctr">
-              <a:spcAft>
-                <a:spcPts val="800"/>
-              </a:spcAft>
-              <a:defRPr sz="1100" b="1">
-                <a:solidFill>
-                  <a:srgbClr val="EA580C"/>
-                </a:solidFill>
-                <a:latin typeface="Arial"/>
-              </a:defRPr>
-            </a:pPr>
-            <a:r>
-              <a:t>LANGKAH 3</a:t>
-            </a:r>
-          </a:p>
-          <a:p>
-            <a:pPr algn="ctr">
-              <a:defRPr sz="1600" b="1">
-                <a:solidFill>
-                  <a:srgbClr val="0F172A"/>
-                </a:solidFill>
-                <a:latin typeface="Arial"/>
-              </a:defRPr>
-            </a:pPr>
-            <a:r>
-              <a:t>EXECUTE</a:t>
-            </a:r>
-          </a:p>
-        </p:txBody>
-      </p:sp>
-      <p:sp>
-        <p:nvSpPr>
-          <p:cNvPr id="11" name="TextBox 10"/>
-          <p:cNvSpPr txBox="1"/>
-          <p:nvPr/>
-        </p:nvSpPr>
-        <p:spPr>
-          <a:xfrm>
-            <a:off x="5212080" y="3931920"/>
-            <a:ext cx="2103120" cy="1828800"/>
-          </a:xfrm>
-          <a:prstGeom prst="rect">
-            <a:avLst/>
-          </a:prstGeom>
-          <a:noFill/>
-        </p:spPr>
-        <p:txBody>
-          <a:bodyPr wrap="square">
-            <a:spAutoFit/>
-          </a:bodyPr>
-          <a:lstStyle/>
-          <a:p>
-            <a:pPr algn="ctr">
-              <a:lnSpc>
-                <a:spcPct val="120000"/>
-              </a:lnSpc>
-              <a:defRPr sz="1100">
-                <a:solidFill>
-                  <a:srgbClr val="1E293B"/>
-                </a:solidFill>
-                <a:latin typeface="Arial"/>
-              </a:defRPr>
-            </a:pPr>
-            <a:r>
-              <a:t>Order Execution &amp; Andon Terminal</a:t>
-            </a:r>
-            <a:br/>
-            <a:r>
-              <a:t>Instruksi perakitan operator &amp; pemicuan downtime terintegrasi.</a:t>
-            </a:r>
-          </a:p>
-        </p:txBody>
-      </p:sp>
-      <p:sp>
-        <p:nvSpPr>
-          <p:cNvPr id="12" name="Right Arrow 11"/>
-          <p:cNvSpPr/>
-          <p:nvPr/>
-        </p:nvSpPr>
-        <p:spPr>
-          <a:xfrm>
-            <a:off x="7315200" y="2743200"/>
-            <a:ext cx="182880" cy="182880"/>
-          </a:xfrm>
-          <a:prstGeom prst="rightArrow">
-            <a:avLst/>
-          </a:prstGeom>
-          <a:solidFill>
-            <a:srgbClr val="0D9488"/>
-          </a:solidFill>
-          <a:ln>
-            <a:noFill/>
-          </a:ln>
-        </p:spPr>
-        <p:style>
-          <a:lnRef idx="1">
-            <a:schemeClr val="accent1"/>
-          </a:lnRef>
-          <a:fillRef idx="3">
-            <a:schemeClr val="accent1"/>
-          </a:fillRef>
-          <a:effectRef idx="2">
-            <a:schemeClr val="accent1"/>
-          </a:effectRef>
-          <a:fontRef idx="minor">
-            <a:schemeClr val="lt1"/>
-          </a:fontRef>
-        </p:style>
-        <p:txBody>
-          <a:bodyPr rtlCol="0" anchor="ctr"/>
-          <a:lstStyle/>
-          <a:p>
-            <a:pPr algn="ctr"/>
-          </a:p>
-        </p:txBody>
-      </p:sp>
-      <p:sp>
-        <p:nvSpPr>
-          <p:cNvPr id="13" name="Rounded Rectangle 12"/>
-          <p:cNvSpPr/>
-          <p:nvPr/>
-        </p:nvSpPr>
-        <p:spPr>
-          <a:xfrm>
-            <a:off x="7589520" y="2011680"/>
-            <a:ext cx="1920240" cy="1645920"/>
-          </a:xfrm>
-          <a:prstGeom prst="roundRect">
-            <a:avLst/>
-          </a:prstGeom>
-          <a:solidFill>
-            <a:srgbClr val="F0F9FF"/>
-          </a:solidFill>
-          <a:ln w="25400">
-            <a:solidFill>
-              <a:srgbClr val="D97706"/>
-            </a:solidFill>
-          </a:ln>
-        </p:spPr>
-        <p:style>
-          <a:lnRef idx="1">
-            <a:schemeClr val="accent1"/>
-          </a:lnRef>
-          <a:fillRef idx="3">
-            <a:schemeClr val="accent1"/>
-          </a:fillRef>
-          <a:effectRef idx="2">
-            <a:schemeClr val="accent1"/>
-          </a:effectRef>
-          <a:fontRef idx="minor">
-            <a:schemeClr val="lt1"/>
-          </a:fontRef>
-        </p:style>
-        <p:txBody>
-          <a:bodyPr rtlCol="0" anchor="ctr" wrap="square"/>
-          <a:lstStyle/>
-          <a:p>
-            <a:pPr algn="ctr">
-              <a:spcAft>
-                <a:spcPts val="800"/>
-              </a:spcAft>
-              <a:defRPr sz="1100" b="1">
-                <a:solidFill>
-                  <a:srgbClr val="D97706"/>
-                </a:solidFill>
-                <a:latin typeface="Arial"/>
-              </a:defRPr>
-            </a:pPr>
-            <a:r>
-              <a:t>LANGKAH 4</a:t>
-            </a:r>
-          </a:p>
-          <a:p>
-            <a:pPr algn="ctr">
-              <a:defRPr sz="1600" b="1">
-                <a:solidFill>
-                  <a:srgbClr val="0F172A"/>
-                </a:solidFill>
-                <a:latin typeface="Arial"/>
-              </a:defRPr>
-            </a:pPr>
-            <a:r>
-              <a:t>VERIFY</a:t>
-            </a:r>
-          </a:p>
-        </p:txBody>
-      </p:sp>
-      <p:sp>
-        <p:nvSpPr>
-          <p:cNvPr id="14" name="TextBox 13"/>
-          <p:cNvSpPr txBox="1"/>
-          <p:nvPr/>
-        </p:nvSpPr>
-        <p:spPr>
-          <a:xfrm>
-            <a:off x="7498080" y="3931920"/>
-            <a:ext cx="2103120" cy="1828800"/>
-          </a:xfrm>
-          <a:prstGeom prst="rect">
-            <a:avLst/>
-          </a:prstGeom>
-          <a:noFill/>
-        </p:spPr>
-        <p:txBody>
-          <a:bodyPr wrap="square">
-            <a:spAutoFit/>
-          </a:bodyPr>
-          <a:lstStyle/>
-          <a:p>
-            <a:pPr algn="ctr">
-              <a:lnSpc>
-                <a:spcPct val="120000"/>
-              </a:lnSpc>
-              <a:defRPr sz="1100">
-                <a:solidFill>
-                  <a:srgbClr val="1E293B"/>
-                </a:solidFill>
-                <a:latin typeface="Arial"/>
-              </a:defRPr>
-            </a:pPr>
-            <a:r>
-              <a:t>Quality Inspection &amp; Frontline QMS</a:t>
-            </a:r>
-            <a:br/>
-            <a:r>
-              <a:t>Uji toleransi produk perakitan &amp; disposisi cacat (MRB).</a:t>
-            </a:r>
-          </a:p>
-        </p:txBody>
-      </p:sp>
-      <p:sp>
-        <p:nvSpPr>
-          <p:cNvPr id="15" name="Right Arrow 14"/>
-          <p:cNvSpPr/>
-          <p:nvPr/>
-        </p:nvSpPr>
-        <p:spPr>
-          <a:xfrm>
-            <a:off x="9601200" y="2743200"/>
-            <a:ext cx="182880" cy="182880"/>
-          </a:xfrm>
-          <a:prstGeom prst="rightArrow">
-            <a:avLst/>
-          </a:prstGeom>
-          <a:solidFill>
-            <a:srgbClr val="0D9488"/>
-          </a:solidFill>
-          <a:ln>
-            <a:noFill/>
-          </a:ln>
-        </p:spPr>
-        <p:style>
-          <a:lnRef idx="1">
-            <a:schemeClr val="accent1"/>
-          </a:lnRef>
-          <a:fillRef idx="3">
-            <a:schemeClr val="accent1"/>
-          </a:fillRef>
-          <a:effectRef idx="2">
-            <a:schemeClr val="accent1"/>
-          </a:effectRef>
-          <a:fontRef idx="minor">
-            <a:schemeClr val="lt1"/>
-          </a:fontRef>
-        </p:style>
-        <p:txBody>
-          <a:bodyPr rtlCol="0" anchor="ctr"/>
-          <a:lstStyle/>
-          <a:p>
-            <a:pPr algn="ctr"/>
-          </a:p>
-        </p:txBody>
-      </p:sp>
-      <p:sp>
-        <p:nvSpPr>
-          <p:cNvPr id="16" name="Rounded Rectangle 15"/>
-          <p:cNvSpPr/>
-          <p:nvPr/>
-        </p:nvSpPr>
-        <p:spPr>
-          <a:xfrm>
-            <a:off x="9875520" y="2011680"/>
-            <a:ext cx="1920240" cy="1645920"/>
-          </a:xfrm>
-          <a:prstGeom prst="roundRect">
-            <a:avLst/>
-          </a:prstGeom>
-          <a:solidFill>
-            <a:srgbClr val="F0F9FF"/>
-          </a:solidFill>
-          <a:ln w="25400">
-            <a:solidFill>
-              <a:srgbClr val="7C3AED"/>
-            </a:solidFill>
-          </a:ln>
-        </p:spPr>
-        <p:style>
-          <a:lnRef idx="1">
-            <a:schemeClr val="accent1"/>
-          </a:lnRef>
-          <a:fillRef idx="3">
-            <a:schemeClr val="accent1"/>
-          </a:fillRef>
-          <a:effectRef idx="2">
-            <a:schemeClr val="accent1"/>
-          </a:effectRef>
-          <a:fontRef idx="minor">
-            <a:schemeClr val="lt1"/>
-          </a:fontRef>
-        </p:style>
-        <p:txBody>
-          <a:bodyPr rtlCol="0" anchor="ctr" wrap="square"/>
-          <a:lstStyle/>
-          <a:p>
-            <a:pPr algn="ctr">
-              <a:spcAft>
-                <a:spcPts val="800"/>
-              </a:spcAft>
-              <a:defRPr sz="1100" b="1">
-                <a:solidFill>
-                  <a:srgbClr val="7C3AED"/>
-                </a:solidFill>
-                <a:latin typeface="Arial"/>
-              </a:defRPr>
-            </a:pPr>
-            <a:r>
-              <a:t>LANGKAH 5</a:t>
-            </a:r>
-          </a:p>
-          <a:p>
-            <a:pPr algn="ctr">
-              <a:defRPr sz="1600" b="1">
-                <a:solidFill>
-                  <a:srgbClr val="0F172A"/>
-                </a:solidFill>
-                <a:latin typeface="Arial"/>
-              </a:defRPr>
-            </a:pPr>
-            <a:r>
-              <a:t>ANALYZE</a:t>
-            </a:r>
-          </a:p>
-        </p:txBody>
-      </p:sp>
-      <p:sp>
-        <p:nvSpPr>
-          <p:cNvPr id="17" name="TextBox 16"/>
-          <p:cNvSpPr txBox="1"/>
-          <p:nvPr/>
-        </p:nvSpPr>
-        <p:spPr>
-          <a:xfrm>
-            <a:off x="9784080" y="3931920"/>
-            <a:ext cx="2103120" cy="1828800"/>
-          </a:xfrm>
-          <a:prstGeom prst="rect">
-            <a:avLst/>
-          </a:prstGeom>
-          <a:noFill/>
-        </p:spPr>
-        <p:txBody>
-          <a:bodyPr wrap="square">
-            <a:spAutoFit/>
-          </a:bodyPr>
-          <a:lstStyle/>
-          <a:p>
-            <a:pPr algn="ctr">
-              <a:lnSpc>
-                <a:spcPct val="120000"/>
-              </a:lnSpc>
-              <a:defRPr sz="1100">
-                <a:solidFill>
-                  <a:srgbClr val="1E293B"/>
-                </a:solidFill>
-                <a:latin typeface="Arial"/>
-              </a:defRPr>
-            </a:pPr>
-            <a:r>
-              <a:t>Dashboard OEE &amp; Analytics</a:t>
-            </a:r>
-            <a:br/>
-            <a:r>
-              <a:t>Konsolidasi pencapaian target per jam, OEE, &amp; cycle time.</a:t>
             </a:r>
           </a:p>
         </p:txBody>

--- a/mavi_mes_presentation_v2.pptx
+++ b/mavi_mes_presentation_v2.pptx
@@ -19,8 +19,9 @@
     <p:sldId id="264" r:id="rId13"/>
     <p:sldId id="265" r:id="rId14"/>
     <p:sldId id="266" r:id="rId15"/>
-    <p:sldId id="267" r:id="rId16"/>
-    <p:sldId id="268" r:id="rId17"/>
+    <p:sldId id="272" r:id="rId16"/>
+    <p:sldId id="267" r:id="rId17"/>
+    <p:sldId id="268" r:id="rId18"/>
   </p:sldIdLst>
   <p:sldSz cx="12188825" cy="6858000"/>
   <p:notesSz cx="6858000" cy="9144000"/>
@@ -3621,6 +3622,7 @@
               </a:defRPr>
             </a:pPr>
             <a:r>
+              <a:rPr dirty="0"/>
               <a:t>LANGKAH 01</a:t>
             </a:r>
           </a:p>
@@ -3637,6 +3639,7 @@
               </a:defRPr>
             </a:pPr>
             <a:r>
+              <a:rPr dirty="0"/>
               <a:t>INVENTORY</a:t>
             </a:r>
           </a:p>
@@ -3656,14 +3659,21 @@
               </a:defRPr>
             </a:pPr>
             <a:r>
+              <a:rPr dirty="0"/>
               <a:t>App Store Templates:</a:t>
             </a:r>
-            <a:br/>
-            <a:r>
+            <a:br>
+              <a:rPr dirty="0"/>
+            </a:br>
+            <a:r>
+              <a:rPr dirty="0"/>
               <a:t>• Material Warehouse</a:t>
             </a:r>
-            <a:br/>
-            <a:r>
+            <a:br>
+              <a:rPr dirty="0"/>
+            </a:br>
+            <a:r>
+              <a:rPr dirty="0"/>
               <a:t>• Inventory App Suite</a:t>
             </a:r>
           </a:p>
@@ -3683,11 +3693,55 @@
               </a:defRPr>
             </a:pPr>
             <a:r>
-              <a:t>Fungsi:</a:t>
-            </a:r>
-            <a:br/>
-            <a:r>
-              <a:t>Membangun tabel fondasi 'Inventory_Items' &amp; 'Material_Definitions'.</a:t>
+              <a:rPr dirty="0" err="1"/>
+              <a:t>Fungsi</a:t>
+            </a:r>
+            <a:r>
+              <a:rPr dirty="0"/>
+              <a:t>:</a:t>
+            </a:r>
+            <a:br>
+              <a:rPr dirty="0"/>
+            </a:br>
+            <a:r>
+              <a:rPr dirty="0" err="1"/>
+              <a:t>Membangun</a:t>
+            </a:r>
+            <a:r>
+              <a:rPr dirty="0"/>
+              <a:t> </a:t>
+            </a:r>
+            <a:r>
+              <a:rPr dirty="0" err="1"/>
+              <a:t>tabel</a:t>
+            </a:r>
+            <a:r>
+              <a:rPr dirty="0"/>
+              <a:t> </a:t>
+            </a:r>
+            <a:r>
+              <a:rPr dirty="0" err="1"/>
+              <a:t>fondasi</a:t>
+            </a:r>
+            <a:r>
+              <a:rPr dirty="0"/>
+              <a:t> '</a:t>
+            </a:r>
+            <a:r>
+              <a:rPr dirty="0" err="1"/>
+              <a:t>Inventory_Items</a:t>
+            </a:r>
+            <a:r>
+              <a:rPr dirty="0"/>
+              <a:t>' &amp; '</a:t>
+            </a:r>
+            <a:r>
+              <a:rPr dirty="0" err="1"/>
+              <a:t>Material_Definitions</a:t>
+            </a:r>
+            <a:r>
+              <a:rPr dirty="0"/>
+              <a:t>'.</a:t>
             </a:r>
           </a:p>
           <a:p>
@@ -3703,11 +3757,47 @@
               </a:defRPr>
             </a:pPr>
             <a:r>
-              <a:t>💡 Langkah Verifikasi:</a:t>
-            </a:r>
-            <a:br/>
-            <a:r>
-              <a:t>Buka Material Warehouse App. Pastikan dummy unit 'DEMO-CYL-A1' muncul di Rak BIN-12.</a:t>
+              <a:rPr dirty="0"/>
+              <a:t>💡 Langkah </a:t>
+            </a:r>
+            <a:r>
+              <a:rPr dirty="0" err="1"/>
+              <a:t>Verifikasi</a:t>
+            </a:r>
+            <a:r>
+              <a:rPr dirty="0"/>
+              <a:t>:</a:t>
+            </a:r>
+            <a:br>
+              <a:rPr dirty="0"/>
+            </a:br>
+            <a:r>
+              <a:rPr dirty="0"/>
+              <a:t>Buka Material Warehouse App. </a:t>
+            </a:r>
+            <a:r>
+              <a:rPr dirty="0" err="1"/>
+              <a:t>Pastikan</a:t>
+            </a:r>
+            <a:r>
+              <a:rPr dirty="0"/>
+              <a:t> dummy unit 'DEMO-CYL-A1' </a:t>
+            </a:r>
+            <a:r>
+              <a:rPr dirty="0" err="1"/>
+              <a:t>muncul</a:t>
+            </a:r>
+            <a:r>
+              <a:rPr dirty="0"/>
+              <a:t> di </a:t>
+            </a:r>
+            <a:r>
+              <a:rPr dirty="0" err="1"/>
+              <a:t>Rak</a:t>
+            </a:r>
+            <a:r>
+              <a:rPr dirty="0"/>
+              <a:t> BIN-12.</a:t>
             </a:r>
           </a:p>
         </p:txBody>
@@ -5918,6 +6008,36 @@
 <file path=ppt/slides/slide15.xml><?xml version="1.0" encoding="utf-8"?>
 <p:sld xmlns:a="http://schemas.openxmlformats.org/drawingml/2006/main" xmlns:r="http://schemas.openxmlformats.org/officeDocument/2006/relationships" xmlns:p="http://schemas.openxmlformats.org/presentationml/2006/main">
   <p:cSld>
+    <p:spTree>
+      <p:nvGrpSpPr>
+        <p:cNvPr id="1" name=""/>
+        <p:cNvGrpSpPr/>
+        <p:nvPr/>
+      </p:nvGrpSpPr>
+      <p:grpSpPr>
+        <a:xfrm>
+          <a:off x="0" y="0"/>
+          <a:ext cx="0" cy="0"/>
+          <a:chOff x="0" y="0"/>
+          <a:chExt cx="0" cy="0"/>
+        </a:xfrm>
+      </p:grpSpPr>
+    </p:spTree>
+    <p:extLst>
+      <p:ext uri="{BB962C8B-B14F-4D97-AF65-F5344CB8AC3E}">
+        <p14:creationId xmlns:p14="http://schemas.microsoft.com/office/powerpoint/2010/main" val="3175545449"/>
+      </p:ext>
+    </p:extLst>
+  </p:cSld>
+  <p:clrMapOvr>
+    <a:masterClrMapping/>
+  </p:clrMapOvr>
+</p:sld>
+</file>
+
+<file path=ppt/slides/slide16.xml><?xml version="1.0" encoding="utf-8"?>
+<p:sld xmlns:a="http://schemas.openxmlformats.org/drawingml/2006/main" xmlns:r="http://schemas.openxmlformats.org/officeDocument/2006/relationships" xmlns:p="http://schemas.openxmlformats.org/presentationml/2006/main">
+  <p:cSld>
     <p:bg>
       <p:bgPr>
         <a:solidFill>
@@ -6212,7 +6332,7 @@
 </p:sld>
 </file>
 
-<file path=ppt/slides/slide16.xml><?xml version="1.0" encoding="utf-8"?>
+<file path=ppt/slides/slide17.xml><?xml version="1.0" encoding="utf-8"?>
 <p:sld xmlns:a="http://schemas.openxmlformats.org/drawingml/2006/main" xmlns:r="http://schemas.openxmlformats.org/officeDocument/2006/relationships" xmlns:p="http://schemas.openxmlformats.org/presentationml/2006/main">
   <p:cSld>
     <p:bg>
@@ -6420,8 +6540,8 @@
         </p:nvSpPr>
         <p:spPr>
           <a:xfrm>
-            <a:off x="6908800" y="1997839"/>
-            <a:ext cx="4978400" cy="2862322"/>
+            <a:off x="6690437" y="518067"/>
+            <a:ext cx="4978400" cy="3693319"/>
           </a:xfrm>
           <a:prstGeom prst="rect">
             <a:avLst/>
@@ -6438,6 +6558,8 @@
               <a:rPr lang="nn-NO" b="1" dirty="0"/>
               <a:t>Dorong keputusan yang berdampak besar dengan data operasional real-time</a:t>
             </a:r>
+          </a:p>
+          <a:p>
             <a:endParaRPr lang="nn-NO" dirty="0"/>
           </a:p>
           <a:p>
@@ -6458,6 +6580,10 @@
             </a:r>
           </a:p>
           <a:p>
+            <a:pPr lvl="1"/>
+            <a:endParaRPr lang="nn-NO" dirty="0"/>
+          </a:p>
+          <a:p>
             <a:pPr lvl="1">
               <a:buFont typeface="Arial" panose="020B0604020202020204" pitchFamily="34" charset="0"/>
               <a:buChar char="•"/>
@@ -6466,6 +6592,10 @@
               <a:rPr lang="nn-NO" dirty="0"/>
               <a:t>Tingkatkan produktivitas dengan peringatan real-time dan analisis kinerja</a:t>
             </a:r>
+          </a:p>
+          <a:p>
+            <a:pPr lvl="1"/>
+            <a:endParaRPr lang="nn-NO" dirty="0"/>
           </a:p>
           <a:p>
             <a:pPr lvl="1">
@@ -6594,8 +6724,8 @@
         </p:nvSpPr>
         <p:spPr>
           <a:xfrm>
-            <a:off x="6883401" y="2054705"/>
-            <a:ext cx="4775199" cy="2862322"/>
+            <a:off x="6664740" y="887399"/>
+            <a:ext cx="4775199" cy="3970318"/>
           </a:xfrm>
           <a:prstGeom prst="rect">
             <a:avLst/>
@@ -6644,6 +6774,9 @@
               <a:rPr lang="en-ID" b="1" dirty="0" err="1"/>
               <a:t>produksi</a:t>
             </a:r>
+            <a:endParaRPr lang="en-ID" b="1" dirty="0"/>
+          </a:p>
+          <a:p>
             <a:endParaRPr lang="en-ID" dirty="0"/>
           </a:p>
           <a:p>
@@ -6695,6 +6828,8 @@
               <a:rPr lang="en-ID" b="1" dirty="0"/>
               <a:t> Anda?</a:t>
             </a:r>
+          </a:p>
+          <a:p>
             <a:endParaRPr lang="en-ID" dirty="0"/>
           </a:p>
           <a:p>
@@ -6736,6 +6871,10 @@
             </a:r>
           </a:p>
           <a:p>
+            <a:pPr lvl="1"/>
+            <a:endParaRPr lang="en-ID" dirty="0"/>
+          </a:p>
+          <a:p>
             <a:pPr lvl="1">
               <a:buFont typeface="Arial" panose="020B0604020202020204" pitchFamily="34" charset="0"/>
               <a:buChar char="•"/>
@@ -6764,6 +6903,10 @@
               <a:rPr lang="en-ID" dirty="0"/>
               <a:t> material (material flow)</a:t>
             </a:r>
+          </a:p>
+          <a:p>
+            <a:pPr lvl="1"/>
+            <a:endParaRPr lang="en-ID" dirty="0"/>
           </a:p>
           <a:p>
             <a:pPr lvl="1">
@@ -6923,7 +7066,7 @@
         </p:blipFill>
         <p:spPr>
           <a:xfrm>
-            <a:off x="-297170" y="1320800"/>
+            <a:off x="-476074" y="1376089"/>
             <a:ext cx="6689503" cy="4934879"/>
           </a:xfrm>
           <a:prstGeom prst="rect">
@@ -6945,8 +7088,8 @@
         </p:nvSpPr>
         <p:spPr>
           <a:xfrm>
-            <a:off x="6094412" y="1535205"/>
-            <a:ext cx="6249988" cy="2308324"/>
+            <a:off x="5506278" y="916364"/>
+            <a:ext cx="6510130" cy="3139321"/>
           </a:xfrm>
           <a:prstGeom prst="rect">
             <a:avLst/>
@@ -7050,6 +7193,8 @@
               <a:rPr lang="en-ID" b="1" dirty="0"/>
               <a:t> Anda?</a:t>
             </a:r>
+          </a:p>
+          <a:p>
             <a:endParaRPr lang="en-ID" dirty="0"/>
           </a:p>
           <a:p>
@@ -7107,6 +7252,10 @@
             </a:r>
           </a:p>
           <a:p>
+            <a:pPr lvl="1"/>
+            <a:endParaRPr lang="en-ID" dirty="0"/>
+          </a:p>
+          <a:p>
             <a:pPr lvl="1">
               <a:buFont typeface="Arial" panose="020B0604020202020204" pitchFamily="34" charset="0"/>
               <a:buChar char="•"/>
@@ -7187,6 +7336,10 @@
               <a:rPr lang="en-ID" dirty="0" err="1"/>
               <a:t>logis</a:t>
             </a:r>
+            <a:endParaRPr lang="en-ID" dirty="0"/>
+          </a:p>
+          <a:p>
+            <a:pPr lvl="1"/>
             <a:endParaRPr lang="en-ID" dirty="0"/>
           </a:p>
           <a:p>
@@ -7304,7 +7457,7 @@
         </p:nvSpPr>
         <p:spPr>
           <a:xfrm>
-            <a:off x="364066" y="518067"/>
+            <a:off x="0" y="547032"/>
             <a:ext cx="6096000" cy="369332"/>
           </a:xfrm>
           <a:prstGeom prst="rect">
@@ -7318,6 +7471,7 @@
           </a:bodyPr>
           <a:lstStyle/>
           <a:p>
+            <a:pPr algn="ctr"/>
             <a:r>
               <a:rPr lang="en-ID" b="1" i="0" dirty="0">
                 <a:solidFill>
@@ -7557,6 +7711,7 @@
               </a:defRPr>
             </a:pPr>
             <a:r>
+              <a:rPr dirty="0"/>
               <a:t>02</a:t>
             </a:r>
           </a:p>
@@ -7573,8 +7728,26 @@
               </a:defRPr>
             </a:pPr>
             <a:r>
-              <a:t>Eksekusi Lini Produksi</a:t>
-            </a:r>
+              <a:rPr dirty="0" err="1"/>
+              <a:t>Eksekusi</a:t>
+            </a:r>
+            <a:r>
+              <a:rPr dirty="0"/>
+              <a:t> </a:t>
+            </a:r>
+            <a:r>
+              <a:rPr dirty="0" err="1"/>
+              <a:t>Lini</a:t>
+            </a:r>
+            <a:r>
+              <a:rPr dirty="0"/>
+              <a:t> </a:t>
+            </a:r>
+            <a:r>
+              <a:rPr dirty="0" err="1"/>
+              <a:t>Produksi</a:t>
+            </a:r>
+            <a:endParaRPr dirty="0"/>
           </a:p>
           <a:p>
             <a:pPr>
@@ -7589,7 +7762,84 @@
               </a:defRPr>
             </a:pPr>
             <a:r>
-              <a:t>Mengarahkan operator melalui instruksi kerja digital terintegrasi, melacak OEE secara real-time, dan menghentikan stasiun saat Andon downtime.</a:t>
+              <a:rPr dirty="0" err="1"/>
+              <a:t>Mengarahkan</a:t>
+            </a:r>
+            <a:r>
+              <a:rPr dirty="0"/>
+              <a:t> operator </a:t>
+            </a:r>
+            <a:r>
+              <a:rPr dirty="0" err="1"/>
+              <a:t>melalui</a:t>
+            </a:r>
+            <a:r>
+              <a:rPr dirty="0"/>
+              <a:t> </a:t>
+            </a:r>
+            <a:r>
+              <a:rPr dirty="0" err="1"/>
+              <a:t>instruksi</a:t>
+            </a:r>
+            <a:r>
+              <a:rPr dirty="0"/>
+              <a:t> </a:t>
+            </a:r>
+            <a:r>
+              <a:rPr dirty="0" err="1"/>
+              <a:t>kerja</a:t>
+            </a:r>
+            <a:r>
+              <a:rPr dirty="0"/>
+              <a:t> digital </a:t>
+            </a:r>
+            <a:r>
+              <a:rPr dirty="0" err="1"/>
+              <a:t>terintegrasi</a:t>
+            </a:r>
+            <a:r>
+              <a:rPr dirty="0"/>
+              <a:t>, </a:t>
+            </a:r>
+            <a:r>
+              <a:rPr dirty="0" err="1"/>
+              <a:t>melacak</a:t>
+            </a:r>
+            <a:r>
+              <a:rPr dirty="0"/>
+              <a:t> OEE </a:t>
+            </a:r>
+            <a:r>
+              <a:rPr dirty="0" err="1"/>
+              <a:t>secara</a:t>
+            </a:r>
+            <a:r>
+              <a:rPr dirty="0"/>
+              <a:t> real-time, dan </a:t>
+            </a:r>
+            <a:r>
+              <a:rPr dirty="0" err="1"/>
+              <a:t>menghentikan</a:t>
+            </a:r>
+            <a:r>
+              <a:rPr dirty="0"/>
+              <a:t> </a:t>
+            </a:r>
+            <a:r>
+              <a:rPr dirty="0" err="1"/>
+              <a:t>stasiun</a:t>
+            </a:r>
+            <a:r>
+              <a:rPr dirty="0"/>
+              <a:t> </a:t>
+            </a:r>
+            <a:r>
+              <a:rPr dirty="0" err="1"/>
+              <a:t>saat</a:t>
+            </a:r>
+            <a:r>
+              <a:rPr dirty="0"/>
+              <a:t> Andon downtime.</a:t>
             </a:r>
           </a:p>
         </p:txBody>
